--- a/Presentation/Financial_Inclusion_Presentation.pptx
+++ b/Presentation/Financial_Inclusion_Presentation.pptx
@@ -22,7 +22,11 @@
     <p:sldId id="270" r:id="rId16"/>
     <p:sldId id="271" r:id="rId17"/>
     <p:sldId id="272" r:id="rId18"/>
-    <p:sldId id="273" r:id="rId19"/>
+    <p:sldId id="277" r:id="rId19"/>
+    <p:sldId id="278" r:id="rId20"/>
+    <p:sldId id="279" r:id="rId21"/>
+    <p:sldId id="273" r:id="rId22"/>
+    <p:sldId id="282" r:id="rId23"/>
   </p:sldIdLst>
   <p:sldSz cx="9144000" cy="6858000" type="screen4x3"/>
   <p:notesSz cx="6858000" cy="9144000"/>
@@ -3879,6 +3883,788 @@
     <dgm:fillClrLst meth="repeat">
       <a:schemeClr val="accent1">
         <a:tint val="60000"/>
+      </a:schemeClr>
+    </dgm:fillClrLst>
+    <dgm:linClrLst meth="repeat">
+      <a:schemeClr val="lt1"/>
+    </dgm:linClrLst>
+    <dgm:effectClrLst/>
+    <dgm:txLinClrLst/>
+    <dgm:txFillClrLst meth="repeat">
+      <a:schemeClr val="dk1"/>
+    </dgm:txFillClrLst>
+    <dgm:txEffectClrLst/>
+  </dgm:styleLbl>
+  <dgm:styleLbl name="revTx">
+    <dgm:fillClrLst meth="repeat">
+      <a:schemeClr val="lt1">
+        <a:alpha val="0"/>
+      </a:schemeClr>
+    </dgm:fillClrLst>
+    <dgm:linClrLst meth="repeat">
+      <a:schemeClr val="dk1">
+        <a:alpha val="0"/>
+      </a:schemeClr>
+    </dgm:linClrLst>
+    <dgm:effectClrLst/>
+    <dgm:txLinClrLst/>
+    <dgm:txFillClrLst meth="repeat">
+      <a:schemeClr val="tx1"/>
+    </dgm:txFillClrLst>
+    <dgm:txEffectClrLst/>
+  </dgm:styleLbl>
+</dgm:colorsDef>
+</file>
+
+<file path=ppt/diagrams/colors6.xml><?xml version="1.0" encoding="utf-8"?>
+<dgm:colorsDef xmlns:dgm="http://schemas.openxmlformats.org/drawingml/2006/diagram" xmlns:a="http://schemas.openxmlformats.org/drawingml/2006/main" uniqueId="urn:microsoft.com/office/officeart/2005/8/colors/colorful2">
+  <dgm:title val=""/>
+  <dgm:desc val=""/>
+  <dgm:catLst>
+    <dgm:cat type="colorful" pri="10200"/>
+  </dgm:catLst>
+  <dgm:styleLbl name="node0">
+    <dgm:fillClrLst meth="repeat">
+      <a:schemeClr val="accent1"/>
+    </dgm:fillClrLst>
+    <dgm:linClrLst meth="repeat">
+      <a:schemeClr val="lt1"/>
+    </dgm:linClrLst>
+    <dgm:effectClrLst/>
+    <dgm:txLinClrLst/>
+    <dgm:txFillClrLst/>
+    <dgm:txEffectClrLst/>
+  </dgm:styleLbl>
+  <dgm:styleLbl name="node1">
+    <dgm:fillClrLst>
+      <a:schemeClr val="accent2"/>
+      <a:schemeClr val="accent3"/>
+    </dgm:fillClrLst>
+    <dgm:linClrLst meth="repeat">
+      <a:schemeClr val="lt1"/>
+    </dgm:linClrLst>
+    <dgm:effectClrLst/>
+    <dgm:txLinClrLst/>
+    <dgm:txFillClrLst/>
+    <dgm:txEffectClrLst/>
+  </dgm:styleLbl>
+  <dgm:styleLbl name="alignNode1">
+    <dgm:fillClrLst>
+      <a:schemeClr val="accent2"/>
+      <a:schemeClr val="accent3"/>
+    </dgm:fillClrLst>
+    <dgm:linClrLst>
+      <a:schemeClr val="accent2"/>
+      <a:schemeClr val="accent3"/>
+    </dgm:linClrLst>
+    <dgm:effectClrLst/>
+    <dgm:txLinClrLst/>
+    <dgm:txFillClrLst/>
+    <dgm:txEffectClrLst/>
+  </dgm:styleLbl>
+  <dgm:styleLbl name="lnNode1">
+    <dgm:fillClrLst>
+      <a:schemeClr val="accent2"/>
+      <a:schemeClr val="accent3"/>
+    </dgm:fillClrLst>
+    <dgm:linClrLst meth="repeat">
+      <a:schemeClr val="lt1"/>
+    </dgm:linClrLst>
+    <dgm:effectClrLst/>
+    <dgm:txLinClrLst/>
+    <dgm:txFillClrLst/>
+    <dgm:txEffectClrLst/>
+  </dgm:styleLbl>
+  <dgm:styleLbl name="vennNode1">
+    <dgm:fillClrLst>
+      <a:schemeClr val="accent2">
+        <a:alpha val="50000"/>
+      </a:schemeClr>
+      <a:schemeClr val="accent3">
+        <a:alpha val="50000"/>
+      </a:schemeClr>
+    </dgm:fillClrLst>
+    <dgm:linClrLst meth="repeat">
+      <a:schemeClr val="lt1"/>
+    </dgm:linClrLst>
+    <dgm:effectClrLst/>
+    <dgm:txLinClrLst/>
+    <dgm:txFillClrLst/>
+    <dgm:txEffectClrLst/>
+  </dgm:styleLbl>
+  <dgm:styleLbl name="node2">
+    <dgm:fillClrLst>
+      <a:schemeClr val="accent3"/>
+    </dgm:fillClrLst>
+    <dgm:linClrLst meth="repeat">
+      <a:schemeClr val="lt1"/>
+    </dgm:linClrLst>
+    <dgm:effectClrLst/>
+    <dgm:txLinClrLst/>
+    <dgm:txFillClrLst/>
+    <dgm:txEffectClrLst/>
+  </dgm:styleLbl>
+  <dgm:styleLbl name="node3">
+    <dgm:fillClrLst>
+      <a:schemeClr val="accent4"/>
+    </dgm:fillClrLst>
+    <dgm:linClrLst meth="repeat">
+      <a:schemeClr val="lt1"/>
+    </dgm:linClrLst>
+    <dgm:effectClrLst/>
+    <dgm:txLinClrLst/>
+    <dgm:txFillClrLst/>
+    <dgm:txEffectClrLst/>
+  </dgm:styleLbl>
+  <dgm:styleLbl name="node4">
+    <dgm:fillClrLst>
+      <a:schemeClr val="accent5"/>
+    </dgm:fillClrLst>
+    <dgm:linClrLst meth="repeat">
+      <a:schemeClr val="lt1"/>
+    </dgm:linClrLst>
+    <dgm:effectClrLst/>
+    <dgm:txLinClrLst/>
+    <dgm:txFillClrLst/>
+    <dgm:txEffectClrLst/>
+  </dgm:styleLbl>
+  <dgm:styleLbl name="fgImgPlace1">
+    <dgm:fillClrLst>
+      <a:schemeClr val="accent2">
+        <a:tint val="50000"/>
+      </a:schemeClr>
+      <a:schemeClr val="accent3">
+        <a:tint val="50000"/>
+      </a:schemeClr>
+    </dgm:fillClrLst>
+    <dgm:linClrLst meth="repeat">
+      <a:schemeClr val="lt1"/>
+    </dgm:linClrLst>
+    <dgm:effectClrLst/>
+    <dgm:txLinClrLst/>
+    <dgm:txFillClrLst meth="repeat">
+      <a:schemeClr val="lt1"/>
+    </dgm:txFillClrLst>
+    <dgm:txEffectClrLst/>
+  </dgm:styleLbl>
+  <dgm:styleLbl name="alignImgPlace1">
+    <dgm:fillClrLst>
+      <a:schemeClr val="accent2">
+        <a:tint val="50000"/>
+      </a:schemeClr>
+      <a:schemeClr val="accent3">
+        <a:tint val="20000"/>
+      </a:schemeClr>
+    </dgm:fillClrLst>
+    <dgm:linClrLst meth="repeat">
+      <a:schemeClr val="lt1"/>
+    </dgm:linClrLst>
+    <dgm:effectClrLst/>
+    <dgm:txLinClrLst/>
+    <dgm:txFillClrLst meth="repeat">
+      <a:schemeClr val="lt1"/>
+    </dgm:txFillClrLst>
+    <dgm:txEffectClrLst/>
+  </dgm:styleLbl>
+  <dgm:styleLbl name="bgImgPlace1">
+    <dgm:fillClrLst>
+      <a:schemeClr val="accent2">
+        <a:tint val="50000"/>
+      </a:schemeClr>
+      <a:schemeClr val="accent3">
+        <a:tint val="20000"/>
+      </a:schemeClr>
+    </dgm:fillClrLst>
+    <dgm:linClrLst meth="repeat">
+      <a:schemeClr val="lt1"/>
+    </dgm:linClrLst>
+    <dgm:effectClrLst/>
+    <dgm:txLinClrLst/>
+    <dgm:txFillClrLst meth="repeat">
+      <a:schemeClr val="lt1"/>
+    </dgm:txFillClrLst>
+    <dgm:txEffectClrLst/>
+  </dgm:styleLbl>
+  <dgm:styleLbl name="sibTrans2D1">
+    <dgm:fillClrLst>
+      <a:schemeClr val="accent2"/>
+      <a:schemeClr val="accent3"/>
+    </dgm:fillClrLst>
+    <dgm:linClrLst meth="repeat">
+      <a:schemeClr val="lt1"/>
+    </dgm:linClrLst>
+    <dgm:effectClrLst/>
+    <dgm:txLinClrLst/>
+    <dgm:txFillClrLst/>
+    <dgm:txEffectClrLst/>
+  </dgm:styleLbl>
+  <dgm:styleLbl name="fgSibTrans2D1">
+    <dgm:fillClrLst>
+      <a:schemeClr val="accent2"/>
+      <a:schemeClr val="accent3"/>
+    </dgm:fillClrLst>
+    <dgm:linClrLst meth="repeat">
+      <a:schemeClr val="lt1"/>
+    </dgm:linClrLst>
+    <dgm:effectClrLst/>
+    <dgm:txLinClrLst/>
+    <dgm:txFillClrLst meth="repeat">
+      <a:schemeClr val="lt1"/>
+    </dgm:txFillClrLst>
+    <dgm:txEffectClrLst/>
+  </dgm:styleLbl>
+  <dgm:styleLbl name="bgSibTrans2D1">
+    <dgm:fillClrLst>
+      <a:schemeClr val="accent2"/>
+      <a:schemeClr val="accent3"/>
+    </dgm:fillClrLst>
+    <dgm:linClrLst meth="repeat">
+      <a:schemeClr val="lt1"/>
+    </dgm:linClrLst>
+    <dgm:effectClrLst/>
+    <dgm:txLinClrLst/>
+    <dgm:txFillClrLst meth="repeat">
+      <a:schemeClr val="lt1"/>
+    </dgm:txFillClrLst>
+    <dgm:txEffectClrLst/>
+  </dgm:styleLbl>
+  <dgm:styleLbl name="sibTrans1D1">
+    <dgm:fillClrLst/>
+    <dgm:linClrLst>
+      <a:schemeClr val="accent2"/>
+      <a:schemeClr val="accent3"/>
+    </dgm:linClrLst>
+    <dgm:effectClrLst/>
+    <dgm:txLinClrLst/>
+    <dgm:txFillClrLst meth="repeat">
+      <a:schemeClr val="tx1"/>
+    </dgm:txFillClrLst>
+    <dgm:txEffectClrLst/>
+  </dgm:styleLbl>
+  <dgm:styleLbl name="callout">
+    <dgm:fillClrLst meth="repeat">
+      <a:schemeClr val="accent2"/>
+    </dgm:fillClrLst>
+    <dgm:linClrLst meth="repeat">
+      <a:schemeClr val="accent2">
+        <a:tint val="50000"/>
+      </a:schemeClr>
+    </dgm:linClrLst>
+    <dgm:effectClrLst/>
+    <dgm:txLinClrLst/>
+    <dgm:txFillClrLst meth="repeat">
+      <a:schemeClr val="tx1"/>
+    </dgm:txFillClrLst>
+    <dgm:txEffectClrLst/>
+  </dgm:styleLbl>
+  <dgm:styleLbl name="asst0">
+    <dgm:fillClrLst meth="repeat">
+      <a:schemeClr val="accent2"/>
+    </dgm:fillClrLst>
+    <dgm:linClrLst meth="repeat">
+      <a:schemeClr val="lt1">
+        <a:shade val="80000"/>
+      </a:schemeClr>
+    </dgm:linClrLst>
+    <dgm:effectClrLst/>
+    <dgm:txLinClrLst/>
+    <dgm:txFillClrLst/>
+    <dgm:txEffectClrLst/>
+  </dgm:styleLbl>
+  <dgm:styleLbl name="asst1">
+    <dgm:fillClrLst meth="repeat">
+      <a:schemeClr val="accent3"/>
+    </dgm:fillClrLst>
+    <dgm:linClrLst meth="repeat">
+      <a:schemeClr val="lt1">
+        <a:shade val="80000"/>
+      </a:schemeClr>
+    </dgm:linClrLst>
+    <dgm:effectClrLst/>
+    <dgm:txLinClrLst/>
+    <dgm:txFillClrLst/>
+    <dgm:txEffectClrLst/>
+  </dgm:styleLbl>
+  <dgm:styleLbl name="asst2">
+    <dgm:fillClrLst>
+      <a:schemeClr val="accent4"/>
+    </dgm:fillClrLst>
+    <dgm:linClrLst meth="repeat">
+      <a:schemeClr val="lt1"/>
+    </dgm:linClrLst>
+    <dgm:effectClrLst/>
+    <dgm:txLinClrLst/>
+    <dgm:txFillClrLst/>
+    <dgm:txEffectClrLst/>
+  </dgm:styleLbl>
+  <dgm:styleLbl name="asst3">
+    <dgm:fillClrLst>
+      <a:schemeClr val="accent5"/>
+    </dgm:fillClrLst>
+    <dgm:linClrLst meth="repeat">
+      <a:schemeClr val="lt1"/>
+    </dgm:linClrLst>
+    <dgm:effectClrLst/>
+    <dgm:txLinClrLst/>
+    <dgm:txFillClrLst/>
+    <dgm:txEffectClrLst/>
+  </dgm:styleLbl>
+  <dgm:styleLbl name="asst4">
+    <dgm:fillClrLst>
+      <a:schemeClr val="accent6"/>
+    </dgm:fillClrLst>
+    <dgm:linClrLst meth="repeat">
+      <a:schemeClr val="lt1"/>
+    </dgm:linClrLst>
+    <dgm:effectClrLst/>
+    <dgm:txLinClrLst/>
+    <dgm:txFillClrLst/>
+    <dgm:txEffectClrLst/>
+  </dgm:styleLbl>
+  <dgm:styleLbl name="parChTrans2D1">
+    <dgm:fillClrLst meth="repeat">
+      <a:schemeClr val="accent2"/>
+    </dgm:fillClrLst>
+    <dgm:linClrLst meth="repeat">
+      <a:schemeClr val="lt1"/>
+    </dgm:linClrLst>
+    <dgm:effectClrLst/>
+    <dgm:txLinClrLst/>
+    <dgm:txFillClrLst meth="repeat">
+      <a:schemeClr val="lt1"/>
+    </dgm:txFillClrLst>
+    <dgm:txEffectClrLst/>
+  </dgm:styleLbl>
+  <dgm:styleLbl name="parChTrans2D2">
+    <dgm:fillClrLst meth="repeat">
+      <a:schemeClr val="accent3"/>
+    </dgm:fillClrLst>
+    <dgm:linClrLst meth="repeat">
+      <a:schemeClr val="lt1"/>
+    </dgm:linClrLst>
+    <dgm:effectClrLst/>
+    <dgm:txLinClrLst/>
+    <dgm:txFillClrLst/>
+    <dgm:txEffectClrLst/>
+  </dgm:styleLbl>
+  <dgm:styleLbl name="parChTrans2D3">
+    <dgm:fillClrLst meth="repeat">
+      <a:schemeClr val="accent4"/>
+    </dgm:fillClrLst>
+    <dgm:linClrLst meth="repeat">
+      <a:schemeClr val="lt1"/>
+    </dgm:linClrLst>
+    <dgm:effectClrLst/>
+    <dgm:txLinClrLst/>
+    <dgm:txFillClrLst/>
+    <dgm:txEffectClrLst/>
+  </dgm:styleLbl>
+  <dgm:styleLbl name="parChTrans2D4">
+    <dgm:fillClrLst meth="repeat">
+      <a:schemeClr val="accent5"/>
+    </dgm:fillClrLst>
+    <dgm:linClrLst meth="repeat">
+      <a:schemeClr val="lt1"/>
+    </dgm:linClrLst>
+    <dgm:effectClrLst/>
+    <dgm:txLinClrLst/>
+    <dgm:txFillClrLst meth="repeat">
+      <a:schemeClr val="lt1"/>
+    </dgm:txFillClrLst>
+    <dgm:txEffectClrLst/>
+  </dgm:styleLbl>
+  <dgm:styleLbl name="parChTrans1D1">
+    <dgm:fillClrLst meth="repeat">
+      <a:schemeClr val="accent2"/>
+    </dgm:fillClrLst>
+    <dgm:linClrLst meth="repeat">
+      <a:schemeClr val="accent2"/>
+    </dgm:linClrLst>
+    <dgm:effectClrLst/>
+    <dgm:txLinClrLst/>
+    <dgm:txFillClrLst meth="repeat">
+      <a:schemeClr val="tx1"/>
+    </dgm:txFillClrLst>
+    <dgm:txEffectClrLst/>
+  </dgm:styleLbl>
+  <dgm:styleLbl name="parChTrans1D2">
+    <dgm:fillClrLst meth="repeat">
+      <a:schemeClr val="accent2">
+        <a:tint val="90000"/>
+      </a:schemeClr>
+    </dgm:fillClrLst>
+    <dgm:linClrLst meth="repeat">
+      <a:schemeClr val="accent3"/>
+    </dgm:linClrLst>
+    <dgm:effectClrLst/>
+    <dgm:txLinClrLst/>
+    <dgm:txFillClrLst meth="repeat">
+      <a:schemeClr val="tx1"/>
+    </dgm:txFillClrLst>
+    <dgm:txEffectClrLst/>
+  </dgm:styleLbl>
+  <dgm:styleLbl name="parChTrans1D3">
+    <dgm:fillClrLst meth="repeat">
+      <a:schemeClr val="accent2">
+        <a:tint val="70000"/>
+      </a:schemeClr>
+    </dgm:fillClrLst>
+    <dgm:linClrLst meth="repeat">
+      <a:schemeClr val="accent4"/>
+    </dgm:linClrLst>
+    <dgm:effectClrLst/>
+    <dgm:txLinClrLst/>
+    <dgm:txFillClrLst meth="repeat">
+      <a:schemeClr val="tx1"/>
+    </dgm:txFillClrLst>
+    <dgm:txEffectClrLst/>
+  </dgm:styleLbl>
+  <dgm:styleLbl name="parChTrans1D4">
+    <dgm:fillClrLst meth="repeat">
+      <a:schemeClr val="accent2">
+        <a:tint val="50000"/>
+      </a:schemeClr>
+    </dgm:fillClrLst>
+    <dgm:linClrLst meth="repeat">
+      <a:schemeClr val="accent5"/>
+    </dgm:linClrLst>
+    <dgm:effectClrLst/>
+    <dgm:txLinClrLst/>
+    <dgm:txFillClrLst meth="repeat">
+      <a:schemeClr val="tx1"/>
+    </dgm:txFillClrLst>
+    <dgm:txEffectClrLst/>
+  </dgm:styleLbl>
+  <dgm:styleLbl name="fgAcc1">
+    <dgm:fillClrLst meth="repeat">
+      <a:schemeClr val="lt1">
+        <a:alpha val="90000"/>
+      </a:schemeClr>
+    </dgm:fillClrLst>
+    <dgm:linClrLst>
+      <a:schemeClr val="accent2"/>
+      <a:schemeClr val="accent3"/>
+    </dgm:linClrLst>
+    <dgm:effectClrLst/>
+    <dgm:txLinClrLst/>
+    <dgm:txFillClrLst meth="repeat">
+      <a:schemeClr val="dk1"/>
+    </dgm:txFillClrLst>
+    <dgm:txEffectClrLst/>
+  </dgm:styleLbl>
+  <dgm:styleLbl name="conFgAcc1">
+    <dgm:fillClrLst meth="repeat">
+      <a:schemeClr val="lt1">
+        <a:alpha val="90000"/>
+      </a:schemeClr>
+    </dgm:fillClrLst>
+    <dgm:linClrLst>
+      <a:schemeClr val="accent2"/>
+      <a:schemeClr val="accent3"/>
+    </dgm:linClrLst>
+    <dgm:effectClrLst/>
+    <dgm:txLinClrLst/>
+    <dgm:txFillClrLst meth="repeat">
+      <a:schemeClr val="dk1"/>
+    </dgm:txFillClrLst>
+    <dgm:txEffectClrLst/>
+  </dgm:styleLbl>
+  <dgm:styleLbl name="alignAcc1">
+    <dgm:fillClrLst meth="repeat">
+      <a:schemeClr val="lt1">
+        <a:alpha val="90000"/>
+      </a:schemeClr>
+    </dgm:fillClrLst>
+    <dgm:linClrLst>
+      <a:schemeClr val="accent2"/>
+      <a:schemeClr val="accent3"/>
+    </dgm:linClrLst>
+    <dgm:effectClrLst/>
+    <dgm:txLinClrLst/>
+    <dgm:txFillClrLst meth="repeat">
+      <a:schemeClr val="dk1"/>
+    </dgm:txFillClrLst>
+    <dgm:txEffectClrLst/>
+  </dgm:styleLbl>
+  <dgm:styleLbl name="trAlignAcc1">
+    <dgm:fillClrLst meth="repeat">
+      <a:schemeClr val="lt1">
+        <a:alpha val="40000"/>
+      </a:schemeClr>
+    </dgm:fillClrLst>
+    <dgm:linClrLst meth="repeat">
+      <a:schemeClr val="accent2"/>
+    </dgm:linClrLst>
+    <dgm:effectClrLst/>
+    <dgm:txLinClrLst/>
+    <dgm:txFillClrLst meth="repeat">
+      <a:schemeClr val="dk1"/>
+    </dgm:txFillClrLst>
+    <dgm:txEffectClrLst/>
+  </dgm:styleLbl>
+  <dgm:styleLbl name="bgAcc1">
+    <dgm:fillClrLst meth="repeat">
+      <a:schemeClr val="lt1">
+        <a:alpha val="90000"/>
+      </a:schemeClr>
+    </dgm:fillClrLst>
+    <dgm:linClrLst>
+      <a:schemeClr val="accent2"/>
+      <a:schemeClr val="accent3"/>
+    </dgm:linClrLst>
+    <dgm:effectClrLst/>
+    <dgm:txLinClrLst/>
+    <dgm:txFillClrLst meth="repeat">
+      <a:schemeClr val="dk1"/>
+    </dgm:txFillClrLst>
+    <dgm:txEffectClrLst/>
+  </dgm:styleLbl>
+  <dgm:styleLbl name="solidFgAcc1">
+    <dgm:fillClrLst meth="repeat">
+      <a:schemeClr val="lt1"/>
+    </dgm:fillClrLst>
+    <dgm:linClrLst>
+      <a:schemeClr val="accent2"/>
+      <a:schemeClr val="accent3"/>
+    </dgm:linClrLst>
+    <dgm:effectClrLst/>
+    <dgm:txLinClrLst/>
+    <dgm:txFillClrLst meth="repeat">
+      <a:schemeClr val="dk1"/>
+    </dgm:txFillClrLst>
+    <dgm:txEffectClrLst/>
+  </dgm:styleLbl>
+  <dgm:styleLbl name="solidAlignAcc1">
+    <dgm:fillClrLst meth="repeat">
+      <a:schemeClr val="lt1"/>
+    </dgm:fillClrLst>
+    <dgm:linClrLst>
+      <a:schemeClr val="accent2"/>
+      <a:schemeClr val="accent3"/>
+    </dgm:linClrLst>
+    <dgm:effectClrLst/>
+    <dgm:txLinClrLst/>
+    <dgm:txFillClrLst meth="repeat">
+      <a:schemeClr val="dk1"/>
+    </dgm:txFillClrLst>
+    <dgm:txEffectClrLst/>
+  </dgm:styleLbl>
+  <dgm:styleLbl name="solidBgAcc1">
+    <dgm:fillClrLst meth="repeat">
+      <a:schemeClr val="lt1"/>
+    </dgm:fillClrLst>
+    <dgm:linClrLst>
+      <a:schemeClr val="accent2"/>
+      <a:schemeClr val="accent3"/>
+    </dgm:linClrLst>
+    <dgm:effectClrLst/>
+    <dgm:txLinClrLst/>
+    <dgm:txFillClrLst meth="repeat">
+      <a:schemeClr val="dk1"/>
+    </dgm:txFillClrLst>
+    <dgm:txEffectClrLst/>
+  </dgm:styleLbl>
+  <dgm:styleLbl name="fgAccFollowNode1">
+    <dgm:fillClrLst>
+      <a:schemeClr val="accent2">
+        <a:tint val="40000"/>
+        <a:alpha val="90000"/>
+      </a:schemeClr>
+      <a:schemeClr val="accent3">
+        <a:tint val="40000"/>
+        <a:alpha val="90000"/>
+      </a:schemeClr>
+    </dgm:fillClrLst>
+    <dgm:linClrLst>
+      <a:schemeClr val="accent2">
+        <a:tint val="40000"/>
+        <a:alpha val="90000"/>
+      </a:schemeClr>
+      <a:schemeClr val="accent3">
+        <a:tint val="40000"/>
+        <a:alpha val="90000"/>
+      </a:schemeClr>
+    </dgm:linClrLst>
+    <dgm:effectClrLst/>
+    <dgm:txLinClrLst/>
+    <dgm:txFillClrLst meth="repeat">
+      <a:schemeClr val="dk1"/>
+    </dgm:txFillClrLst>
+    <dgm:txEffectClrLst/>
+  </dgm:styleLbl>
+  <dgm:styleLbl name="alignAccFollowNode1">
+    <dgm:fillClrLst>
+      <a:schemeClr val="accent2">
+        <a:tint val="40000"/>
+        <a:alpha val="90000"/>
+      </a:schemeClr>
+      <a:schemeClr val="accent3">
+        <a:tint val="40000"/>
+        <a:alpha val="90000"/>
+      </a:schemeClr>
+    </dgm:fillClrLst>
+    <dgm:linClrLst>
+      <a:schemeClr val="accent2">
+        <a:tint val="40000"/>
+        <a:alpha val="90000"/>
+      </a:schemeClr>
+      <a:schemeClr val="accent3">
+        <a:tint val="40000"/>
+        <a:alpha val="90000"/>
+      </a:schemeClr>
+    </dgm:linClrLst>
+    <dgm:effectClrLst/>
+    <dgm:txLinClrLst/>
+    <dgm:txFillClrLst meth="repeat">
+      <a:schemeClr val="dk1"/>
+    </dgm:txFillClrLst>
+    <dgm:txEffectClrLst/>
+  </dgm:styleLbl>
+  <dgm:styleLbl name="bgAccFollowNode1">
+    <dgm:fillClrLst>
+      <a:schemeClr val="accent2">
+        <a:tint val="40000"/>
+        <a:alpha val="90000"/>
+      </a:schemeClr>
+      <a:schemeClr val="accent3">
+        <a:tint val="40000"/>
+        <a:alpha val="90000"/>
+      </a:schemeClr>
+    </dgm:fillClrLst>
+    <dgm:linClrLst>
+      <a:schemeClr val="accent2">
+        <a:tint val="40000"/>
+        <a:alpha val="90000"/>
+      </a:schemeClr>
+      <a:schemeClr val="accent3">
+        <a:tint val="40000"/>
+        <a:alpha val="90000"/>
+      </a:schemeClr>
+    </dgm:linClrLst>
+    <dgm:effectClrLst/>
+    <dgm:txLinClrLst/>
+    <dgm:txFillClrLst meth="repeat">
+      <a:schemeClr val="dk1"/>
+    </dgm:txFillClrLst>
+    <dgm:txEffectClrLst/>
+  </dgm:styleLbl>
+  <dgm:styleLbl name="fgAcc0">
+    <dgm:fillClrLst meth="repeat">
+      <a:schemeClr val="lt1">
+        <a:alpha val="90000"/>
+      </a:schemeClr>
+    </dgm:fillClrLst>
+    <dgm:linClrLst>
+      <a:schemeClr val="accent1"/>
+    </dgm:linClrLst>
+    <dgm:effectClrLst/>
+    <dgm:txLinClrLst/>
+    <dgm:txFillClrLst meth="repeat">
+      <a:schemeClr val="dk1"/>
+    </dgm:txFillClrLst>
+    <dgm:txEffectClrLst/>
+  </dgm:styleLbl>
+  <dgm:styleLbl name="fgAcc2">
+    <dgm:fillClrLst meth="repeat">
+      <a:schemeClr val="lt1">
+        <a:alpha val="90000"/>
+      </a:schemeClr>
+    </dgm:fillClrLst>
+    <dgm:linClrLst>
+      <a:schemeClr val="accent3"/>
+    </dgm:linClrLst>
+    <dgm:effectClrLst/>
+    <dgm:txLinClrLst/>
+    <dgm:txFillClrLst meth="repeat">
+      <a:schemeClr val="dk1"/>
+    </dgm:txFillClrLst>
+    <dgm:txEffectClrLst/>
+  </dgm:styleLbl>
+  <dgm:styleLbl name="fgAcc3">
+    <dgm:fillClrLst meth="repeat">
+      <a:schemeClr val="lt1">
+        <a:alpha val="90000"/>
+      </a:schemeClr>
+    </dgm:fillClrLst>
+    <dgm:linClrLst>
+      <a:schemeClr val="accent4"/>
+    </dgm:linClrLst>
+    <dgm:effectClrLst/>
+    <dgm:txLinClrLst/>
+    <dgm:txFillClrLst meth="repeat">
+      <a:schemeClr val="dk1"/>
+    </dgm:txFillClrLst>
+    <dgm:txEffectClrLst/>
+  </dgm:styleLbl>
+  <dgm:styleLbl name="fgAcc4">
+    <dgm:fillClrLst meth="repeat">
+      <a:schemeClr val="lt1">
+        <a:alpha val="90000"/>
+      </a:schemeClr>
+    </dgm:fillClrLst>
+    <dgm:linClrLst>
+      <a:schemeClr val="accent5"/>
+    </dgm:linClrLst>
+    <dgm:effectClrLst/>
+    <dgm:txLinClrLst/>
+    <dgm:txFillClrLst meth="repeat">
+      <a:schemeClr val="dk1"/>
+    </dgm:txFillClrLst>
+    <dgm:txEffectClrLst/>
+  </dgm:styleLbl>
+  <dgm:styleLbl name="bgShp">
+    <dgm:fillClrLst meth="repeat">
+      <a:schemeClr val="accent2">
+        <a:tint val="40000"/>
+      </a:schemeClr>
+    </dgm:fillClrLst>
+    <dgm:linClrLst meth="repeat">
+      <a:schemeClr val="dk1"/>
+    </dgm:linClrLst>
+    <dgm:effectClrLst/>
+    <dgm:txLinClrLst/>
+    <dgm:txFillClrLst meth="repeat">
+      <a:schemeClr val="dk1"/>
+    </dgm:txFillClrLst>
+    <dgm:txEffectClrLst/>
+  </dgm:styleLbl>
+  <dgm:styleLbl name="dkBgShp">
+    <dgm:fillClrLst meth="repeat">
+      <a:schemeClr val="accent2">
+        <a:shade val="90000"/>
+      </a:schemeClr>
+    </dgm:fillClrLst>
+    <dgm:linClrLst meth="repeat">
+      <a:schemeClr val="dk1"/>
+    </dgm:linClrLst>
+    <dgm:effectClrLst/>
+    <dgm:txLinClrLst/>
+    <dgm:txFillClrLst meth="repeat">
+      <a:schemeClr val="lt1"/>
+    </dgm:txFillClrLst>
+    <dgm:txEffectClrLst/>
+  </dgm:styleLbl>
+  <dgm:styleLbl name="trBgShp">
+    <dgm:fillClrLst meth="repeat">
+      <a:schemeClr val="accent2">
+        <a:tint val="50000"/>
+        <a:alpha val="40000"/>
+      </a:schemeClr>
+    </dgm:fillClrLst>
+    <dgm:linClrLst meth="repeat">
+      <a:schemeClr val="accent2"/>
+    </dgm:linClrLst>
+    <dgm:effectClrLst/>
+    <dgm:txLinClrLst/>
+    <dgm:txFillClrLst meth="repeat">
+      <a:schemeClr val="lt1"/>
+    </dgm:txFillClrLst>
+    <dgm:txEffectClrLst/>
+  </dgm:styleLbl>
+  <dgm:styleLbl name="fgShp">
+    <dgm:fillClrLst meth="repeat">
+      <a:schemeClr val="accent2">
+        <a:tint val="40000"/>
       </a:schemeClr>
     </dgm:fillClrLst>
     <dgm:linClrLst meth="repeat">
@@ -5698,6 +6484,334 @@
   <dgm:extLst>
     <a:ext uri="http://schemas.microsoft.com/office/drawing/2008/diagram">
       <dsp:dataModelExt xmlns:dsp="http://schemas.microsoft.com/office/drawing/2008/diagram" relId="rId6" minVer="http://schemas.openxmlformats.org/drawingml/2006/diagram"/>
+    </a:ext>
+  </dgm:extLst>
+</dgm:dataModel>
+</file>
+
+<file path=ppt/diagrams/data6.xml><?xml version="1.0" encoding="utf-8"?>
+<dgm:dataModel xmlns:dgm="http://schemas.openxmlformats.org/drawingml/2006/diagram" xmlns:a="http://schemas.openxmlformats.org/drawingml/2006/main">
+  <dgm:ptLst>
+    <dgm:pt modelId="{29448E08-4250-43E3-9D5D-3B8B747D5F47}" type="doc">
+      <dgm:prSet loTypeId="urn:microsoft.com/office/officeart/2008/layout/LinedList" loCatId="list" qsTypeId="urn:microsoft.com/office/officeart/2005/8/quickstyle/simple1" qsCatId="simple" csTypeId="urn:microsoft.com/office/officeart/2005/8/colors/colorful2" csCatId="colorful"/>
+      <dgm:spPr/>
+      <dgm:t>
+        <a:bodyPr/>
+        <a:lstStyle/>
+        <a:p>
+          <a:endParaRPr lang="en-US"/>
+        </a:p>
+      </dgm:t>
+    </dgm:pt>
+    <dgm:pt modelId="{2D6DA175-A24E-4166-9332-E9473563B029}">
+      <dgm:prSet/>
+      <dgm:spPr/>
+      <dgm:t>
+        <a:bodyPr/>
+        <a:lstStyle/>
+        <a:p>
+          <a:r>
+            <a:rPr lang="en-US"/>
+            <a:t>Final Gradient Boosting model deployed using Flask</a:t>
+          </a:r>
+        </a:p>
+      </dgm:t>
+    </dgm:pt>
+    <dgm:pt modelId="{CE6289FD-AB26-492E-9EC5-7F40E0AE1609}" type="parTrans" cxnId="{91121EC4-495F-4F67-A676-2046BAC8FC4C}">
+      <dgm:prSet/>
+      <dgm:spPr/>
+      <dgm:t>
+        <a:bodyPr/>
+        <a:lstStyle/>
+        <a:p>
+          <a:endParaRPr lang="en-US"/>
+        </a:p>
+      </dgm:t>
+    </dgm:pt>
+    <dgm:pt modelId="{89BEDC27-0DAE-4B88-9EA5-645798499A39}" type="sibTrans" cxnId="{91121EC4-495F-4F67-A676-2046BAC8FC4C}">
+      <dgm:prSet/>
+      <dgm:spPr/>
+      <dgm:t>
+        <a:bodyPr/>
+        <a:lstStyle/>
+        <a:p>
+          <a:endParaRPr lang="en-US"/>
+        </a:p>
+      </dgm:t>
+    </dgm:pt>
+    <dgm:pt modelId="{13BB8850-F267-4E2E-84DA-8F39CC0134ED}">
+      <dgm:prSet/>
+      <dgm:spPr/>
+      <dgm:t>
+        <a:bodyPr/>
+        <a:lstStyle/>
+        <a:p>
+          <a:r>
+            <a:rPr lang="en-US"/>
+            <a:t>Saved model, preprocessing pipeline and metadata for reproducibility</a:t>
+          </a:r>
+        </a:p>
+      </dgm:t>
+    </dgm:pt>
+    <dgm:pt modelId="{57735D6C-B275-4221-8025-09FB8014F424}" type="parTrans" cxnId="{2E07ACEC-7D34-489D-B2FF-3DAF06F47DD5}">
+      <dgm:prSet/>
+      <dgm:spPr/>
+      <dgm:t>
+        <a:bodyPr/>
+        <a:lstStyle/>
+        <a:p>
+          <a:endParaRPr lang="en-US"/>
+        </a:p>
+      </dgm:t>
+    </dgm:pt>
+    <dgm:pt modelId="{1EF52A46-7A5D-4CEE-8A3A-BD0D81ED5C9F}" type="sibTrans" cxnId="{2E07ACEC-7D34-489D-B2FF-3DAF06F47DD5}">
+      <dgm:prSet/>
+      <dgm:spPr/>
+      <dgm:t>
+        <a:bodyPr/>
+        <a:lstStyle/>
+        <a:p>
+          <a:endParaRPr lang="en-US"/>
+        </a:p>
+      </dgm:t>
+    </dgm:pt>
+    <dgm:pt modelId="{783F3DC5-6E2B-4B80-8E61-452E60011500}">
+      <dgm:prSet/>
+      <dgm:spPr/>
+      <dgm:t>
+        <a:bodyPr/>
+        <a:lstStyle/>
+        <a:p>
+          <a:r>
+            <a:rPr lang="en-US"/>
+            <a:t>Enables non-technical users to generate predictions</a:t>
+          </a:r>
+        </a:p>
+      </dgm:t>
+    </dgm:pt>
+    <dgm:pt modelId="{D3687E02-3F78-4225-BCCD-525C69814C46}" type="parTrans" cxnId="{C3BCA6AF-6B60-4064-B915-525C6247249D}">
+      <dgm:prSet/>
+      <dgm:spPr/>
+      <dgm:t>
+        <a:bodyPr/>
+        <a:lstStyle/>
+        <a:p>
+          <a:endParaRPr lang="en-US"/>
+        </a:p>
+      </dgm:t>
+    </dgm:pt>
+    <dgm:pt modelId="{12BF1A89-CBC0-496F-B4B1-52AE6606CFB0}" type="sibTrans" cxnId="{C3BCA6AF-6B60-4064-B915-525C6247249D}">
+      <dgm:prSet/>
+      <dgm:spPr/>
+      <dgm:t>
+        <a:bodyPr/>
+        <a:lstStyle/>
+        <a:p>
+          <a:endParaRPr lang="en-US"/>
+        </a:p>
+      </dgm:t>
+    </dgm:pt>
+    <dgm:pt modelId="{32AC8F93-612C-4DB4-BEB3-66A5EEE5D581}">
+      <dgm:prSet/>
+      <dgm:spPr/>
+      <dgm:t>
+        <a:bodyPr/>
+        <a:lstStyle/>
+        <a:p>
+          <a:r>
+            <a:rPr lang="en-US"/>
+            <a:t>Demonstrates an end-to-end machine learning workflow</a:t>
+          </a:r>
+        </a:p>
+      </dgm:t>
+    </dgm:pt>
+    <dgm:pt modelId="{C85E167A-F5BC-42A6-8B3F-AB5E306B7410}" type="parTrans" cxnId="{A3847808-31C2-47C8-8D18-7DEED3998636}">
+      <dgm:prSet/>
+      <dgm:spPr/>
+      <dgm:t>
+        <a:bodyPr/>
+        <a:lstStyle/>
+        <a:p>
+          <a:endParaRPr lang="en-US"/>
+        </a:p>
+      </dgm:t>
+    </dgm:pt>
+    <dgm:pt modelId="{FCE1362D-85F7-46C3-A84A-64241AE04119}" type="sibTrans" cxnId="{A3847808-31C2-47C8-8D18-7DEED3998636}">
+      <dgm:prSet/>
+      <dgm:spPr/>
+      <dgm:t>
+        <a:bodyPr/>
+        <a:lstStyle/>
+        <a:p>
+          <a:endParaRPr lang="en-US"/>
+        </a:p>
+      </dgm:t>
+    </dgm:pt>
+    <dgm:pt modelId="{80EE41F6-1A36-4FE3-8987-68865114CEBA}">
+      <dgm:prSet/>
+      <dgm:spPr/>
+      <dgm:t>
+        <a:bodyPr/>
+        <a:lstStyle/>
+        <a:p>
+          <a:r>
+            <a:rPr lang="en-US"/>
+            <a:t>Goal: Convert a trained model into a practical decision-support application.</a:t>
+          </a:r>
+        </a:p>
+      </dgm:t>
+    </dgm:pt>
+    <dgm:pt modelId="{0ABEF4C1-7579-4808-B296-D2CD1EE0EBDF}" type="parTrans" cxnId="{1BD8BCCE-ADCE-4FA2-BDCE-96397B1D5885}">
+      <dgm:prSet/>
+      <dgm:spPr/>
+      <dgm:t>
+        <a:bodyPr/>
+        <a:lstStyle/>
+        <a:p>
+          <a:endParaRPr lang="en-US"/>
+        </a:p>
+      </dgm:t>
+    </dgm:pt>
+    <dgm:pt modelId="{8EC3CC21-324A-4879-9FEA-61ACF34512B2}" type="sibTrans" cxnId="{1BD8BCCE-ADCE-4FA2-BDCE-96397B1D5885}">
+      <dgm:prSet/>
+      <dgm:spPr/>
+      <dgm:t>
+        <a:bodyPr/>
+        <a:lstStyle/>
+        <a:p>
+          <a:endParaRPr lang="en-US"/>
+        </a:p>
+      </dgm:t>
+    </dgm:pt>
+    <dgm:pt modelId="{59412777-E533-4958-933C-002FB6C6607A}" type="pres">
+      <dgm:prSet presAssocID="{29448E08-4250-43E3-9D5D-3B8B747D5F47}" presName="vert0" presStyleCnt="0">
+        <dgm:presLayoutVars>
+          <dgm:dir/>
+          <dgm:animOne val="branch"/>
+          <dgm:animLvl val="lvl"/>
+        </dgm:presLayoutVars>
+      </dgm:prSet>
+      <dgm:spPr/>
+    </dgm:pt>
+    <dgm:pt modelId="{730A685A-E276-4AF8-B968-A3359A61326E}" type="pres">
+      <dgm:prSet presAssocID="{2D6DA175-A24E-4166-9332-E9473563B029}" presName="thickLine" presStyleLbl="alignNode1" presStyleIdx="0" presStyleCnt="5"/>
+      <dgm:spPr/>
+    </dgm:pt>
+    <dgm:pt modelId="{3A853295-72E2-4050-854A-D861EB2CDD53}" type="pres">
+      <dgm:prSet presAssocID="{2D6DA175-A24E-4166-9332-E9473563B029}" presName="horz1" presStyleCnt="0"/>
+      <dgm:spPr/>
+    </dgm:pt>
+    <dgm:pt modelId="{133E5649-E5E3-450B-BAD8-596CE9CC8E7F}" type="pres">
+      <dgm:prSet presAssocID="{2D6DA175-A24E-4166-9332-E9473563B029}" presName="tx1" presStyleLbl="revTx" presStyleIdx="0" presStyleCnt="5"/>
+      <dgm:spPr/>
+    </dgm:pt>
+    <dgm:pt modelId="{F6ED8DC8-BFD2-4DD8-838B-97FE877A4997}" type="pres">
+      <dgm:prSet presAssocID="{2D6DA175-A24E-4166-9332-E9473563B029}" presName="vert1" presStyleCnt="0"/>
+      <dgm:spPr/>
+    </dgm:pt>
+    <dgm:pt modelId="{184213C8-E734-42F6-BEFA-93DB9D8C3DDC}" type="pres">
+      <dgm:prSet presAssocID="{13BB8850-F267-4E2E-84DA-8F39CC0134ED}" presName="thickLine" presStyleLbl="alignNode1" presStyleIdx="1" presStyleCnt="5"/>
+      <dgm:spPr/>
+    </dgm:pt>
+    <dgm:pt modelId="{B226C744-47C3-4C7E-A32C-B9F95E26D6BB}" type="pres">
+      <dgm:prSet presAssocID="{13BB8850-F267-4E2E-84DA-8F39CC0134ED}" presName="horz1" presStyleCnt="0"/>
+      <dgm:spPr/>
+    </dgm:pt>
+    <dgm:pt modelId="{52DEA52A-928C-4BBD-8551-E2CCC6F267B1}" type="pres">
+      <dgm:prSet presAssocID="{13BB8850-F267-4E2E-84DA-8F39CC0134ED}" presName="tx1" presStyleLbl="revTx" presStyleIdx="1" presStyleCnt="5"/>
+      <dgm:spPr/>
+    </dgm:pt>
+    <dgm:pt modelId="{7769D642-1709-4509-9EC7-135BD37DAE44}" type="pres">
+      <dgm:prSet presAssocID="{13BB8850-F267-4E2E-84DA-8F39CC0134ED}" presName="vert1" presStyleCnt="0"/>
+      <dgm:spPr/>
+    </dgm:pt>
+    <dgm:pt modelId="{6B2400F1-BF25-4C3C-97A6-8E628F39AF9B}" type="pres">
+      <dgm:prSet presAssocID="{783F3DC5-6E2B-4B80-8E61-452E60011500}" presName="thickLine" presStyleLbl="alignNode1" presStyleIdx="2" presStyleCnt="5"/>
+      <dgm:spPr/>
+    </dgm:pt>
+    <dgm:pt modelId="{886521F6-FC24-454D-B83C-A84A60B614EA}" type="pres">
+      <dgm:prSet presAssocID="{783F3DC5-6E2B-4B80-8E61-452E60011500}" presName="horz1" presStyleCnt="0"/>
+      <dgm:spPr/>
+    </dgm:pt>
+    <dgm:pt modelId="{7BF75159-CD4A-40CC-9901-FD4516398AC9}" type="pres">
+      <dgm:prSet presAssocID="{783F3DC5-6E2B-4B80-8E61-452E60011500}" presName="tx1" presStyleLbl="revTx" presStyleIdx="2" presStyleCnt="5"/>
+      <dgm:spPr/>
+    </dgm:pt>
+    <dgm:pt modelId="{B32052A6-D14E-443A-942B-26F93134D219}" type="pres">
+      <dgm:prSet presAssocID="{783F3DC5-6E2B-4B80-8E61-452E60011500}" presName="vert1" presStyleCnt="0"/>
+      <dgm:spPr/>
+    </dgm:pt>
+    <dgm:pt modelId="{CDF6249A-B1C7-4144-AB2E-9299A6572B74}" type="pres">
+      <dgm:prSet presAssocID="{32AC8F93-612C-4DB4-BEB3-66A5EEE5D581}" presName="thickLine" presStyleLbl="alignNode1" presStyleIdx="3" presStyleCnt="5"/>
+      <dgm:spPr/>
+    </dgm:pt>
+    <dgm:pt modelId="{445FC8E9-F068-4A68-A08C-249F7D2F73D4}" type="pres">
+      <dgm:prSet presAssocID="{32AC8F93-612C-4DB4-BEB3-66A5EEE5D581}" presName="horz1" presStyleCnt="0"/>
+      <dgm:spPr/>
+    </dgm:pt>
+    <dgm:pt modelId="{D92A462B-69C0-4571-A97F-BDA952E2C60B}" type="pres">
+      <dgm:prSet presAssocID="{32AC8F93-612C-4DB4-BEB3-66A5EEE5D581}" presName="tx1" presStyleLbl="revTx" presStyleIdx="3" presStyleCnt="5"/>
+      <dgm:spPr/>
+    </dgm:pt>
+    <dgm:pt modelId="{C7E9D95F-976E-4088-9635-69EE7978ABCC}" type="pres">
+      <dgm:prSet presAssocID="{32AC8F93-612C-4DB4-BEB3-66A5EEE5D581}" presName="vert1" presStyleCnt="0"/>
+      <dgm:spPr/>
+    </dgm:pt>
+    <dgm:pt modelId="{8C0FE801-E61F-4393-B185-57AF83F023C5}" type="pres">
+      <dgm:prSet presAssocID="{80EE41F6-1A36-4FE3-8987-68865114CEBA}" presName="thickLine" presStyleLbl="alignNode1" presStyleIdx="4" presStyleCnt="5"/>
+      <dgm:spPr/>
+    </dgm:pt>
+    <dgm:pt modelId="{D7AE760B-850A-40C6-9F50-13047A48807D}" type="pres">
+      <dgm:prSet presAssocID="{80EE41F6-1A36-4FE3-8987-68865114CEBA}" presName="horz1" presStyleCnt="0"/>
+      <dgm:spPr/>
+    </dgm:pt>
+    <dgm:pt modelId="{58BAA08C-7034-47F8-A3C1-069084F6C1CC}" type="pres">
+      <dgm:prSet presAssocID="{80EE41F6-1A36-4FE3-8987-68865114CEBA}" presName="tx1" presStyleLbl="revTx" presStyleIdx="4" presStyleCnt="5"/>
+      <dgm:spPr/>
+    </dgm:pt>
+    <dgm:pt modelId="{EA3CB7E6-E82F-4B7F-9B41-C1CAA23B77F9}" type="pres">
+      <dgm:prSet presAssocID="{80EE41F6-1A36-4FE3-8987-68865114CEBA}" presName="vert1" presStyleCnt="0"/>
+      <dgm:spPr/>
+    </dgm:pt>
+  </dgm:ptLst>
+  <dgm:cxnLst>
+    <dgm:cxn modelId="{CCC23908-033B-4CD2-9453-892D727520B1}" type="presOf" srcId="{783F3DC5-6E2B-4B80-8E61-452E60011500}" destId="{7BF75159-CD4A-40CC-9901-FD4516398AC9}" srcOrd="0" destOrd="0" presId="urn:microsoft.com/office/officeart/2008/layout/LinedList"/>
+    <dgm:cxn modelId="{A3847808-31C2-47C8-8D18-7DEED3998636}" srcId="{29448E08-4250-43E3-9D5D-3B8B747D5F47}" destId="{32AC8F93-612C-4DB4-BEB3-66A5EEE5D581}" srcOrd="3" destOrd="0" parTransId="{C85E167A-F5BC-42A6-8B3F-AB5E306B7410}" sibTransId="{FCE1362D-85F7-46C3-A84A-64241AE04119}"/>
+    <dgm:cxn modelId="{B308FD75-188E-419E-A64B-6226A505842E}" type="presOf" srcId="{2D6DA175-A24E-4166-9332-E9473563B029}" destId="{133E5649-E5E3-450B-BAD8-596CE9CC8E7F}" srcOrd="0" destOrd="0" presId="urn:microsoft.com/office/officeart/2008/layout/LinedList"/>
+    <dgm:cxn modelId="{CF451A8A-6CAB-4822-BC28-264C847D865D}" type="presOf" srcId="{13BB8850-F267-4E2E-84DA-8F39CC0134ED}" destId="{52DEA52A-928C-4BBD-8551-E2CCC6F267B1}" srcOrd="0" destOrd="0" presId="urn:microsoft.com/office/officeart/2008/layout/LinedList"/>
+    <dgm:cxn modelId="{C3BCA6AF-6B60-4064-B915-525C6247249D}" srcId="{29448E08-4250-43E3-9D5D-3B8B747D5F47}" destId="{783F3DC5-6E2B-4B80-8E61-452E60011500}" srcOrd="2" destOrd="0" parTransId="{D3687E02-3F78-4225-BCCD-525C69814C46}" sibTransId="{12BF1A89-CBC0-496F-B4B1-52AE6606CFB0}"/>
+    <dgm:cxn modelId="{91121EC4-495F-4F67-A676-2046BAC8FC4C}" srcId="{29448E08-4250-43E3-9D5D-3B8B747D5F47}" destId="{2D6DA175-A24E-4166-9332-E9473563B029}" srcOrd="0" destOrd="0" parTransId="{CE6289FD-AB26-492E-9EC5-7F40E0AE1609}" sibTransId="{89BEDC27-0DAE-4B88-9EA5-645798499A39}"/>
+    <dgm:cxn modelId="{1BD8BCCE-ADCE-4FA2-BDCE-96397B1D5885}" srcId="{29448E08-4250-43E3-9D5D-3B8B747D5F47}" destId="{80EE41F6-1A36-4FE3-8987-68865114CEBA}" srcOrd="4" destOrd="0" parTransId="{0ABEF4C1-7579-4808-B296-D2CD1EE0EBDF}" sibTransId="{8EC3CC21-324A-4879-9FEA-61ACF34512B2}"/>
+    <dgm:cxn modelId="{99CB2CD2-B375-4C98-AC10-903D94F7F0AD}" type="presOf" srcId="{80EE41F6-1A36-4FE3-8987-68865114CEBA}" destId="{58BAA08C-7034-47F8-A3C1-069084F6C1CC}" srcOrd="0" destOrd="0" presId="urn:microsoft.com/office/officeart/2008/layout/LinedList"/>
+    <dgm:cxn modelId="{61C9B4E7-2D27-491D-B3E5-2BEB41CDCA42}" type="presOf" srcId="{32AC8F93-612C-4DB4-BEB3-66A5EEE5D581}" destId="{D92A462B-69C0-4571-A97F-BDA952E2C60B}" srcOrd="0" destOrd="0" presId="urn:microsoft.com/office/officeart/2008/layout/LinedList"/>
+    <dgm:cxn modelId="{F0B235EC-5A70-4FF4-B4A7-10C97FF2C0B0}" type="presOf" srcId="{29448E08-4250-43E3-9D5D-3B8B747D5F47}" destId="{59412777-E533-4958-933C-002FB6C6607A}" srcOrd="0" destOrd="0" presId="urn:microsoft.com/office/officeart/2008/layout/LinedList"/>
+    <dgm:cxn modelId="{2E07ACEC-7D34-489D-B2FF-3DAF06F47DD5}" srcId="{29448E08-4250-43E3-9D5D-3B8B747D5F47}" destId="{13BB8850-F267-4E2E-84DA-8F39CC0134ED}" srcOrd="1" destOrd="0" parTransId="{57735D6C-B275-4221-8025-09FB8014F424}" sibTransId="{1EF52A46-7A5D-4CEE-8A3A-BD0D81ED5C9F}"/>
+    <dgm:cxn modelId="{44687F95-7C00-4AB8-9BD6-B3AB39F832FA}" type="presParOf" srcId="{59412777-E533-4958-933C-002FB6C6607A}" destId="{730A685A-E276-4AF8-B968-A3359A61326E}" srcOrd="0" destOrd="0" presId="urn:microsoft.com/office/officeart/2008/layout/LinedList"/>
+    <dgm:cxn modelId="{DE95A80E-8269-47ED-8C09-94B6B02CFDB6}" type="presParOf" srcId="{59412777-E533-4958-933C-002FB6C6607A}" destId="{3A853295-72E2-4050-854A-D861EB2CDD53}" srcOrd="1" destOrd="0" presId="urn:microsoft.com/office/officeart/2008/layout/LinedList"/>
+    <dgm:cxn modelId="{57440C1E-8768-435A-A5CC-22173CE6004E}" type="presParOf" srcId="{3A853295-72E2-4050-854A-D861EB2CDD53}" destId="{133E5649-E5E3-450B-BAD8-596CE9CC8E7F}" srcOrd="0" destOrd="0" presId="urn:microsoft.com/office/officeart/2008/layout/LinedList"/>
+    <dgm:cxn modelId="{E466DB59-E0C0-4709-9D74-04A4CF5E7804}" type="presParOf" srcId="{3A853295-72E2-4050-854A-D861EB2CDD53}" destId="{F6ED8DC8-BFD2-4DD8-838B-97FE877A4997}" srcOrd="1" destOrd="0" presId="urn:microsoft.com/office/officeart/2008/layout/LinedList"/>
+    <dgm:cxn modelId="{3BADEDF7-7B66-4746-B126-15B516966C62}" type="presParOf" srcId="{59412777-E533-4958-933C-002FB6C6607A}" destId="{184213C8-E734-42F6-BEFA-93DB9D8C3DDC}" srcOrd="2" destOrd="0" presId="urn:microsoft.com/office/officeart/2008/layout/LinedList"/>
+    <dgm:cxn modelId="{9426B758-6475-42B5-BE2E-25F891E73489}" type="presParOf" srcId="{59412777-E533-4958-933C-002FB6C6607A}" destId="{B226C744-47C3-4C7E-A32C-B9F95E26D6BB}" srcOrd="3" destOrd="0" presId="urn:microsoft.com/office/officeart/2008/layout/LinedList"/>
+    <dgm:cxn modelId="{93DFD4CF-57D3-40E4-92D9-40A1BC974002}" type="presParOf" srcId="{B226C744-47C3-4C7E-A32C-B9F95E26D6BB}" destId="{52DEA52A-928C-4BBD-8551-E2CCC6F267B1}" srcOrd="0" destOrd="0" presId="urn:microsoft.com/office/officeart/2008/layout/LinedList"/>
+    <dgm:cxn modelId="{BD7E3DD0-6F9F-4D0A-8762-7BFB316D5801}" type="presParOf" srcId="{B226C744-47C3-4C7E-A32C-B9F95E26D6BB}" destId="{7769D642-1709-4509-9EC7-135BD37DAE44}" srcOrd="1" destOrd="0" presId="urn:microsoft.com/office/officeart/2008/layout/LinedList"/>
+    <dgm:cxn modelId="{BBDA946B-9FB3-4C76-BCA3-EF721095B6A8}" type="presParOf" srcId="{59412777-E533-4958-933C-002FB6C6607A}" destId="{6B2400F1-BF25-4C3C-97A6-8E628F39AF9B}" srcOrd="4" destOrd="0" presId="urn:microsoft.com/office/officeart/2008/layout/LinedList"/>
+    <dgm:cxn modelId="{D1FE76ED-BC2F-4EC3-9C25-6BAE56FEB939}" type="presParOf" srcId="{59412777-E533-4958-933C-002FB6C6607A}" destId="{886521F6-FC24-454D-B83C-A84A60B614EA}" srcOrd="5" destOrd="0" presId="urn:microsoft.com/office/officeart/2008/layout/LinedList"/>
+    <dgm:cxn modelId="{D1FF0F9B-B1B8-4344-A986-0C4A9C646D1F}" type="presParOf" srcId="{886521F6-FC24-454D-B83C-A84A60B614EA}" destId="{7BF75159-CD4A-40CC-9901-FD4516398AC9}" srcOrd="0" destOrd="0" presId="urn:microsoft.com/office/officeart/2008/layout/LinedList"/>
+    <dgm:cxn modelId="{998758AF-6096-44BC-A660-C9BED881EEA5}" type="presParOf" srcId="{886521F6-FC24-454D-B83C-A84A60B614EA}" destId="{B32052A6-D14E-443A-942B-26F93134D219}" srcOrd="1" destOrd="0" presId="urn:microsoft.com/office/officeart/2008/layout/LinedList"/>
+    <dgm:cxn modelId="{0ECCFD22-C7A8-453B-AE11-EFEECF291A20}" type="presParOf" srcId="{59412777-E533-4958-933C-002FB6C6607A}" destId="{CDF6249A-B1C7-4144-AB2E-9299A6572B74}" srcOrd="6" destOrd="0" presId="urn:microsoft.com/office/officeart/2008/layout/LinedList"/>
+    <dgm:cxn modelId="{2A0541CB-E568-4593-9BD0-0CAC3FCEC963}" type="presParOf" srcId="{59412777-E533-4958-933C-002FB6C6607A}" destId="{445FC8E9-F068-4A68-A08C-249F7D2F73D4}" srcOrd="7" destOrd="0" presId="urn:microsoft.com/office/officeart/2008/layout/LinedList"/>
+    <dgm:cxn modelId="{A457AC17-539D-4723-8D79-66266674307E}" type="presParOf" srcId="{445FC8E9-F068-4A68-A08C-249F7D2F73D4}" destId="{D92A462B-69C0-4571-A97F-BDA952E2C60B}" srcOrd="0" destOrd="0" presId="urn:microsoft.com/office/officeart/2008/layout/LinedList"/>
+    <dgm:cxn modelId="{033D3372-E6D8-41FC-84B7-FA17FBF39DDF}" type="presParOf" srcId="{445FC8E9-F068-4A68-A08C-249F7D2F73D4}" destId="{C7E9D95F-976E-4088-9635-69EE7978ABCC}" srcOrd="1" destOrd="0" presId="urn:microsoft.com/office/officeart/2008/layout/LinedList"/>
+    <dgm:cxn modelId="{5D5B1242-FECA-4AB1-BDD0-B93EF3F2456D}" type="presParOf" srcId="{59412777-E533-4958-933C-002FB6C6607A}" destId="{8C0FE801-E61F-4393-B185-57AF83F023C5}" srcOrd="8" destOrd="0" presId="urn:microsoft.com/office/officeart/2008/layout/LinedList"/>
+    <dgm:cxn modelId="{B95E4472-B77C-4406-BED2-F7E41392DF6D}" type="presParOf" srcId="{59412777-E533-4958-933C-002FB6C6607A}" destId="{D7AE760B-850A-40C6-9F50-13047A48807D}" srcOrd="9" destOrd="0" presId="urn:microsoft.com/office/officeart/2008/layout/LinedList"/>
+    <dgm:cxn modelId="{11133C50-7D21-40BC-9733-570E2619C821}" type="presParOf" srcId="{D7AE760B-850A-40C6-9F50-13047A48807D}" destId="{58BAA08C-7034-47F8-A3C1-069084F6C1CC}" srcOrd="0" destOrd="0" presId="urn:microsoft.com/office/officeart/2008/layout/LinedList"/>
+    <dgm:cxn modelId="{0A0BC2AD-B4B9-4BFC-9083-067868CDC977}" type="presParOf" srcId="{D7AE760B-850A-40C6-9F50-13047A48807D}" destId="{EA3CB7E6-E82F-4B7F-9B41-C1CAA23B77F9}" srcOrd="1" destOrd="0" presId="urn:microsoft.com/office/officeart/2008/layout/LinedList"/>
+  </dgm:cxnLst>
+  <dgm:bg/>
+  <dgm:whole/>
+  <dgm:extLst>
+    <a:ext uri="http://schemas.microsoft.com/office/drawing/2008/diagram">
+      <dsp:dataModelExt xmlns:dsp="http://schemas.microsoft.com/office/drawing/2008/diagram" relId="rId7" minVer="http://schemas.openxmlformats.org/drawingml/2006/diagram"/>
     </a:ext>
   </dgm:extLst>
 </dgm:dataModel>
@@ -8948,6 +10062,563 @@
 </dsp:drawing>
 </file>
 
+<file path=ppt/diagrams/drawing6.xml><?xml version="1.0" encoding="utf-8"?>
+<dsp:drawing xmlns:dgm="http://schemas.openxmlformats.org/drawingml/2006/diagram" xmlns:dsp="http://schemas.microsoft.com/office/drawing/2008/diagram" xmlns:a="http://schemas.openxmlformats.org/drawingml/2006/main">
+  <dsp:spTree>
+    <dsp:nvGrpSpPr>
+      <dsp:cNvPr id="0" name=""/>
+      <dsp:cNvGrpSpPr/>
+    </dsp:nvGrpSpPr>
+    <dsp:grpSpPr/>
+    <dsp:sp modelId="{730A685A-E276-4AF8-B968-A3359A61326E}">
+      <dsp:nvSpPr>
+        <dsp:cNvPr id="0" name=""/>
+        <dsp:cNvSpPr/>
+      </dsp:nvSpPr>
+      <dsp:spPr>
+        <a:xfrm>
+          <a:off x="0" y="478"/>
+          <a:ext cx="3993357" cy="0"/>
+        </a:xfrm>
+        <a:prstGeom prst="line">
+          <a:avLst/>
+        </a:prstGeom>
+        <a:solidFill>
+          <a:schemeClr val="accent2">
+            <a:hueOff val="0"/>
+            <a:satOff val="0"/>
+            <a:lumOff val="0"/>
+            <a:alphaOff val="0"/>
+          </a:schemeClr>
+        </a:solidFill>
+        <a:ln w="25400" cap="flat" cmpd="sng" algn="ctr">
+          <a:solidFill>
+            <a:schemeClr val="accent2">
+              <a:hueOff val="0"/>
+              <a:satOff val="0"/>
+              <a:lumOff val="0"/>
+              <a:alphaOff val="0"/>
+            </a:schemeClr>
+          </a:solidFill>
+          <a:prstDash val="solid"/>
+        </a:ln>
+        <a:effectLst/>
+      </dsp:spPr>
+      <dsp:style>
+        <a:lnRef idx="2">
+          <a:scrgbClr r="0" g="0" b="0"/>
+        </a:lnRef>
+        <a:fillRef idx="1">
+          <a:scrgbClr r="0" g="0" b="0"/>
+        </a:fillRef>
+        <a:effectRef idx="0">
+          <a:scrgbClr r="0" g="0" b="0"/>
+        </a:effectRef>
+        <a:fontRef idx="minor">
+          <a:schemeClr val="lt1"/>
+        </a:fontRef>
+      </dsp:style>
+    </dsp:sp>
+    <dsp:sp modelId="{133E5649-E5E3-450B-BAD8-596CE9CC8E7F}">
+      <dsp:nvSpPr>
+        <dsp:cNvPr id="0" name=""/>
+        <dsp:cNvSpPr/>
+      </dsp:nvSpPr>
+      <dsp:spPr>
+        <a:xfrm>
+          <a:off x="0" y="478"/>
+          <a:ext cx="3993357" cy="783716"/>
+        </a:xfrm>
+        <a:prstGeom prst="rect">
+          <a:avLst/>
+        </a:prstGeom>
+        <a:noFill/>
+        <a:ln>
+          <a:noFill/>
+        </a:ln>
+        <a:effectLst/>
+      </dsp:spPr>
+      <dsp:style>
+        <a:lnRef idx="0">
+          <a:scrgbClr r="0" g="0" b="0"/>
+        </a:lnRef>
+        <a:fillRef idx="0">
+          <a:scrgbClr r="0" g="0" b="0"/>
+        </a:fillRef>
+        <a:effectRef idx="0">
+          <a:scrgbClr r="0" g="0" b="0"/>
+        </a:effectRef>
+        <a:fontRef idx="minor"/>
+      </dsp:style>
+      <dsp:txBody>
+        <a:bodyPr spcFirstLastPara="0" vert="horz" wrap="square" lIns="72390" tIns="72390" rIns="72390" bIns="72390" numCol="1" spcCol="1270" anchor="t" anchorCtr="0">
+          <a:noAutofit/>
+        </a:bodyPr>
+        <a:lstStyle/>
+        <a:p>
+          <a:pPr marL="0" lvl="0" indent="0" algn="l" defTabSz="844550">
+            <a:lnSpc>
+              <a:spcPct val="90000"/>
+            </a:lnSpc>
+            <a:spcBef>
+              <a:spcPct val="0"/>
+            </a:spcBef>
+            <a:spcAft>
+              <a:spcPct val="35000"/>
+            </a:spcAft>
+            <a:buNone/>
+          </a:pPr>
+          <a:r>
+            <a:rPr lang="en-US" sz="1900" kern="1200"/>
+            <a:t>Final Gradient Boosting model deployed using Flask</a:t>
+          </a:r>
+        </a:p>
+      </dsp:txBody>
+      <dsp:txXfrm>
+        <a:off x="0" y="478"/>
+        <a:ext cx="3993357" cy="783716"/>
+      </dsp:txXfrm>
+    </dsp:sp>
+    <dsp:sp modelId="{184213C8-E734-42F6-BEFA-93DB9D8C3DDC}">
+      <dsp:nvSpPr>
+        <dsp:cNvPr id="0" name=""/>
+        <dsp:cNvSpPr/>
+      </dsp:nvSpPr>
+      <dsp:spPr>
+        <a:xfrm>
+          <a:off x="0" y="784194"/>
+          <a:ext cx="3993357" cy="0"/>
+        </a:xfrm>
+        <a:prstGeom prst="line">
+          <a:avLst/>
+        </a:prstGeom>
+        <a:solidFill>
+          <a:schemeClr val="accent2">
+            <a:hueOff val="1170380"/>
+            <a:satOff val="-1460"/>
+            <a:lumOff val="343"/>
+            <a:alphaOff val="0"/>
+          </a:schemeClr>
+        </a:solidFill>
+        <a:ln w="25400" cap="flat" cmpd="sng" algn="ctr">
+          <a:solidFill>
+            <a:schemeClr val="accent2">
+              <a:hueOff val="1170380"/>
+              <a:satOff val="-1460"/>
+              <a:lumOff val="343"/>
+              <a:alphaOff val="0"/>
+            </a:schemeClr>
+          </a:solidFill>
+          <a:prstDash val="solid"/>
+        </a:ln>
+        <a:effectLst/>
+      </dsp:spPr>
+      <dsp:style>
+        <a:lnRef idx="2">
+          <a:scrgbClr r="0" g="0" b="0"/>
+        </a:lnRef>
+        <a:fillRef idx="1">
+          <a:scrgbClr r="0" g="0" b="0"/>
+        </a:fillRef>
+        <a:effectRef idx="0">
+          <a:scrgbClr r="0" g="0" b="0"/>
+        </a:effectRef>
+        <a:fontRef idx="minor">
+          <a:schemeClr val="lt1"/>
+        </a:fontRef>
+      </dsp:style>
+    </dsp:sp>
+    <dsp:sp modelId="{52DEA52A-928C-4BBD-8551-E2CCC6F267B1}">
+      <dsp:nvSpPr>
+        <dsp:cNvPr id="0" name=""/>
+        <dsp:cNvSpPr/>
+      </dsp:nvSpPr>
+      <dsp:spPr>
+        <a:xfrm>
+          <a:off x="0" y="784194"/>
+          <a:ext cx="3993357" cy="783716"/>
+        </a:xfrm>
+        <a:prstGeom prst="rect">
+          <a:avLst/>
+        </a:prstGeom>
+        <a:noFill/>
+        <a:ln>
+          <a:noFill/>
+        </a:ln>
+        <a:effectLst/>
+      </dsp:spPr>
+      <dsp:style>
+        <a:lnRef idx="0">
+          <a:scrgbClr r="0" g="0" b="0"/>
+        </a:lnRef>
+        <a:fillRef idx="0">
+          <a:scrgbClr r="0" g="0" b="0"/>
+        </a:fillRef>
+        <a:effectRef idx="0">
+          <a:scrgbClr r="0" g="0" b="0"/>
+        </a:effectRef>
+        <a:fontRef idx="minor"/>
+      </dsp:style>
+      <dsp:txBody>
+        <a:bodyPr spcFirstLastPara="0" vert="horz" wrap="square" lIns="72390" tIns="72390" rIns="72390" bIns="72390" numCol="1" spcCol="1270" anchor="t" anchorCtr="0">
+          <a:noAutofit/>
+        </a:bodyPr>
+        <a:lstStyle/>
+        <a:p>
+          <a:pPr marL="0" lvl="0" indent="0" algn="l" defTabSz="844550">
+            <a:lnSpc>
+              <a:spcPct val="90000"/>
+            </a:lnSpc>
+            <a:spcBef>
+              <a:spcPct val="0"/>
+            </a:spcBef>
+            <a:spcAft>
+              <a:spcPct val="35000"/>
+            </a:spcAft>
+            <a:buNone/>
+          </a:pPr>
+          <a:r>
+            <a:rPr lang="en-US" sz="1900" kern="1200"/>
+            <a:t>Saved model, preprocessing pipeline and metadata for reproducibility</a:t>
+          </a:r>
+        </a:p>
+      </dsp:txBody>
+      <dsp:txXfrm>
+        <a:off x="0" y="784194"/>
+        <a:ext cx="3993357" cy="783716"/>
+      </dsp:txXfrm>
+    </dsp:sp>
+    <dsp:sp modelId="{6B2400F1-BF25-4C3C-97A6-8E628F39AF9B}">
+      <dsp:nvSpPr>
+        <dsp:cNvPr id="0" name=""/>
+        <dsp:cNvSpPr/>
+      </dsp:nvSpPr>
+      <dsp:spPr>
+        <a:xfrm>
+          <a:off x="0" y="1567910"/>
+          <a:ext cx="3993357" cy="0"/>
+        </a:xfrm>
+        <a:prstGeom prst="line">
+          <a:avLst/>
+        </a:prstGeom>
+        <a:solidFill>
+          <a:schemeClr val="accent2">
+            <a:hueOff val="2340759"/>
+            <a:satOff val="-2919"/>
+            <a:lumOff val="686"/>
+            <a:alphaOff val="0"/>
+          </a:schemeClr>
+        </a:solidFill>
+        <a:ln w="25400" cap="flat" cmpd="sng" algn="ctr">
+          <a:solidFill>
+            <a:schemeClr val="accent2">
+              <a:hueOff val="2340759"/>
+              <a:satOff val="-2919"/>
+              <a:lumOff val="686"/>
+              <a:alphaOff val="0"/>
+            </a:schemeClr>
+          </a:solidFill>
+          <a:prstDash val="solid"/>
+        </a:ln>
+        <a:effectLst/>
+      </dsp:spPr>
+      <dsp:style>
+        <a:lnRef idx="2">
+          <a:scrgbClr r="0" g="0" b="0"/>
+        </a:lnRef>
+        <a:fillRef idx="1">
+          <a:scrgbClr r="0" g="0" b="0"/>
+        </a:fillRef>
+        <a:effectRef idx="0">
+          <a:scrgbClr r="0" g="0" b="0"/>
+        </a:effectRef>
+        <a:fontRef idx="minor">
+          <a:schemeClr val="lt1"/>
+        </a:fontRef>
+      </dsp:style>
+    </dsp:sp>
+    <dsp:sp modelId="{7BF75159-CD4A-40CC-9901-FD4516398AC9}">
+      <dsp:nvSpPr>
+        <dsp:cNvPr id="0" name=""/>
+        <dsp:cNvSpPr/>
+      </dsp:nvSpPr>
+      <dsp:spPr>
+        <a:xfrm>
+          <a:off x="0" y="1567910"/>
+          <a:ext cx="3993357" cy="783716"/>
+        </a:xfrm>
+        <a:prstGeom prst="rect">
+          <a:avLst/>
+        </a:prstGeom>
+        <a:noFill/>
+        <a:ln>
+          <a:noFill/>
+        </a:ln>
+        <a:effectLst/>
+      </dsp:spPr>
+      <dsp:style>
+        <a:lnRef idx="0">
+          <a:scrgbClr r="0" g="0" b="0"/>
+        </a:lnRef>
+        <a:fillRef idx="0">
+          <a:scrgbClr r="0" g="0" b="0"/>
+        </a:fillRef>
+        <a:effectRef idx="0">
+          <a:scrgbClr r="0" g="0" b="0"/>
+        </a:effectRef>
+        <a:fontRef idx="minor"/>
+      </dsp:style>
+      <dsp:txBody>
+        <a:bodyPr spcFirstLastPara="0" vert="horz" wrap="square" lIns="72390" tIns="72390" rIns="72390" bIns="72390" numCol="1" spcCol="1270" anchor="t" anchorCtr="0">
+          <a:noAutofit/>
+        </a:bodyPr>
+        <a:lstStyle/>
+        <a:p>
+          <a:pPr marL="0" lvl="0" indent="0" algn="l" defTabSz="844550">
+            <a:lnSpc>
+              <a:spcPct val="90000"/>
+            </a:lnSpc>
+            <a:spcBef>
+              <a:spcPct val="0"/>
+            </a:spcBef>
+            <a:spcAft>
+              <a:spcPct val="35000"/>
+            </a:spcAft>
+            <a:buNone/>
+          </a:pPr>
+          <a:r>
+            <a:rPr lang="en-US" sz="1900" kern="1200"/>
+            <a:t>Enables non-technical users to generate predictions</a:t>
+          </a:r>
+        </a:p>
+      </dsp:txBody>
+      <dsp:txXfrm>
+        <a:off x="0" y="1567910"/>
+        <a:ext cx="3993357" cy="783716"/>
+      </dsp:txXfrm>
+    </dsp:sp>
+    <dsp:sp modelId="{CDF6249A-B1C7-4144-AB2E-9299A6572B74}">
+      <dsp:nvSpPr>
+        <dsp:cNvPr id="0" name=""/>
+        <dsp:cNvSpPr/>
+      </dsp:nvSpPr>
+      <dsp:spPr>
+        <a:xfrm>
+          <a:off x="0" y="2351627"/>
+          <a:ext cx="3993357" cy="0"/>
+        </a:xfrm>
+        <a:prstGeom prst="line">
+          <a:avLst/>
+        </a:prstGeom>
+        <a:solidFill>
+          <a:schemeClr val="accent2">
+            <a:hueOff val="3511139"/>
+            <a:satOff val="-4379"/>
+            <a:lumOff val="1030"/>
+            <a:alphaOff val="0"/>
+          </a:schemeClr>
+        </a:solidFill>
+        <a:ln w="25400" cap="flat" cmpd="sng" algn="ctr">
+          <a:solidFill>
+            <a:schemeClr val="accent2">
+              <a:hueOff val="3511139"/>
+              <a:satOff val="-4379"/>
+              <a:lumOff val="1030"/>
+              <a:alphaOff val="0"/>
+            </a:schemeClr>
+          </a:solidFill>
+          <a:prstDash val="solid"/>
+        </a:ln>
+        <a:effectLst/>
+      </dsp:spPr>
+      <dsp:style>
+        <a:lnRef idx="2">
+          <a:scrgbClr r="0" g="0" b="0"/>
+        </a:lnRef>
+        <a:fillRef idx="1">
+          <a:scrgbClr r="0" g="0" b="0"/>
+        </a:fillRef>
+        <a:effectRef idx="0">
+          <a:scrgbClr r="0" g="0" b="0"/>
+        </a:effectRef>
+        <a:fontRef idx="minor">
+          <a:schemeClr val="lt1"/>
+        </a:fontRef>
+      </dsp:style>
+    </dsp:sp>
+    <dsp:sp modelId="{D92A462B-69C0-4571-A97F-BDA952E2C60B}">
+      <dsp:nvSpPr>
+        <dsp:cNvPr id="0" name=""/>
+        <dsp:cNvSpPr/>
+      </dsp:nvSpPr>
+      <dsp:spPr>
+        <a:xfrm>
+          <a:off x="0" y="2351627"/>
+          <a:ext cx="3993357" cy="783716"/>
+        </a:xfrm>
+        <a:prstGeom prst="rect">
+          <a:avLst/>
+        </a:prstGeom>
+        <a:noFill/>
+        <a:ln>
+          <a:noFill/>
+        </a:ln>
+        <a:effectLst/>
+      </dsp:spPr>
+      <dsp:style>
+        <a:lnRef idx="0">
+          <a:scrgbClr r="0" g="0" b="0"/>
+        </a:lnRef>
+        <a:fillRef idx="0">
+          <a:scrgbClr r="0" g="0" b="0"/>
+        </a:fillRef>
+        <a:effectRef idx="0">
+          <a:scrgbClr r="0" g="0" b="0"/>
+        </a:effectRef>
+        <a:fontRef idx="minor"/>
+      </dsp:style>
+      <dsp:txBody>
+        <a:bodyPr spcFirstLastPara="0" vert="horz" wrap="square" lIns="72390" tIns="72390" rIns="72390" bIns="72390" numCol="1" spcCol="1270" anchor="t" anchorCtr="0">
+          <a:noAutofit/>
+        </a:bodyPr>
+        <a:lstStyle/>
+        <a:p>
+          <a:pPr marL="0" lvl="0" indent="0" algn="l" defTabSz="844550">
+            <a:lnSpc>
+              <a:spcPct val="90000"/>
+            </a:lnSpc>
+            <a:spcBef>
+              <a:spcPct val="0"/>
+            </a:spcBef>
+            <a:spcAft>
+              <a:spcPct val="35000"/>
+            </a:spcAft>
+            <a:buNone/>
+          </a:pPr>
+          <a:r>
+            <a:rPr lang="en-US" sz="1900" kern="1200"/>
+            <a:t>Demonstrates an end-to-end machine learning workflow</a:t>
+          </a:r>
+        </a:p>
+      </dsp:txBody>
+      <dsp:txXfrm>
+        <a:off x="0" y="2351627"/>
+        <a:ext cx="3993357" cy="783716"/>
+      </dsp:txXfrm>
+    </dsp:sp>
+    <dsp:sp modelId="{8C0FE801-E61F-4393-B185-57AF83F023C5}">
+      <dsp:nvSpPr>
+        <dsp:cNvPr id="0" name=""/>
+        <dsp:cNvSpPr/>
+      </dsp:nvSpPr>
+      <dsp:spPr>
+        <a:xfrm>
+          <a:off x="0" y="3135343"/>
+          <a:ext cx="3993357" cy="0"/>
+        </a:xfrm>
+        <a:prstGeom prst="line">
+          <a:avLst/>
+        </a:prstGeom>
+        <a:solidFill>
+          <a:schemeClr val="accent2">
+            <a:hueOff val="4681519"/>
+            <a:satOff val="-5839"/>
+            <a:lumOff val="1373"/>
+            <a:alphaOff val="0"/>
+          </a:schemeClr>
+        </a:solidFill>
+        <a:ln w="25400" cap="flat" cmpd="sng" algn="ctr">
+          <a:solidFill>
+            <a:schemeClr val="accent2">
+              <a:hueOff val="4681519"/>
+              <a:satOff val="-5839"/>
+              <a:lumOff val="1373"/>
+              <a:alphaOff val="0"/>
+            </a:schemeClr>
+          </a:solidFill>
+          <a:prstDash val="solid"/>
+        </a:ln>
+        <a:effectLst/>
+      </dsp:spPr>
+      <dsp:style>
+        <a:lnRef idx="2">
+          <a:scrgbClr r="0" g="0" b="0"/>
+        </a:lnRef>
+        <a:fillRef idx="1">
+          <a:scrgbClr r="0" g="0" b="0"/>
+        </a:fillRef>
+        <a:effectRef idx="0">
+          <a:scrgbClr r="0" g="0" b="0"/>
+        </a:effectRef>
+        <a:fontRef idx="minor">
+          <a:schemeClr val="lt1"/>
+        </a:fontRef>
+      </dsp:style>
+    </dsp:sp>
+    <dsp:sp modelId="{58BAA08C-7034-47F8-A3C1-069084F6C1CC}">
+      <dsp:nvSpPr>
+        <dsp:cNvPr id="0" name=""/>
+        <dsp:cNvSpPr/>
+      </dsp:nvSpPr>
+      <dsp:spPr>
+        <a:xfrm>
+          <a:off x="0" y="3135343"/>
+          <a:ext cx="3993357" cy="783716"/>
+        </a:xfrm>
+        <a:prstGeom prst="rect">
+          <a:avLst/>
+        </a:prstGeom>
+        <a:noFill/>
+        <a:ln>
+          <a:noFill/>
+        </a:ln>
+        <a:effectLst/>
+      </dsp:spPr>
+      <dsp:style>
+        <a:lnRef idx="0">
+          <a:scrgbClr r="0" g="0" b="0"/>
+        </a:lnRef>
+        <a:fillRef idx="0">
+          <a:scrgbClr r="0" g="0" b="0"/>
+        </a:fillRef>
+        <a:effectRef idx="0">
+          <a:scrgbClr r="0" g="0" b="0"/>
+        </a:effectRef>
+        <a:fontRef idx="minor"/>
+      </dsp:style>
+      <dsp:txBody>
+        <a:bodyPr spcFirstLastPara="0" vert="horz" wrap="square" lIns="72390" tIns="72390" rIns="72390" bIns="72390" numCol="1" spcCol="1270" anchor="t" anchorCtr="0">
+          <a:noAutofit/>
+        </a:bodyPr>
+        <a:lstStyle/>
+        <a:p>
+          <a:pPr marL="0" lvl="0" indent="0" algn="l" defTabSz="844550">
+            <a:lnSpc>
+              <a:spcPct val="90000"/>
+            </a:lnSpc>
+            <a:spcBef>
+              <a:spcPct val="0"/>
+            </a:spcBef>
+            <a:spcAft>
+              <a:spcPct val="35000"/>
+            </a:spcAft>
+            <a:buNone/>
+          </a:pPr>
+          <a:r>
+            <a:rPr lang="en-US" sz="1900" kern="1200"/>
+            <a:t>Goal: Convert a trained model into a practical decision-support application.</a:t>
+          </a:r>
+        </a:p>
+      </dsp:txBody>
+      <dsp:txXfrm>
+        <a:off x="0" y="3135343"/>
+        <a:ext cx="3993357" cy="783716"/>
+      </dsp:txXfrm>
+    </dsp:sp>
+  </dsp:spTree>
+</dsp:drawing>
+</file>
+
 <file path=ppt/diagrams/layout1.xml><?xml version="1.0" encoding="utf-8"?>
 <dgm:layoutDef xmlns:dgm="http://schemas.openxmlformats.org/drawingml/2006/diagram" xmlns:a="http://schemas.openxmlformats.org/drawingml/2006/main" uniqueId="urn:microsoft.com/office/officeart/2016/7/layout/BasicLinearProcessNumbered">
   <dgm:title val="Basic Linear Process Numbered"/>
@@ -10253,6 +11924,472 @@
 </dgm:layoutDef>
 </file>
 
+<file path=ppt/diagrams/layout6.xml><?xml version="1.0" encoding="utf-8"?>
+<dgm:layoutDef xmlns:dgm="http://schemas.openxmlformats.org/drawingml/2006/diagram" xmlns:a="http://schemas.openxmlformats.org/drawingml/2006/main" uniqueId="urn:microsoft.com/office/officeart/2008/layout/LinedList">
+  <dgm:title val=""/>
+  <dgm:desc val=""/>
+  <dgm:catLst>
+    <dgm:cat type="hierarchy" pri="8000"/>
+    <dgm:cat type="list" pri="2500"/>
+  </dgm:catLst>
+  <dgm:sampData>
+    <dgm:dataModel>
+      <dgm:ptLst>
+        <dgm:pt modelId="0" type="doc"/>
+        <dgm:pt modelId="1">
+          <dgm:prSet phldr="1"/>
+        </dgm:pt>
+        <dgm:pt modelId="11">
+          <dgm:prSet phldr="1"/>
+        </dgm:pt>
+        <dgm:pt modelId="12">
+          <dgm:prSet phldr="1"/>
+        </dgm:pt>
+        <dgm:pt modelId="13">
+          <dgm:prSet phldr="1"/>
+        </dgm:pt>
+      </dgm:ptLst>
+      <dgm:cxnLst>
+        <dgm:cxn modelId="2" srcId="0" destId="1" srcOrd="0" destOrd="0"/>
+        <dgm:cxn modelId="3" srcId="1" destId="11" srcOrd="0" destOrd="0"/>
+        <dgm:cxn modelId="4" srcId="1" destId="12" srcOrd="1" destOrd="0"/>
+        <dgm:cxn modelId="5" srcId="1" destId="13" srcOrd="2" destOrd="0"/>
+      </dgm:cxnLst>
+      <dgm:bg/>
+      <dgm:whole/>
+    </dgm:dataModel>
+  </dgm:sampData>
+  <dgm:styleData>
+    <dgm:dataModel>
+      <dgm:ptLst>
+        <dgm:pt modelId="0" type="doc"/>
+        <dgm:pt modelId="1">
+          <dgm:prSet phldr="1"/>
+        </dgm:pt>
+        <dgm:pt modelId="11">
+          <dgm:prSet phldr="1"/>
+        </dgm:pt>
+        <dgm:pt modelId="12">
+          <dgm:prSet phldr="1"/>
+        </dgm:pt>
+      </dgm:ptLst>
+      <dgm:cxnLst>
+        <dgm:cxn modelId="2" srcId="0" destId="1" srcOrd="0" destOrd="0"/>
+        <dgm:cxn modelId="3" srcId="1" destId="11" srcOrd="0" destOrd="0"/>
+        <dgm:cxn modelId="4" srcId="1" destId="12" srcOrd="1" destOrd="0"/>
+      </dgm:cxnLst>
+      <dgm:bg/>
+      <dgm:whole/>
+    </dgm:dataModel>
+  </dgm:styleData>
+  <dgm:clrData>
+    <dgm:dataModel>
+      <dgm:ptLst>
+        <dgm:pt modelId="0" type="doc"/>
+        <dgm:pt modelId="1">
+          <dgm:prSet phldr="1"/>
+        </dgm:pt>
+        <dgm:pt modelId="11">
+          <dgm:prSet phldr="1"/>
+        </dgm:pt>
+        <dgm:pt modelId="12">
+          <dgm:prSet phldr="1"/>
+        </dgm:pt>
+      </dgm:ptLst>
+      <dgm:cxnLst>
+        <dgm:cxn modelId="2" srcId="0" destId="1" srcOrd="0" destOrd="0"/>
+        <dgm:cxn modelId="3" srcId="1" destId="11" srcOrd="0" destOrd="0"/>
+        <dgm:cxn modelId="4" srcId="1" destId="12" srcOrd="1" destOrd="0"/>
+      </dgm:cxnLst>
+      <dgm:bg/>
+      <dgm:whole/>
+    </dgm:dataModel>
+  </dgm:clrData>
+  <dgm:layoutNode name="vert0">
+    <dgm:varLst>
+      <dgm:dir/>
+      <dgm:animOne val="branch"/>
+      <dgm:animLvl val="lvl"/>
+    </dgm:varLst>
+    <dgm:choose name="Name0">
+      <dgm:if name="Name1" func="var" arg="dir" op="equ" val="norm">
+        <dgm:alg type="lin">
+          <dgm:param type="linDir" val="fromT"/>
+          <dgm:param type="nodeHorzAlign" val="l"/>
+        </dgm:alg>
+      </dgm:if>
+      <dgm:else name="Name2">
+        <dgm:alg type="lin">
+          <dgm:param type="linDir" val="fromT"/>
+          <dgm:param type="nodeHorzAlign" val="r"/>
+        </dgm:alg>
+      </dgm:else>
+    </dgm:choose>
+    <dgm:shape xmlns:r="http://schemas.openxmlformats.org/officeDocument/2006/relationships" r:blip="">
+      <dgm:adjLst/>
+    </dgm:shape>
+    <dgm:presOf/>
+    <dgm:constrLst>
+      <dgm:constr type="w" for="ch" forName="horz1" refType="w"/>
+      <dgm:constr type="h" for="ch" forName="horz1" refType="h"/>
+      <dgm:constr type="h" for="des" forName="vert1" refType="h"/>
+      <dgm:constr type="h" for="des" forName="tx1" refType="h"/>
+      <dgm:constr type="h" for="des" forName="horz2" refType="h"/>
+      <dgm:constr type="h" for="des" forName="vert2" refType="h"/>
+      <dgm:constr type="h" for="des" forName="horz3" refType="h"/>
+      <dgm:constr type="h" for="des" forName="vert3" refType="h"/>
+      <dgm:constr type="h" for="des" forName="horz4" refType="h"/>
+      <dgm:constr type="h" for="des" ptType="node" refType="h"/>
+      <dgm:constr type="primFontSz" for="des" forName="tx1" op="equ" val="65"/>
+      <dgm:constr type="primFontSz" for="des" forName="tx2" op="equ" val="65"/>
+      <dgm:constr type="primFontSz" for="des" forName="tx3" op="equ" val="65"/>
+      <dgm:constr type="primFontSz" for="des" forName="tx4" op="equ" val="65"/>
+      <dgm:constr type="w" for="des" forName="thickLine" refType="w"/>
+      <dgm:constr type="h" for="des" forName="thickLine"/>
+      <dgm:constr type="h" for="des" forName="thinLine1"/>
+      <dgm:constr type="h" for="des" forName="thinLine2b"/>
+      <dgm:constr type="h" for="des" forName="thinLine3"/>
+      <dgm:constr type="h" for="des" forName="vertSpace2a" refType="h" fact="0.05"/>
+      <dgm:constr type="h" for="des" forName="vertSpace2b" refType="h" refFor="des" refForName="vertSpace2a"/>
+    </dgm:constrLst>
+    <dgm:forEach name="Name3" axis="ch" ptType="node">
+      <dgm:layoutNode name="thickLine" styleLbl="alignNode1">
+        <dgm:alg type="sp"/>
+        <dgm:shape xmlns:r="http://schemas.openxmlformats.org/officeDocument/2006/relationships" type="line" r:blip="">
+          <dgm:adjLst/>
+        </dgm:shape>
+        <dgm:presOf/>
+      </dgm:layoutNode>
+      <dgm:layoutNode name="horz1">
+        <dgm:choose name="Name4">
+          <dgm:if name="Name5" func="var" arg="dir" op="equ" val="norm">
+            <dgm:alg type="lin">
+              <dgm:param type="linDir" val="fromL"/>
+              <dgm:param type="nodeVertAlign" val="t"/>
+            </dgm:alg>
+          </dgm:if>
+          <dgm:else name="Name6">
+            <dgm:alg type="lin">
+              <dgm:param type="linDir" val="fromR"/>
+              <dgm:param type="nodeVertAlign" val="t"/>
+            </dgm:alg>
+          </dgm:else>
+        </dgm:choose>
+        <dgm:shape xmlns:r="http://schemas.openxmlformats.org/officeDocument/2006/relationships" r:blip="">
+          <dgm:adjLst/>
+        </dgm:shape>
+        <dgm:presOf/>
+        <dgm:choose name="Name7">
+          <dgm:if name="Name8" axis="root des" func="maxDepth" op="equ" val="1">
+            <dgm:constrLst>
+              <dgm:constr type="w" for="ch" forName="tx1" refType="w"/>
+            </dgm:constrLst>
+          </dgm:if>
+          <dgm:if name="Name9" axis="root des" func="maxDepth" op="equ" val="2">
+            <dgm:constrLst>
+              <dgm:constr type="w" for="ch" forName="tx1" refType="w" fact="0.2"/>
+              <dgm:constr type="w" for="des" forName="tx2" refType="w" fact="0.785"/>
+              <dgm:constr type="w" for="des" forName="horzSpace2" refType="w" fact="0.015"/>
+              <dgm:constr type="w" for="des" forName="thinLine2b" refType="w" fact="0.8"/>
+            </dgm:constrLst>
+          </dgm:if>
+          <dgm:if name="Name10" axis="root des" func="maxDepth" op="equ" val="3">
+            <dgm:constrLst>
+              <dgm:constr type="w" for="ch" forName="tx1" refType="w" fact="0.2"/>
+              <dgm:constr type="w" for="des" forName="tx2" refType="w" fact="0.385"/>
+              <dgm:constr type="w" for="des" forName="tx3" refType="w" fact="0.385"/>
+              <dgm:constr type="w" for="des" forName="horzSpace2" refType="w" fact="0.015"/>
+              <dgm:constr type="w" for="des" forName="horzSpace3" refType="w" fact="0.015"/>
+              <dgm:constr type="w" for="des" forName="thinLine2b" refType="w" fact="0.8"/>
+              <dgm:constr type="w" for="des" forName="thinLine3" refType="w" fact="0.385"/>
+            </dgm:constrLst>
+          </dgm:if>
+          <dgm:if name="Name11" axis="root des" func="maxDepth" op="gte" val="4">
+            <dgm:constrLst>
+              <dgm:constr type="w" for="ch" forName="tx1" refType="w" fact="0.2"/>
+              <dgm:constr type="w" for="des" forName="tx2" refType="w" fact="0.2516"/>
+              <dgm:constr type="w" for="des" forName="tx3" refType="w" fact="0.2516"/>
+              <dgm:constr type="w" for="des" forName="tx4" refType="w" fact="0.2516"/>
+              <dgm:constr type="w" for="des" forName="horzSpace2" refType="w" fact="0.015"/>
+              <dgm:constr type="w" for="des" forName="horzSpace3" refType="w" fact="0.015"/>
+              <dgm:constr type="w" for="des" forName="horzSpace4" refType="w" fact="0.015"/>
+              <dgm:constr type="w" for="des" forName="thinLine2b" refType="w" fact="0.8"/>
+              <dgm:constr type="w" for="des" forName="thinLine3" refType="w" fact="0.5332"/>
+            </dgm:constrLst>
+          </dgm:if>
+          <dgm:else name="Name12"/>
+        </dgm:choose>
+        <dgm:layoutNode name="tx1" styleLbl="revTx">
+          <dgm:alg type="tx">
+            <dgm:param type="parTxLTRAlign" val="l"/>
+            <dgm:param type="parTxRTLAlign" val="r"/>
+            <dgm:param type="txAnchorVert" val="t"/>
+          </dgm:alg>
+          <dgm:shape xmlns:r="http://schemas.openxmlformats.org/officeDocument/2006/relationships" type="rect" r:blip="">
+            <dgm:adjLst/>
+          </dgm:shape>
+          <dgm:presOf axis="self"/>
+          <dgm:constrLst>
+            <dgm:constr type="tMarg" refType="primFontSz" fact="0.3"/>
+            <dgm:constr type="bMarg" refType="primFontSz" fact="0.3"/>
+            <dgm:constr type="lMarg" refType="primFontSz" fact="0.3"/>
+            <dgm:constr type="rMarg" refType="primFontSz" fact="0.3"/>
+          </dgm:constrLst>
+          <dgm:ruleLst>
+            <dgm:rule type="primFontSz" val="5" fact="NaN" max="NaN"/>
+          </dgm:ruleLst>
+        </dgm:layoutNode>
+        <dgm:layoutNode name="vert1">
+          <dgm:choose name="Name13">
+            <dgm:if name="Name14" func="var" arg="dir" op="equ" val="norm">
+              <dgm:alg type="lin">
+                <dgm:param type="linDir" val="fromT"/>
+                <dgm:param type="nodeHorzAlign" val="l"/>
+              </dgm:alg>
+            </dgm:if>
+            <dgm:else name="Name15">
+              <dgm:alg type="lin">
+                <dgm:param type="linDir" val="fromT"/>
+                <dgm:param type="nodeHorzAlign" val="r"/>
+              </dgm:alg>
+            </dgm:else>
+          </dgm:choose>
+          <dgm:shape xmlns:r="http://schemas.openxmlformats.org/officeDocument/2006/relationships" r:blip="">
+            <dgm:adjLst/>
+          </dgm:shape>
+          <dgm:presOf/>
+          <dgm:forEach name="Name16" axis="ch" ptType="node">
+            <dgm:choose name="Name17">
+              <dgm:if name="Name18" axis="self" ptType="node" func="pos" op="equ" val="1">
+                <dgm:layoutNode name="vertSpace2a">
+                  <dgm:alg type="sp"/>
+                  <dgm:shape xmlns:r="http://schemas.openxmlformats.org/officeDocument/2006/relationships" r:blip="">
+                    <dgm:adjLst/>
+                  </dgm:shape>
+                  <dgm:presOf/>
+                </dgm:layoutNode>
+              </dgm:if>
+              <dgm:else name="Name19"/>
+            </dgm:choose>
+            <dgm:layoutNode name="horz2">
+              <dgm:choose name="Name20">
+                <dgm:if name="Name21" func="var" arg="dir" op="equ" val="norm">
+                  <dgm:alg type="lin">
+                    <dgm:param type="linDir" val="fromL"/>
+                    <dgm:param type="nodeVertAlign" val="t"/>
+                  </dgm:alg>
+                </dgm:if>
+                <dgm:else name="Name22">
+                  <dgm:alg type="lin">
+                    <dgm:param type="linDir" val="fromR"/>
+                    <dgm:param type="nodeVertAlign" val="t"/>
+                  </dgm:alg>
+                </dgm:else>
+              </dgm:choose>
+              <dgm:shape xmlns:r="http://schemas.openxmlformats.org/officeDocument/2006/relationships" r:blip="">
+                <dgm:adjLst/>
+              </dgm:shape>
+              <dgm:presOf/>
+              <dgm:layoutNode name="horzSpace2">
+                <dgm:alg type="sp"/>
+                <dgm:shape xmlns:r="http://schemas.openxmlformats.org/officeDocument/2006/relationships" r:blip="">
+                  <dgm:adjLst/>
+                </dgm:shape>
+                <dgm:presOf/>
+              </dgm:layoutNode>
+              <dgm:layoutNode name="tx2" styleLbl="revTx">
+                <dgm:alg type="tx">
+                  <dgm:param type="parTxLTRAlign" val="l"/>
+                  <dgm:param type="parTxRTLAlign" val="r"/>
+                  <dgm:param type="txAnchorVert" val="t"/>
+                </dgm:alg>
+                <dgm:shape xmlns:r="http://schemas.openxmlformats.org/officeDocument/2006/relationships" type="rect" r:blip="">
+                  <dgm:adjLst/>
+                </dgm:shape>
+                <dgm:presOf axis="self"/>
+                <dgm:constrLst>
+                  <dgm:constr type="tMarg" refType="primFontSz" fact="0.3"/>
+                  <dgm:constr type="bMarg" refType="primFontSz" fact="0.3"/>
+                  <dgm:constr type="lMarg" refType="primFontSz" fact="0.3"/>
+                  <dgm:constr type="rMarg" refType="primFontSz" fact="0.3"/>
+                </dgm:constrLst>
+                <dgm:ruleLst>
+                  <dgm:rule type="primFontSz" val="5" fact="NaN" max="NaN"/>
+                </dgm:ruleLst>
+              </dgm:layoutNode>
+              <dgm:layoutNode name="vert2">
+                <dgm:choose name="Name23">
+                  <dgm:if name="Name24" func="var" arg="dir" op="equ" val="norm">
+                    <dgm:alg type="lin">
+                      <dgm:param type="linDir" val="fromT"/>
+                      <dgm:param type="nodeHorzAlign" val="l"/>
+                    </dgm:alg>
+                  </dgm:if>
+                  <dgm:else name="Name25">
+                    <dgm:alg type="lin">
+                      <dgm:param type="linDir" val="fromT"/>
+                      <dgm:param type="nodeHorzAlign" val="r"/>
+                    </dgm:alg>
+                  </dgm:else>
+                </dgm:choose>
+                <dgm:shape xmlns:r="http://schemas.openxmlformats.org/officeDocument/2006/relationships" r:blip="">
+                  <dgm:adjLst/>
+                </dgm:shape>
+                <dgm:presOf/>
+                <dgm:forEach name="Name26" axis="ch" ptType="node">
+                  <dgm:layoutNode name="horz3">
+                    <dgm:choose name="Name27">
+                      <dgm:if name="Name28" func="var" arg="dir" op="equ" val="norm">
+                        <dgm:alg type="lin">
+                          <dgm:param type="linDir" val="fromL"/>
+                          <dgm:param type="nodeVertAlign" val="t"/>
+                        </dgm:alg>
+                      </dgm:if>
+                      <dgm:else name="Name29">
+                        <dgm:alg type="lin">
+                          <dgm:param type="linDir" val="fromR"/>
+                          <dgm:param type="nodeVertAlign" val="t"/>
+                        </dgm:alg>
+                      </dgm:else>
+                    </dgm:choose>
+                    <dgm:shape xmlns:r="http://schemas.openxmlformats.org/officeDocument/2006/relationships" r:blip="">
+                      <dgm:adjLst/>
+                    </dgm:shape>
+                    <dgm:presOf/>
+                    <dgm:layoutNode name="horzSpace3">
+                      <dgm:alg type="sp"/>
+                      <dgm:shape xmlns:r="http://schemas.openxmlformats.org/officeDocument/2006/relationships" r:blip="">
+                        <dgm:adjLst/>
+                      </dgm:shape>
+                      <dgm:presOf/>
+                    </dgm:layoutNode>
+                    <dgm:layoutNode name="tx3" styleLbl="revTx">
+                      <dgm:alg type="tx">
+                        <dgm:param type="parTxLTRAlign" val="l"/>
+                        <dgm:param type="parTxRTLAlign" val="r"/>
+                        <dgm:param type="txAnchorVert" val="t"/>
+                      </dgm:alg>
+                      <dgm:shape xmlns:r="http://schemas.openxmlformats.org/officeDocument/2006/relationships" type="rect" r:blip="">
+                        <dgm:adjLst/>
+                      </dgm:shape>
+                      <dgm:presOf axis="self"/>
+                      <dgm:constrLst>
+                        <dgm:constr type="tMarg" refType="primFontSz" fact="0.3"/>
+                        <dgm:constr type="bMarg" refType="primFontSz" fact="0.3"/>
+                        <dgm:constr type="lMarg" refType="primFontSz" fact="0.3"/>
+                        <dgm:constr type="rMarg" refType="primFontSz" fact="0.3"/>
+                      </dgm:constrLst>
+                      <dgm:ruleLst>
+                        <dgm:rule type="primFontSz" val="5" fact="NaN" max="NaN"/>
+                      </dgm:ruleLst>
+                    </dgm:layoutNode>
+                    <dgm:layoutNode name="vert3">
+                      <dgm:choose name="Name30">
+                        <dgm:if name="Name31" func="var" arg="dir" op="equ" val="norm">
+                          <dgm:alg type="lin">
+                            <dgm:param type="linDir" val="fromT"/>
+                            <dgm:param type="nodeHorzAlign" val="l"/>
+                          </dgm:alg>
+                        </dgm:if>
+                        <dgm:else name="Name32">
+                          <dgm:alg type="lin">
+                            <dgm:param type="linDir" val="fromT"/>
+                            <dgm:param type="nodeHorzAlign" val="r"/>
+                          </dgm:alg>
+                        </dgm:else>
+                      </dgm:choose>
+                      <dgm:shape xmlns:r="http://schemas.openxmlformats.org/officeDocument/2006/relationships" r:blip="">
+                        <dgm:adjLst/>
+                      </dgm:shape>
+                      <dgm:presOf/>
+                      <dgm:forEach name="Name33" axis="ch" ptType="node">
+                        <dgm:layoutNode name="horz4">
+                          <dgm:choose name="Name34">
+                            <dgm:if name="Name35" func="var" arg="dir" op="equ" val="norm">
+                              <dgm:alg type="lin">
+                                <dgm:param type="linDir" val="fromL"/>
+                                <dgm:param type="nodeVertAlign" val="t"/>
+                              </dgm:alg>
+                            </dgm:if>
+                            <dgm:else name="Name36">
+                              <dgm:alg type="lin">
+                                <dgm:param type="linDir" val="fromR"/>
+                                <dgm:param type="nodeVertAlign" val="t"/>
+                              </dgm:alg>
+                            </dgm:else>
+                          </dgm:choose>
+                          <dgm:shape xmlns:r="http://schemas.openxmlformats.org/officeDocument/2006/relationships" r:blip="">
+                            <dgm:adjLst/>
+                          </dgm:shape>
+                          <dgm:presOf/>
+                          <dgm:layoutNode name="horzSpace4">
+                            <dgm:alg type="sp"/>
+                            <dgm:shape xmlns:r="http://schemas.openxmlformats.org/officeDocument/2006/relationships" r:blip="">
+                              <dgm:adjLst/>
+                            </dgm:shape>
+                            <dgm:presOf/>
+                          </dgm:layoutNode>
+                          <dgm:layoutNode name="tx4" styleLbl="revTx">
+                            <dgm:varLst>
+                              <dgm:bulletEnabled val="1"/>
+                            </dgm:varLst>
+                            <dgm:alg type="tx">
+                              <dgm:param type="parTxLTRAlign" val="l"/>
+                              <dgm:param type="parTxRTLAlign" val="r"/>
+                              <dgm:param type="txAnchorVert" val="t"/>
+                            </dgm:alg>
+                            <dgm:shape xmlns:r="http://schemas.openxmlformats.org/officeDocument/2006/relationships" type="rect" r:blip="">
+                              <dgm:adjLst/>
+                            </dgm:shape>
+                            <dgm:presOf axis="desOrSelf" ptType="node"/>
+                            <dgm:constrLst>
+                              <dgm:constr type="tMarg" refType="primFontSz" fact="0.3"/>
+                              <dgm:constr type="bMarg" refType="primFontSz" fact="0.3"/>
+                              <dgm:constr type="lMarg" refType="primFontSz" fact="0.3"/>
+                              <dgm:constr type="rMarg" refType="primFontSz" fact="0.3"/>
+                            </dgm:constrLst>
+                            <dgm:ruleLst>
+                              <dgm:rule type="primFontSz" val="5" fact="NaN" max="NaN"/>
+                            </dgm:ruleLst>
+                          </dgm:layoutNode>
+                        </dgm:layoutNode>
+                      </dgm:forEach>
+                    </dgm:layoutNode>
+                  </dgm:layoutNode>
+                  <dgm:forEach name="Name37" axis="followSib" ptType="sibTrans" cnt="1">
+                    <dgm:layoutNode name="thinLine3" styleLbl="callout">
+                      <dgm:alg type="sp"/>
+                      <dgm:shape xmlns:r="http://schemas.openxmlformats.org/officeDocument/2006/relationships" type="line" r:blip="">
+                        <dgm:adjLst/>
+                      </dgm:shape>
+                      <dgm:presOf/>
+                    </dgm:layoutNode>
+                  </dgm:forEach>
+                </dgm:forEach>
+              </dgm:layoutNode>
+            </dgm:layoutNode>
+            <dgm:layoutNode name="thinLine2b" styleLbl="callout">
+              <dgm:alg type="sp"/>
+              <dgm:shape xmlns:r="http://schemas.openxmlformats.org/officeDocument/2006/relationships" type="line" r:blip="">
+                <dgm:adjLst/>
+              </dgm:shape>
+              <dgm:presOf/>
+            </dgm:layoutNode>
+            <dgm:layoutNode name="vertSpace2b">
+              <dgm:alg type="sp"/>
+              <dgm:shape xmlns:r="http://schemas.openxmlformats.org/officeDocument/2006/relationships" r:blip="">
+                <dgm:adjLst/>
+              </dgm:shape>
+              <dgm:presOf/>
+            </dgm:layoutNode>
+          </dgm:forEach>
+        </dgm:layoutNode>
+      </dgm:layoutNode>
+    </dgm:forEach>
+  </dgm:layoutNode>
+</dgm:layoutDef>
+</file>
+
 <file path=ppt/diagrams/quickStyle1.xml><?xml version="1.0" encoding="utf-8"?>
 <dgm:styleDef xmlns:dgm="http://schemas.openxmlformats.org/drawingml/2006/diagram" xmlns:a="http://schemas.openxmlformats.org/drawingml/2006/main" uniqueId="urn:microsoft.com/office/officeart/2005/8/quickstyle/simple4">
   <dgm:title val=""/>
@@ -14390,6 +16527,1040 @@
 </file>
 
 <file path=ppt/diagrams/quickStyle5.xml><?xml version="1.0" encoding="utf-8"?>
+<dgm:styleDef xmlns:dgm="http://schemas.openxmlformats.org/drawingml/2006/diagram" xmlns:a="http://schemas.openxmlformats.org/drawingml/2006/main" uniqueId="urn:microsoft.com/office/officeart/2005/8/quickstyle/simple1">
+  <dgm:title val=""/>
+  <dgm:desc val=""/>
+  <dgm:catLst>
+    <dgm:cat type="simple" pri="10100"/>
+  </dgm:catLst>
+  <dgm:scene3d>
+    <a:camera prst="orthographicFront"/>
+    <a:lightRig rig="threePt" dir="t"/>
+  </dgm:scene3d>
+  <dgm:styleLbl name="node0">
+    <dgm:scene3d>
+      <a:camera prst="orthographicFront"/>
+      <a:lightRig rig="threePt" dir="t"/>
+    </dgm:scene3d>
+    <dgm:sp3d/>
+    <dgm:txPr/>
+    <dgm:style>
+      <a:lnRef idx="2">
+        <a:scrgbClr r="0" g="0" b="0"/>
+      </a:lnRef>
+      <a:fillRef idx="1">
+        <a:scrgbClr r="0" g="0" b="0"/>
+      </a:fillRef>
+      <a:effectRef idx="0">
+        <a:scrgbClr r="0" g="0" b="0"/>
+      </a:effectRef>
+      <a:fontRef idx="minor">
+        <a:schemeClr val="lt1"/>
+      </a:fontRef>
+    </dgm:style>
+  </dgm:styleLbl>
+  <dgm:styleLbl name="lnNode1">
+    <dgm:scene3d>
+      <a:camera prst="orthographicFront"/>
+      <a:lightRig rig="threePt" dir="t"/>
+    </dgm:scene3d>
+    <dgm:sp3d/>
+    <dgm:txPr/>
+    <dgm:style>
+      <a:lnRef idx="2">
+        <a:scrgbClr r="0" g="0" b="0"/>
+      </a:lnRef>
+      <a:fillRef idx="1">
+        <a:scrgbClr r="0" g="0" b="0"/>
+      </a:fillRef>
+      <a:effectRef idx="0">
+        <a:scrgbClr r="0" g="0" b="0"/>
+      </a:effectRef>
+      <a:fontRef idx="minor">
+        <a:schemeClr val="lt1"/>
+      </a:fontRef>
+    </dgm:style>
+  </dgm:styleLbl>
+  <dgm:styleLbl name="vennNode1">
+    <dgm:scene3d>
+      <a:camera prst="orthographicFront"/>
+      <a:lightRig rig="threePt" dir="t"/>
+    </dgm:scene3d>
+    <dgm:sp3d/>
+    <dgm:txPr/>
+    <dgm:style>
+      <a:lnRef idx="2">
+        <a:scrgbClr r="0" g="0" b="0"/>
+      </a:lnRef>
+      <a:fillRef idx="1">
+        <a:scrgbClr r="0" g="0" b="0"/>
+      </a:fillRef>
+      <a:effectRef idx="0">
+        <a:scrgbClr r="0" g="0" b="0"/>
+      </a:effectRef>
+      <a:fontRef idx="minor">
+        <a:schemeClr val="tx1"/>
+      </a:fontRef>
+    </dgm:style>
+  </dgm:styleLbl>
+  <dgm:styleLbl name="alignNode1">
+    <dgm:scene3d>
+      <a:camera prst="orthographicFront"/>
+      <a:lightRig rig="threePt" dir="t"/>
+    </dgm:scene3d>
+    <dgm:sp3d/>
+    <dgm:txPr/>
+    <dgm:style>
+      <a:lnRef idx="2">
+        <a:scrgbClr r="0" g="0" b="0"/>
+      </a:lnRef>
+      <a:fillRef idx="1">
+        <a:scrgbClr r="0" g="0" b="0"/>
+      </a:fillRef>
+      <a:effectRef idx="0">
+        <a:scrgbClr r="0" g="0" b="0"/>
+      </a:effectRef>
+      <a:fontRef idx="minor">
+        <a:schemeClr val="lt1"/>
+      </a:fontRef>
+    </dgm:style>
+  </dgm:styleLbl>
+  <dgm:styleLbl name="node1">
+    <dgm:scene3d>
+      <a:camera prst="orthographicFront"/>
+      <a:lightRig rig="threePt" dir="t"/>
+    </dgm:scene3d>
+    <dgm:sp3d/>
+    <dgm:txPr/>
+    <dgm:style>
+      <a:lnRef idx="2">
+        <a:scrgbClr r="0" g="0" b="0"/>
+      </a:lnRef>
+      <a:fillRef idx="1">
+        <a:scrgbClr r="0" g="0" b="0"/>
+      </a:fillRef>
+      <a:effectRef idx="0">
+        <a:scrgbClr r="0" g="0" b="0"/>
+      </a:effectRef>
+      <a:fontRef idx="minor">
+        <a:schemeClr val="lt1"/>
+      </a:fontRef>
+    </dgm:style>
+  </dgm:styleLbl>
+  <dgm:styleLbl name="node2">
+    <dgm:scene3d>
+      <a:camera prst="orthographicFront"/>
+      <a:lightRig rig="threePt" dir="t"/>
+    </dgm:scene3d>
+    <dgm:sp3d/>
+    <dgm:txPr/>
+    <dgm:style>
+      <a:lnRef idx="2">
+        <a:scrgbClr r="0" g="0" b="0"/>
+      </a:lnRef>
+      <a:fillRef idx="1">
+        <a:scrgbClr r="0" g="0" b="0"/>
+      </a:fillRef>
+      <a:effectRef idx="0">
+        <a:scrgbClr r="0" g="0" b="0"/>
+      </a:effectRef>
+      <a:fontRef idx="minor">
+        <a:schemeClr val="lt1"/>
+      </a:fontRef>
+    </dgm:style>
+  </dgm:styleLbl>
+  <dgm:styleLbl name="node3">
+    <dgm:scene3d>
+      <a:camera prst="orthographicFront"/>
+      <a:lightRig rig="threePt" dir="t"/>
+    </dgm:scene3d>
+    <dgm:sp3d/>
+    <dgm:txPr/>
+    <dgm:style>
+      <a:lnRef idx="2">
+        <a:scrgbClr r="0" g="0" b="0"/>
+      </a:lnRef>
+      <a:fillRef idx="1">
+        <a:scrgbClr r="0" g="0" b="0"/>
+      </a:fillRef>
+      <a:effectRef idx="0">
+        <a:scrgbClr r="0" g="0" b="0"/>
+      </a:effectRef>
+      <a:fontRef idx="minor">
+        <a:schemeClr val="lt1"/>
+      </a:fontRef>
+    </dgm:style>
+  </dgm:styleLbl>
+  <dgm:styleLbl name="node4">
+    <dgm:scene3d>
+      <a:camera prst="orthographicFront"/>
+      <a:lightRig rig="threePt" dir="t"/>
+    </dgm:scene3d>
+    <dgm:sp3d/>
+    <dgm:txPr/>
+    <dgm:style>
+      <a:lnRef idx="2">
+        <a:scrgbClr r="0" g="0" b="0"/>
+      </a:lnRef>
+      <a:fillRef idx="1">
+        <a:scrgbClr r="0" g="0" b="0"/>
+      </a:fillRef>
+      <a:effectRef idx="0">
+        <a:scrgbClr r="0" g="0" b="0"/>
+      </a:effectRef>
+      <a:fontRef idx="minor">
+        <a:schemeClr val="lt1"/>
+      </a:fontRef>
+    </dgm:style>
+  </dgm:styleLbl>
+  <dgm:styleLbl name="fgImgPlace1">
+    <dgm:scene3d>
+      <a:camera prst="orthographicFront"/>
+      <a:lightRig rig="threePt" dir="t"/>
+    </dgm:scene3d>
+    <dgm:sp3d/>
+    <dgm:txPr/>
+    <dgm:style>
+      <a:lnRef idx="2">
+        <a:scrgbClr r="0" g="0" b="0"/>
+      </a:lnRef>
+      <a:fillRef idx="1">
+        <a:scrgbClr r="0" g="0" b="0"/>
+      </a:fillRef>
+      <a:effectRef idx="0">
+        <a:scrgbClr r="0" g="0" b="0"/>
+      </a:effectRef>
+      <a:fontRef idx="minor"/>
+    </dgm:style>
+  </dgm:styleLbl>
+  <dgm:styleLbl name="alignImgPlace1">
+    <dgm:scene3d>
+      <a:camera prst="orthographicFront"/>
+      <a:lightRig rig="threePt" dir="t"/>
+    </dgm:scene3d>
+    <dgm:sp3d/>
+    <dgm:txPr/>
+    <dgm:style>
+      <a:lnRef idx="2">
+        <a:scrgbClr r="0" g="0" b="0"/>
+      </a:lnRef>
+      <a:fillRef idx="1">
+        <a:scrgbClr r="0" g="0" b="0"/>
+      </a:fillRef>
+      <a:effectRef idx="0">
+        <a:scrgbClr r="0" g="0" b="0"/>
+      </a:effectRef>
+      <a:fontRef idx="minor"/>
+    </dgm:style>
+  </dgm:styleLbl>
+  <dgm:styleLbl name="bgImgPlace1">
+    <dgm:scene3d>
+      <a:camera prst="orthographicFront"/>
+      <a:lightRig rig="threePt" dir="t"/>
+    </dgm:scene3d>
+    <dgm:sp3d/>
+    <dgm:txPr/>
+    <dgm:style>
+      <a:lnRef idx="2">
+        <a:scrgbClr r="0" g="0" b="0"/>
+      </a:lnRef>
+      <a:fillRef idx="1">
+        <a:scrgbClr r="0" g="0" b="0"/>
+      </a:fillRef>
+      <a:effectRef idx="0">
+        <a:scrgbClr r="0" g="0" b="0"/>
+      </a:effectRef>
+      <a:fontRef idx="minor"/>
+    </dgm:style>
+  </dgm:styleLbl>
+  <dgm:styleLbl name="sibTrans2D1">
+    <dgm:scene3d>
+      <a:camera prst="orthographicFront"/>
+      <a:lightRig rig="threePt" dir="t"/>
+    </dgm:scene3d>
+    <dgm:sp3d/>
+    <dgm:txPr/>
+    <dgm:style>
+      <a:lnRef idx="0">
+        <a:scrgbClr r="0" g="0" b="0"/>
+      </a:lnRef>
+      <a:fillRef idx="1">
+        <a:scrgbClr r="0" g="0" b="0"/>
+      </a:fillRef>
+      <a:effectRef idx="0">
+        <a:scrgbClr r="0" g="0" b="0"/>
+      </a:effectRef>
+      <a:fontRef idx="minor">
+        <a:schemeClr val="lt1"/>
+      </a:fontRef>
+    </dgm:style>
+  </dgm:styleLbl>
+  <dgm:styleLbl name="fgSibTrans2D1">
+    <dgm:scene3d>
+      <a:camera prst="orthographicFront"/>
+      <a:lightRig rig="threePt" dir="t"/>
+    </dgm:scene3d>
+    <dgm:sp3d/>
+    <dgm:txPr/>
+    <dgm:style>
+      <a:lnRef idx="0">
+        <a:scrgbClr r="0" g="0" b="0"/>
+      </a:lnRef>
+      <a:fillRef idx="1">
+        <a:scrgbClr r="0" g="0" b="0"/>
+      </a:fillRef>
+      <a:effectRef idx="0">
+        <a:scrgbClr r="0" g="0" b="0"/>
+      </a:effectRef>
+      <a:fontRef idx="minor">
+        <a:schemeClr val="lt1"/>
+      </a:fontRef>
+    </dgm:style>
+  </dgm:styleLbl>
+  <dgm:styleLbl name="bgSibTrans2D1">
+    <dgm:scene3d>
+      <a:camera prst="orthographicFront"/>
+      <a:lightRig rig="threePt" dir="t"/>
+    </dgm:scene3d>
+    <dgm:sp3d/>
+    <dgm:txPr/>
+    <dgm:style>
+      <a:lnRef idx="0">
+        <a:scrgbClr r="0" g="0" b="0"/>
+      </a:lnRef>
+      <a:fillRef idx="1">
+        <a:scrgbClr r="0" g="0" b="0"/>
+      </a:fillRef>
+      <a:effectRef idx="0">
+        <a:scrgbClr r="0" g="0" b="0"/>
+      </a:effectRef>
+      <a:fontRef idx="minor">
+        <a:schemeClr val="lt1"/>
+      </a:fontRef>
+    </dgm:style>
+  </dgm:styleLbl>
+  <dgm:styleLbl name="sibTrans1D1">
+    <dgm:scene3d>
+      <a:camera prst="orthographicFront"/>
+      <a:lightRig rig="threePt" dir="t"/>
+    </dgm:scene3d>
+    <dgm:sp3d/>
+    <dgm:txPr/>
+    <dgm:style>
+      <a:lnRef idx="1">
+        <a:scrgbClr r="0" g="0" b="0"/>
+      </a:lnRef>
+      <a:fillRef idx="0">
+        <a:scrgbClr r="0" g="0" b="0"/>
+      </a:fillRef>
+      <a:effectRef idx="0">
+        <a:scrgbClr r="0" g="0" b="0"/>
+      </a:effectRef>
+      <a:fontRef idx="minor"/>
+    </dgm:style>
+  </dgm:styleLbl>
+  <dgm:styleLbl name="callout">
+    <dgm:scene3d>
+      <a:camera prst="orthographicFront"/>
+      <a:lightRig rig="threePt" dir="t"/>
+    </dgm:scene3d>
+    <dgm:sp3d/>
+    <dgm:txPr/>
+    <dgm:style>
+      <a:lnRef idx="2">
+        <a:scrgbClr r="0" g="0" b="0"/>
+      </a:lnRef>
+      <a:fillRef idx="1">
+        <a:scrgbClr r="0" g="0" b="0"/>
+      </a:fillRef>
+      <a:effectRef idx="0">
+        <a:scrgbClr r="0" g="0" b="0"/>
+      </a:effectRef>
+      <a:fontRef idx="minor"/>
+    </dgm:style>
+  </dgm:styleLbl>
+  <dgm:styleLbl name="asst0">
+    <dgm:scene3d>
+      <a:camera prst="orthographicFront"/>
+      <a:lightRig rig="threePt" dir="t"/>
+    </dgm:scene3d>
+    <dgm:sp3d/>
+    <dgm:txPr/>
+    <dgm:style>
+      <a:lnRef idx="2">
+        <a:scrgbClr r="0" g="0" b="0"/>
+      </a:lnRef>
+      <a:fillRef idx="1">
+        <a:scrgbClr r="0" g="0" b="0"/>
+      </a:fillRef>
+      <a:effectRef idx="0">
+        <a:scrgbClr r="0" g="0" b="0"/>
+      </a:effectRef>
+      <a:fontRef idx="minor">
+        <a:schemeClr val="lt1"/>
+      </a:fontRef>
+    </dgm:style>
+  </dgm:styleLbl>
+  <dgm:styleLbl name="asst1">
+    <dgm:scene3d>
+      <a:camera prst="orthographicFront"/>
+      <a:lightRig rig="threePt" dir="t"/>
+    </dgm:scene3d>
+    <dgm:sp3d/>
+    <dgm:txPr/>
+    <dgm:style>
+      <a:lnRef idx="2">
+        <a:scrgbClr r="0" g="0" b="0"/>
+      </a:lnRef>
+      <a:fillRef idx="1">
+        <a:scrgbClr r="0" g="0" b="0"/>
+      </a:fillRef>
+      <a:effectRef idx="0">
+        <a:scrgbClr r="0" g="0" b="0"/>
+      </a:effectRef>
+      <a:fontRef idx="minor">
+        <a:schemeClr val="lt1"/>
+      </a:fontRef>
+    </dgm:style>
+  </dgm:styleLbl>
+  <dgm:styleLbl name="asst2">
+    <dgm:scene3d>
+      <a:camera prst="orthographicFront"/>
+      <a:lightRig rig="threePt" dir="t"/>
+    </dgm:scene3d>
+    <dgm:sp3d/>
+    <dgm:txPr/>
+    <dgm:style>
+      <a:lnRef idx="2">
+        <a:scrgbClr r="0" g="0" b="0"/>
+      </a:lnRef>
+      <a:fillRef idx="1">
+        <a:scrgbClr r="0" g="0" b="0"/>
+      </a:fillRef>
+      <a:effectRef idx="0">
+        <a:scrgbClr r="0" g="0" b="0"/>
+      </a:effectRef>
+      <a:fontRef idx="minor">
+        <a:schemeClr val="lt1"/>
+      </a:fontRef>
+    </dgm:style>
+  </dgm:styleLbl>
+  <dgm:styleLbl name="asst3">
+    <dgm:scene3d>
+      <a:camera prst="orthographicFront"/>
+      <a:lightRig rig="threePt" dir="t"/>
+    </dgm:scene3d>
+    <dgm:sp3d/>
+    <dgm:txPr/>
+    <dgm:style>
+      <a:lnRef idx="2">
+        <a:scrgbClr r="0" g="0" b="0"/>
+      </a:lnRef>
+      <a:fillRef idx="1">
+        <a:scrgbClr r="0" g="0" b="0"/>
+      </a:fillRef>
+      <a:effectRef idx="0">
+        <a:scrgbClr r="0" g="0" b="0"/>
+      </a:effectRef>
+      <a:fontRef idx="minor">
+        <a:schemeClr val="lt1"/>
+      </a:fontRef>
+    </dgm:style>
+  </dgm:styleLbl>
+  <dgm:styleLbl name="asst4">
+    <dgm:scene3d>
+      <a:camera prst="orthographicFront"/>
+      <a:lightRig rig="threePt" dir="t"/>
+    </dgm:scene3d>
+    <dgm:sp3d/>
+    <dgm:txPr/>
+    <dgm:style>
+      <a:lnRef idx="2">
+        <a:scrgbClr r="0" g="0" b="0"/>
+      </a:lnRef>
+      <a:fillRef idx="1">
+        <a:scrgbClr r="0" g="0" b="0"/>
+      </a:fillRef>
+      <a:effectRef idx="0">
+        <a:scrgbClr r="0" g="0" b="0"/>
+      </a:effectRef>
+      <a:fontRef idx="minor">
+        <a:schemeClr val="lt1"/>
+      </a:fontRef>
+    </dgm:style>
+  </dgm:styleLbl>
+  <dgm:styleLbl name="parChTrans2D1">
+    <dgm:scene3d>
+      <a:camera prst="orthographicFront"/>
+      <a:lightRig rig="threePt" dir="t"/>
+    </dgm:scene3d>
+    <dgm:sp3d/>
+    <dgm:txPr/>
+    <dgm:style>
+      <a:lnRef idx="2">
+        <a:scrgbClr r="0" g="0" b="0"/>
+      </a:lnRef>
+      <a:fillRef idx="1">
+        <a:scrgbClr r="0" g="0" b="0"/>
+      </a:fillRef>
+      <a:effectRef idx="0">
+        <a:scrgbClr r="0" g="0" b="0"/>
+      </a:effectRef>
+      <a:fontRef idx="minor">
+        <a:schemeClr val="lt1"/>
+      </a:fontRef>
+    </dgm:style>
+  </dgm:styleLbl>
+  <dgm:styleLbl name="parChTrans2D2">
+    <dgm:scene3d>
+      <a:camera prst="orthographicFront"/>
+      <a:lightRig rig="threePt" dir="t"/>
+    </dgm:scene3d>
+    <dgm:sp3d/>
+    <dgm:txPr/>
+    <dgm:style>
+      <a:lnRef idx="2">
+        <a:scrgbClr r="0" g="0" b="0"/>
+      </a:lnRef>
+      <a:fillRef idx="1">
+        <a:scrgbClr r="0" g="0" b="0"/>
+      </a:fillRef>
+      <a:effectRef idx="0">
+        <a:scrgbClr r="0" g="0" b="0"/>
+      </a:effectRef>
+      <a:fontRef idx="minor">
+        <a:schemeClr val="lt1"/>
+      </a:fontRef>
+    </dgm:style>
+  </dgm:styleLbl>
+  <dgm:styleLbl name="parChTrans2D3">
+    <dgm:scene3d>
+      <a:camera prst="orthographicFront"/>
+      <a:lightRig rig="threePt" dir="t"/>
+    </dgm:scene3d>
+    <dgm:sp3d/>
+    <dgm:txPr/>
+    <dgm:style>
+      <a:lnRef idx="2">
+        <a:scrgbClr r="0" g="0" b="0"/>
+      </a:lnRef>
+      <a:fillRef idx="1">
+        <a:scrgbClr r="0" g="0" b="0"/>
+      </a:fillRef>
+      <a:effectRef idx="0">
+        <a:scrgbClr r="0" g="0" b="0"/>
+      </a:effectRef>
+      <a:fontRef idx="minor">
+        <a:schemeClr val="lt1"/>
+      </a:fontRef>
+    </dgm:style>
+  </dgm:styleLbl>
+  <dgm:styleLbl name="parChTrans2D4">
+    <dgm:scene3d>
+      <a:camera prst="orthographicFront"/>
+      <a:lightRig rig="threePt" dir="t"/>
+    </dgm:scene3d>
+    <dgm:sp3d/>
+    <dgm:txPr/>
+    <dgm:style>
+      <a:lnRef idx="2">
+        <a:scrgbClr r="0" g="0" b="0"/>
+      </a:lnRef>
+      <a:fillRef idx="1">
+        <a:scrgbClr r="0" g="0" b="0"/>
+      </a:fillRef>
+      <a:effectRef idx="0">
+        <a:scrgbClr r="0" g="0" b="0"/>
+      </a:effectRef>
+      <a:fontRef idx="minor">
+        <a:schemeClr val="lt1"/>
+      </a:fontRef>
+    </dgm:style>
+  </dgm:styleLbl>
+  <dgm:styleLbl name="parChTrans1D1">
+    <dgm:scene3d>
+      <a:camera prst="orthographicFront"/>
+      <a:lightRig rig="threePt" dir="t"/>
+    </dgm:scene3d>
+    <dgm:sp3d/>
+    <dgm:txPr/>
+    <dgm:style>
+      <a:lnRef idx="2">
+        <a:scrgbClr r="0" g="0" b="0"/>
+      </a:lnRef>
+      <a:fillRef idx="0">
+        <a:scrgbClr r="0" g="0" b="0"/>
+      </a:fillRef>
+      <a:effectRef idx="0">
+        <a:scrgbClr r="0" g="0" b="0"/>
+      </a:effectRef>
+      <a:fontRef idx="minor"/>
+    </dgm:style>
+  </dgm:styleLbl>
+  <dgm:styleLbl name="parChTrans1D2">
+    <dgm:scene3d>
+      <a:camera prst="orthographicFront"/>
+      <a:lightRig rig="threePt" dir="t"/>
+    </dgm:scene3d>
+    <dgm:sp3d/>
+    <dgm:txPr/>
+    <dgm:style>
+      <a:lnRef idx="2">
+        <a:scrgbClr r="0" g="0" b="0"/>
+      </a:lnRef>
+      <a:fillRef idx="0">
+        <a:scrgbClr r="0" g="0" b="0"/>
+      </a:fillRef>
+      <a:effectRef idx="0">
+        <a:scrgbClr r="0" g="0" b="0"/>
+      </a:effectRef>
+      <a:fontRef idx="minor"/>
+    </dgm:style>
+  </dgm:styleLbl>
+  <dgm:styleLbl name="parChTrans1D3">
+    <dgm:scene3d>
+      <a:camera prst="orthographicFront"/>
+      <a:lightRig rig="threePt" dir="t"/>
+    </dgm:scene3d>
+    <dgm:sp3d/>
+    <dgm:txPr/>
+    <dgm:style>
+      <a:lnRef idx="2">
+        <a:scrgbClr r="0" g="0" b="0"/>
+      </a:lnRef>
+      <a:fillRef idx="0">
+        <a:scrgbClr r="0" g="0" b="0"/>
+      </a:fillRef>
+      <a:effectRef idx="0">
+        <a:scrgbClr r="0" g="0" b="0"/>
+      </a:effectRef>
+      <a:fontRef idx="minor"/>
+    </dgm:style>
+  </dgm:styleLbl>
+  <dgm:styleLbl name="parChTrans1D4">
+    <dgm:scene3d>
+      <a:camera prst="orthographicFront"/>
+      <a:lightRig rig="threePt" dir="t"/>
+    </dgm:scene3d>
+    <dgm:sp3d/>
+    <dgm:txPr/>
+    <dgm:style>
+      <a:lnRef idx="2">
+        <a:scrgbClr r="0" g="0" b="0"/>
+      </a:lnRef>
+      <a:fillRef idx="0">
+        <a:scrgbClr r="0" g="0" b="0"/>
+      </a:fillRef>
+      <a:effectRef idx="0">
+        <a:scrgbClr r="0" g="0" b="0"/>
+      </a:effectRef>
+      <a:fontRef idx="minor"/>
+    </dgm:style>
+  </dgm:styleLbl>
+  <dgm:styleLbl name="fgAcc1">
+    <dgm:scene3d>
+      <a:camera prst="orthographicFront"/>
+      <a:lightRig rig="threePt" dir="t"/>
+    </dgm:scene3d>
+    <dgm:sp3d/>
+    <dgm:txPr/>
+    <dgm:style>
+      <a:lnRef idx="2">
+        <a:scrgbClr r="0" g="0" b="0"/>
+      </a:lnRef>
+      <a:fillRef idx="1">
+        <a:scrgbClr r="0" g="0" b="0"/>
+      </a:fillRef>
+      <a:effectRef idx="0">
+        <a:scrgbClr r="0" g="0" b="0"/>
+      </a:effectRef>
+      <a:fontRef idx="minor"/>
+    </dgm:style>
+  </dgm:styleLbl>
+  <dgm:styleLbl name="conFgAcc1">
+    <dgm:scene3d>
+      <a:camera prst="orthographicFront"/>
+      <a:lightRig rig="threePt" dir="t"/>
+    </dgm:scene3d>
+    <dgm:sp3d/>
+    <dgm:txPr/>
+    <dgm:style>
+      <a:lnRef idx="2">
+        <a:scrgbClr r="0" g="0" b="0"/>
+      </a:lnRef>
+      <a:fillRef idx="1">
+        <a:scrgbClr r="0" g="0" b="0"/>
+      </a:fillRef>
+      <a:effectRef idx="0">
+        <a:scrgbClr r="0" g="0" b="0"/>
+      </a:effectRef>
+      <a:fontRef idx="minor"/>
+    </dgm:style>
+  </dgm:styleLbl>
+  <dgm:styleLbl name="alignAcc1">
+    <dgm:scene3d>
+      <a:camera prst="orthographicFront"/>
+      <a:lightRig rig="threePt" dir="t"/>
+    </dgm:scene3d>
+    <dgm:sp3d/>
+    <dgm:txPr/>
+    <dgm:style>
+      <a:lnRef idx="2">
+        <a:scrgbClr r="0" g="0" b="0"/>
+      </a:lnRef>
+      <a:fillRef idx="1">
+        <a:scrgbClr r="0" g="0" b="0"/>
+      </a:fillRef>
+      <a:effectRef idx="0">
+        <a:scrgbClr r="0" g="0" b="0"/>
+      </a:effectRef>
+      <a:fontRef idx="minor"/>
+    </dgm:style>
+  </dgm:styleLbl>
+  <dgm:styleLbl name="trAlignAcc1">
+    <dgm:scene3d>
+      <a:camera prst="orthographicFront"/>
+      <a:lightRig rig="threePt" dir="t"/>
+    </dgm:scene3d>
+    <dgm:sp3d/>
+    <dgm:txPr/>
+    <dgm:style>
+      <a:lnRef idx="1">
+        <a:scrgbClr r="0" g="0" b="0"/>
+      </a:lnRef>
+      <a:fillRef idx="1">
+        <a:scrgbClr r="0" g="0" b="0"/>
+      </a:fillRef>
+      <a:effectRef idx="0">
+        <a:scrgbClr r="0" g="0" b="0"/>
+      </a:effectRef>
+      <a:fontRef idx="minor"/>
+    </dgm:style>
+  </dgm:styleLbl>
+  <dgm:styleLbl name="bgAcc1">
+    <dgm:scene3d>
+      <a:camera prst="orthographicFront"/>
+      <a:lightRig rig="threePt" dir="t"/>
+    </dgm:scene3d>
+    <dgm:sp3d/>
+    <dgm:txPr/>
+    <dgm:style>
+      <a:lnRef idx="2">
+        <a:scrgbClr r="0" g="0" b="0"/>
+      </a:lnRef>
+      <a:fillRef idx="1">
+        <a:scrgbClr r="0" g="0" b="0"/>
+      </a:fillRef>
+      <a:effectRef idx="0">
+        <a:scrgbClr r="0" g="0" b="0"/>
+      </a:effectRef>
+      <a:fontRef idx="minor"/>
+    </dgm:style>
+  </dgm:styleLbl>
+  <dgm:styleLbl name="solidFgAcc1">
+    <dgm:scene3d>
+      <a:camera prst="orthographicFront"/>
+      <a:lightRig rig="threePt" dir="t"/>
+    </dgm:scene3d>
+    <dgm:sp3d/>
+    <dgm:txPr/>
+    <dgm:style>
+      <a:lnRef idx="2">
+        <a:scrgbClr r="0" g="0" b="0"/>
+      </a:lnRef>
+      <a:fillRef idx="1">
+        <a:scrgbClr r="0" g="0" b="0"/>
+      </a:fillRef>
+      <a:effectRef idx="0">
+        <a:scrgbClr r="0" g="0" b="0"/>
+      </a:effectRef>
+      <a:fontRef idx="minor"/>
+    </dgm:style>
+  </dgm:styleLbl>
+  <dgm:styleLbl name="solidAlignAcc1">
+    <dgm:scene3d>
+      <a:camera prst="orthographicFront"/>
+      <a:lightRig rig="threePt" dir="t"/>
+    </dgm:scene3d>
+    <dgm:sp3d/>
+    <dgm:txPr/>
+    <dgm:style>
+      <a:lnRef idx="2">
+        <a:scrgbClr r="0" g="0" b="0"/>
+      </a:lnRef>
+      <a:fillRef idx="1">
+        <a:scrgbClr r="0" g="0" b="0"/>
+      </a:fillRef>
+      <a:effectRef idx="0">
+        <a:scrgbClr r="0" g="0" b="0"/>
+      </a:effectRef>
+      <a:fontRef idx="minor"/>
+    </dgm:style>
+  </dgm:styleLbl>
+  <dgm:styleLbl name="solidBgAcc1">
+    <dgm:scene3d>
+      <a:camera prst="orthographicFront"/>
+      <a:lightRig rig="threePt" dir="t"/>
+    </dgm:scene3d>
+    <dgm:sp3d/>
+    <dgm:txPr/>
+    <dgm:style>
+      <a:lnRef idx="2">
+        <a:scrgbClr r="0" g="0" b="0"/>
+      </a:lnRef>
+      <a:fillRef idx="1">
+        <a:scrgbClr r="0" g="0" b="0"/>
+      </a:fillRef>
+      <a:effectRef idx="0">
+        <a:scrgbClr r="0" g="0" b="0"/>
+      </a:effectRef>
+      <a:fontRef idx="minor"/>
+    </dgm:style>
+  </dgm:styleLbl>
+  <dgm:styleLbl name="fgAccFollowNode1">
+    <dgm:scene3d>
+      <a:camera prst="orthographicFront"/>
+      <a:lightRig rig="threePt" dir="t"/>
+    </dgm:scene3d>
+    <dgm:sp3d/>
+    <dgm:txPr/>
+    <dgm:style>
+      <a:lnRef idx="2">
+        <a:scrgbClr r="0" g="0" b="0"/>
+      </a:lnRef>
+      <a:fillRef idx="1">
+        <a:scrgbClr r="0" g="0" b="0"/>
+      </a:fillRef>
+      <a:effectRef idx="0">
+        <a:scrgbClr r="0" g="0" b="0"/>
+      </a:effectRef>
+      <a:fontRef idx="minor"/>
+    </dgm:style>
+  </dgm:styleLbl>
+  <dgm:styleLbl name="alignAccFollowNode1">
+    <dgm:scene3d>
+      <a:camera prst="orthographicFront"/>
+      <a:lightRig rig="threePt" dir="t"/>
+    </dgm:scene3d>
+    <dgm:sp3d/>
+    <dgm:txPr/>
+    <dgm:style>
+      <a:lnRef idx="2">
+        <a:scrgbClr r="0" g="0" b="0"/>
+      </a:lnRef>
+      <a:fillRef idx="1">
+        <a:scrgbClr r="0" g="0" b="0"/>
+      </a:fillRef>
+      <a:effectRef idx="0">
+        <a:scrgbClr r="0" g="0" b="0"/>
+      </a:effectRef>
+      <a:fontRef idx="minor"/>
+    </dgm:style>
+  </dgm:styleLbl>
+  <dgm:styleLbl name="bgAccFollowNode1">
+    <dgm:scene3d>
+      <a:camera prst="orthographicFront"/>
+      <a:lightRig rig="threePt" dir="t"/>
+    </dgm:scene3d>
+    <dgm:sp3d/>
+    <dgm:txPr/>
+    <dgm:style>
+      <a:lnRef idx="2">
+        <a:scrgbClr r="0" g="0" b="0"/>
+      </a:lnRef>
+      <a:fillRef idx="1">
+        <a:scrgbClr r="0" g="0" b="0"/>
+      </a:fillRef>
+      <a:effectRef idx="0">
+        <a:scrgbClr r="0" g="0" b="0"/>
+      </a:effectRef>
+      <a:fontRef idx="minor"/>
+    </dgm:style>
+  </dgm:styleLbl>
+  <dgm:styleLbl name="fgAcc0">
+    <dgm:scene3d>
+      <a:camera prst="orthographicFront"/>
+      <a:lightRig rig="threePt" dir="t"/>
+    </dgm:scene3d>
+    <dgm:sp3d/>
+    <dgm:txPr/>
+    <dgm:style>
+      <a:lnRef idx="2">
+        <a:scrgbClr r="0" g="0" b="0"/>
+      </a:lnRef>
+      <a:fillRef idx="1">
+        <a:scrgbClr r="0" g="0" b="0"/>
+      </a:fillRef>
+      <a:effectRef idx="0">
+        <a:scrgbClr r="0" g="0" b="0"/>
+      </a:effectRef>
+      <a:fontRef idx="minor"/>
+    </dgm:style>
+  </dgm:styleLbl>
+  <dgm:styleLbl name="fgAcc2">
+    <dgm:scene3d>
+      <a:camera prst="orthographicFront"/>
+      <a:lightRig rig="threePt" dir="t"/>
+    </dgm:scene3d>
+    <dgm:sp3d/>
+    <dgm:txPr/>
+    <dgm:style>
+      <a:lnRef idx="2">
+        <a:scrgbClr r="0" g="0" b="0"/>
+      </a:lnRef>
+      <a:fillRef idx="1">
+        <a:scrgbClr r="0" g="0" b="0"/>
+      </a:fillRef>
+      <a:effectRef idx="0">
+        <a:scrgbClr r="0" g="0" b="0"/>
+      </a:effectRef>
+      <a:fontRef idx="minor"/>
+    </dgm:style>
+  </dgm:styleLbl>
+  <dgm:styleLbl name="fgAcc3">
+    <dgm:scene3d>
+      <a:camera prst="orthographicFront"/>
+      <a:lightRig rig="threePt" dir="t"/>
+    </dgm:scene3d>
+    <dgm:sp3d/>
+    <dgm:txPr/>
+    <dgm:style>
+      <a:lnRef idx="2">
+        <a:scrgbClr r="0" g="0" b="0"/>
+      </a:lnRef>
+      <a:fillRef idx="1">
+        <a:scrgbClr r="0" g="0" b="0"/>
+      </a:fillRef>
+      <a:effectRef idx="0">
+        <a:scrgbClr r="0" g="0" b="0"/>
+      </a:effectRef>
+      <a:fontRef idx="minor"/>
+    </dgm:style>
+  </dgm:styleLbl>
+  <dgm:styleLbl name="fgAcc4">
+    <dgm:scene3d>
+      <a:camera prst="orthographicFront"/>
+      <a:lightRig rig="threePt" dir="t"/>
+    </dgm:scene3d>
+    <dgm:sp3d/>
+    <dgm:txPr/>
+    <dgm:style>
+      <a:lnRef idx="2">
+        <a:scrgbClr r="0" g="0" b="0"/>
+      </a:lnRef>
+      <a:fillRef idx="1">
+        <a:scrgbClr r="0" g="0" b="0"/>
+      </a:fillRef>
+      <a:effectRef idx="0">
+        <a:scrgbClr r="0" g="0" b="0"/>
+      </a:effectRef>
+      <a:fontRef idx="minor"/>
+    </dgm:style>
+  </dgm:styleLbl>
+  <dgm:styleLbl name="bgShp">
+    <dgm:scene3d>
+      <a:camera prst="orthographicFront"/>
+      <a:lightRig rig="threePt" dir="t"/>
+    </dgm:scene3d>
+    <dgm:sp3d/>
+    <dgm:txPr/>
+    <dgm:style>
+      <a:lnRef idx="0">
+        <a:scrgbClr r="0" g="0" b="0"/>
+      </a:lnRef>
+      <a:fillRef idx="1">
+        <a:scrgbClr r="0" g="0" b="0"/>
+      </a:fillRef>
+      <a:effectRef idx="0">
+        <a:scrgbClr r="0" g="0" b="0"/>
+      </a:effectRef>
+      <a:fontRef idx="minor"/>
+    </dgm:style>
+  </dgm:styleLbl>
+  <dgm:styleLbl name="dkBgShp">
+    <dgm:scene3d>
+      <a:camera prst="orthographicFront"/>
+      <a:lightRig rig="threePt" dir="t"/>
+    </dgm:scene3d>
+    <dgm:sp3d/>
+    <dgm:txPr/>
+    <dgm:style>
+      <a:lnRef idx="0">
+        <a:scrgbClr r="0" g="0" b="0"/>
+      </a:lnRef>
+      <a:fillRef idx="1">
+        <a:scrgbClr r="0" g="0" b="0"/>
+      </a:fillRef>
+      <a:effectRef idx="0">
+        <a:scrgbClr r="0" g="0" b="0"/>
+      </a:effectRef>
+      <a:fontRef idx="minor"/>
+    </dgm:style>
+  </dgm:styleLbl>
+  <dgm:styleLbl name="trBgShp">
+    <dgm:scene3d>
+      <a:camera prst="orthographicFront"/>
+      <a:lightRig rig="threePt" dir="t"/>
+    </dgm:scene3d>
+    <dgm:sp3d/>
+    <dgm:txPr/>
+    <dgm:style>
+      <a:lnRef idx="0">
+        <a:scrgbClr r="0" g="0" b="0"/>
+      </a:lnRef>
+      <a:fillRef idx="1">
+        <a:scrgbClr r="0" g="0" b="0"/>
+      </a:fillRef>
+      <a:effectRef idx="0">
+        <a:scrgbClr r="0" g="0" b="0"/>
+      </a:effectRef>
+      <a:fontRef idx="minor"/>
+    </dgm:style>
+  </dgm:styleLbl>
+  <dgm:styleLbl name="fgShp">
+    <dgm:scene3d>
+      <a:camera prst="orthographicFront"/>
+      <a:lightRig rig="threePt" dir="t"/>
+    </dgm:scene3d>
+    <dgm:sp3d/>
+    <dgm:txPr/>
+    <dgm:style>
+      <a:lnRef idx="2">
+        <a:scrgbClr r="0" g="0" b="0"/>
+      </a:lnRef>
+      <a:fillRef idx="1">
+        <a:scrgbClr r="0" g="0" b="0"/>
+      </a:fillRef>
+      <a:effectRef idx="0">
+        <a:scrgbClr r="0" g="0" b="0"/>
+      </a:effectRef>
+      <a:fontRef idx="minor"/>
+    </dgm:style>
+  </dgm:styleLbl>
+  <dgm:styleLbl name="revTx">
+    <dgm:scene3d>
+      <a:camera prst="orthographicFront"/>
+      <a:lightRig rig="threePt" dir="t"/>
+    </dgm:scene3d>
+    <dgm:sp3d/>
+    <dgm:txPr/>
+    <dgm:style>
+      <a:lnRef idx="0">
+        <a:scrgbClr r="0" g="0" b="0"/>
+      </a:lnRef>
+      <a:fillRef idx="0">
+        <a:scrgbClr r="0" g="0" b="0"/>
+      </a:fillRef>
+      <a:effectRef idx="0">
+        <a:scrgbClr r="0" g="0" b="0"/>
+      </a:effectRef>
+      <a:fontRef idx="minor"/>
+    </dgm:style>
+  </dgm:styleLbl>
+</dgm:styleDef>
+</file>
+
+<file path=ppt/diagrams/quickStyle6.xml><?xml version="1.0" encoding="utf-8"?>
 <dgm:styleDef xmlns:dgm="http://schemas.openxmlformats.org/drawingml/2006/diagram" xmlns:a="http://schemas.openxmlformats.org/drawingml/2006/main" uniqueId="urn:microsoft.com/office/officeart/2005/8/quickstyle/simple1">
   <dgm:title val=""/>
   <dgm:desc val=""/>
@@ -15602,7 +18773,7 @@
           <a:p>
             <a:fld id="{5BCAD085-E8A6-8845-BD4E-CB4CCA059FC4}" type="datetimeFigureOut">
               <a:rPr lang="en-US" smtClean="0"/>
-              <a:t>5/22/2026</a:t>
+              <a:t>5/26/2026</a:t>
             </a:fld>
             <a:endParaRPr lang="en-US"/>
           </a:p>
@@ -15770,7 +18941,7 @@
           <a:p>
             <a:fld id="{5BCAD085-E8A6-8845-BD4E-CB4CCA059FC4}" type="datetimeFigureOut">
               <a:rPr lang="en-US" smtClean="0"/>
-              <a:t>5/22/2026</a:t>
+              <a:t>5/26/2026</a:t>
             </a:fld>
             <a:endParaRPr lang="en-US"/>
           </a:p>
@@ -15948,7 +19119,7 @@
           <a:p>
             <a:fld id="{5BCAD085-E8A6-8845-BD4E-CB4CCA059FC4}" type="datetimeFigureOut">
               <a:rPr lang="en-US" smtClean="0"/>
-              <a:t>5/22/2026</a:t>
+              <a:t>5/26/2026</a:t>
             </a:fld>
             <a:endParaRPr lang="en-US"/>
           </a:p>
@@ -16116,7 +19287,7 @@
           <a:p>
             <a:fld id="{5BCAD085-E8A6-8845-BD4E-CB4CCA059FC4}" type="datetimeFigureOut">
               <a:rPr lang="en-US" smtClean="0"/>
-              <a:t>5/22/2026</a:t>
+              <a:t>5/26/2026</a:t>
             </a:fld>
             <a:endParaRPr lang="en-US"/>
           </a:p>
@@ -16361,7 +19532,7 @@
           <a:p>
             <a:fld id="{5BCAD085-E8A6-8845-BD4E-CB4CCA059FC4}" type="datetimeFigureOut">
               <a:rPr lang="en-US" smtClean="0"/>
-              <a:t>5/22/2026</a:t>
+              <a:t>5/26/2026</a:t>
             </a:fld>
             <a:endParaRPr lang="en-US"/>
           </a:p>
@@ -16646,7 +19817,7 @@
           <a:p>
             <a:fld id="{5BCAD085-E8A6-8845-BD4E-CB4CCA059FC4}" type="datetimeFigureOut">
               <a:rPr lang="en-US" smtClean="0"/>
-              <a:t>5/22/2026</a:t>
+              <a:t>5/26/2026</a:t>
             </a:fld>
             <a:endParaRPr lang="en-US"/>
           </a:p>
@@ -17065,7 +20236,7 @@
           <a:p>
             <a:fld id="{5BCAD085-E8A6-8845-BD4E-CB4CCA059FC4}" type="datetimeFigureOut">
               <a:rPr lang="en-US" smtClean="0"/>
-              <a:t>5/22/2026</a:t>
+              <a:t>5/26/2026</a:t>
             </a:fld>
             <a:endParaRPr lang="en-US"/>
           </a:p>
@@ -17182,7 +20353,7 @@
           <a:p>
             <a:fld id="{5BCAD085-E8A6-8845-BD4E-CB4CCA059FC4}" type="datetimeFigureOut">
               <a:rPr lang="en-US" smtClean="0"/>
-              <a:t>5/22/2026</a:t>
+              <a:t>5/26/2026</a:t>
             </a:fld>
             <a:endParaRPr lang="en-US"/>
           </a:p>
@@ -17277,7 +20448,7 @@
           <a:p>
             <a:fld id="{5BCAD085-E8A6-8845-BD4E-CB4CCA059FC4}" type="datetimeFigureOut">
               <a:rPr lang="en-US" smtClean="0"/>
-              <a:t>5/22/2026</a:t>
+              <a:t>5/26/2026</a:t>
             </a:fld>
             <a:endParaRPr lang="en-US"/>
           </a:p>
@@ -17552,7 +20723,7 @@
           <a:p>
             <a:fld id="{5BCAD085-E8A6-8845-BD4E-CB4CCA059FC4}" type="datetimeFigureOut">
               <a:rPr lang="en-US" smtClean="0"/>
-              <a:t>5/22/2026</a:t>
+              <a:t>5/26/2026</a:t>
             </a:fld>
             <a:endParaRPr lang="en-US"/>
           </a:p>
@@ -17804,7 +20975,7 @@
           <a:p>
             <a:fld id="{5BCAD085-E8A6-8845-BD4E-CB4CCA059FC4}" type="datetimeFigureOut">
               <a:rPr lang="en-US" smtClean="0"/>
-              <a:t>5/22/2026</a:t>
+              <a:t>5/26/2026</a:t>
             </a:fld>
             <a:endParaRPr lang="en-US"/>
           </a:p>
@@ -18015,7 +21186,7 @@
           <a:p>
             <a:fld id="{5BCAD085-E8A6-8845-BD4E-CB4CCA059FC4}" type="datetimeFigureOut">
               <a:rPr lang="en-US" smtClean="0"/>
-              <a:t>5/22/2026</a:t>
+              <a:t>5/26/2026</a:t>
             </a:fld>
             <a:endParaRPr lang="en-US"/>
           </a:p>
@@ -19891,12 +23062,88 @@
           <a:chExt cx="0" cy="0"/>
         </a:xfrm>
       </p:grpSpPr>
-      <p:sp useBgFill="1">
+      <p:sp>
         <p:nvSpPr>
-          <p:cNvPr id="8" name="Rectangle 7">
+          <p:cNvPr id="2" name="Title 1"/>
+          <p:cNvSpPr>
+            <a:spLocks noGrp="1"/>
+          </p:cNvSpPr>
+          <p:nvPr>
+            <p:ph type="title"/>
+          </p:nvPr>
+        </p:nvSpPr>
+        <p:spPr>
+          <a:xfrm>
+            <a:off x="840699" y="687480"/>
+            <a:ext cx="5605629" cy="994172"/>
+          </a:xfrm>
+        </p:spPr>
+        <p:txBody>
+          <a:bodyPr>
+            <a:normAutofit/>
+          </a:bodyPr>
+          <a:lstStyle/>
+          <a:p>
+            <a:r>
+              <a:rPr lang="en-US" sz="3850"/>
+              <a:t>Key SHAP Insights</a:t>
+            </a:r>
+          </a:p>
+        </p:txBody>
+      </p:sp>
+      <p:sp>
+        <p:nvSpPr>
+          <p:cNvPr id="3" name="Content Placeholder 2"/>
+          <p:cNvSpPr>
+            <a:spLocks noGrp="1"/>
+          </p:cNvSpPr>
+          <p:nvPr>
+            <p:ph idx="1"/>
+          </p:nvPr>
+        </p:nvSpPr>
+        <p:spPr>
+          <a:xfrm>
+            <a:off x="852321" y="2227943"/>
+            <a:ext cx="5033221" cy="3788227"/>
+          </a:xfrm>
+        </p:spPr>
+        <p:txBody>
+          <a:bodyPr anchor="ctr">
+            <a:normAutofit/>
+          </a:bodyPr>
+          <a:lstStyle/>
+          <a:p>
+            <a:r>
+              <a:rPr lang="en-US" sz="2100"/>
+              <a:t>Low education increased exclusion risk significantly.</a:t>
+            </a:r>
+          </a:p>
+          <a:p>
+            <a:r>
+              <a:rPr lang="en-US" sz="2100"/>
+              <a:t>Rural residence strongly contributed to exclusion predictions.</a:t>
+            </a:r>
+          </a:p>
+          <a:p>
+            <a:r>
+              <a:rPr lang="en-US" sz="2100"/>
+              <a:t>Youth populations showed higher vulnerability.</a:t>
+            </a:r>
+          </a:p>
+          <a:p>
+            <a:r>
+              <a:rPr lang="en-US" sz="2100"/>
+              <a:t>Socio-economic status influenced financial inclusion outcomes.</a:t>
+            </a:r>
+          </a:p>
+        </p:txBody>
+      </p:sp>
+      <p:sp>
+        <p:nvSpPr>
+          <p:cNvPr id="21" name="Rectangle 20">
             <a:extLst>
               <a:ext uri="{FF2B5EF4-FFF2-40B4-BE49-F238E27FC236}">
-                <a16:creationId xmlns:a16="http://schemas.microsoft.com/office/drawing/2014/main" id="{A85DEC5C-A3A8-4628-A7E8-0B10A9FDA3EE}"/>
+                <a16:creationId xmlns:a16="http://schemas.microsoft.com/office/drawing/2014/main" id="{59A309A7-1751-4ABE-A3C1-EEC40366AD89}"/>
               </a:ext>
               <a:ext uri="{C183D7F6-B498-43B3-948B-1728B52AA6E4}">
                 <adec:decorative xmlns:adec="http://schemas.microsoft.com/office/drawing/2017/decorative" val="1"/>
@@ -19916,31 +23163,18 @@
         </p:nvSpPr>
         <p:spPr>
           <a:xfrm>
-            <a:off x="0" y="0"/>
-            <a:ext cx="9144000" cy="6858000"/>
+            <a:off x="7189435" y="0"/>
+            <a:ext cx="1954565" cy="6858000"/>
           </a:xfrm>
           <a:prstGeom prst="rect">
             <a:avLst/>
           </a:prstGeom>
-          <a:ln w="12700" cap="flat" cmpd="sng" algn="ctr">
+          <a:solidFill>
+            <a:schemeClr val="accent1"/>
+          </a:solidFill>
+          <a:ln>
             <a:noFill/>
-            <a:prstDash val="solid"/>
-            <a:miter lim="800000"/>
           </a:ln>
-          <a:effectLst/>
-          <a:extLst>
-            <a:ext uri="{91240B29-F687-4F45-9708-019B960494DF}">
-              <a14:hiddenLine xmlns:a14="http://schemas.microsoft.com/office/drawing/2010/main" w="12700" cap="flat" cmpd="sng" algn="ctr">
-                <a:solidFill>
-                  <a:schemeClr val="accent1">
-                    <a:shade val="50000"/>
-                  </a:schemeClr>
-                </a:solidFill>
-                <a:prstDash val="solid"/>
-                <a:miter lim="800000"/>
-              </a14:hiddenLine>
-            </a:ext>
-          </a:extLst>
         </p:spPr>
         <p:style>
           <a:lnRef idx="2">
@@ -19963,175 +23197,16 @@
           <a:lstStyle/>
           <a:p>
             <a:pPr algn="ctr"/>
-            <a:endParaRPr lang="en-US"/>
+            <a:endParaRPr lang="en-US" sz="1350"/>
           </a:p>
         </p:txBody>
       </p:sp>
-      <p:grpSp>
-        <p:nvGrpSpPr>
-          <p:cNvPr id="10" name="Group 9">
+      <p:sp>
+        <p:nvSpPr>
+          <p:cNvPr id="23" name="Oval 22">
             <a:extLst>
               <a:ext uri="{FF2B5EF4-FFF2-40B4-BE49-F238E27FC236}">
-                <a16:creationId xmlns:a16="http://schemas.microsoft.com/office/drawing/2014/main" id="{EB0AA77A-5BD1-4B69-A267-C53721CF18E3}"/>
-              </a:ext>
-              <a:ext uri="{C183D7F6-B498-43B3-948B-1728B52AA6E4}">
-                <adec:decorative xmlns:adec="http://schemas.microsoft.com/office/drawing/2017/decorative" val="1"/>
-              </a:ext>
-            </a:extLst>
-          </p:cNvPr>
-          <p:cNvGrpSpPr>
-            <a:grpSpLocks noGrp="1" noUngrp="1" noRot="1" noChangeAspect="1" noMove="1" noResize="1"/>
-          </p:cNvGrpSpPr>
-          <p:nvPr>
-            <p:extLst>
-              <p:ext uri="{386F3935-93C4-4BCD-93E2-E3B085C9AB24}">
-                <p16:designElem xmlns:p16="http://schemas.microsoft.com/office/powerpoint/2015/main" val="1"/>
-              </p:ext>
-            </p:extLst>
-          </p:nvPr>
-        </p:nvGrpSpPr>
-        <p:grpSpPr>
-          <a:xfrm>
-            <a:off x="0" y="0"/>
-            <a:ext cx="9144000" cy="6858000"/>
-            <a:chOff x="0" y="0"/>
-            <a:chExt cx="12192000" cy="6858000"/>
-          </a:xfrm>
-        </p:grpSpPr>
-        <p:sp>
-          <p:nvSpPr>
-            <p:cNvPr id="11" name="Rectangle 10">
-              <a:extLst>
-                <a:ext uri="{FF2B5EF4-FFF2-40B4-BE49-F238E27FC236}">
-                  <a16:creationId xmlns:a16="http://schemas.microsoft.com/office/drawing/2014/main" id="{5ADDF4E6-6BEF-4F11-BF5E-DF2D30C445B1}"/>
-                </a:ext>
-                <a:ext uri="{C183D7F6-B498-43B3-948B-1728B52AA6E4}">
-                  <adec:decorative xmlns:adec="http://schemas.microsoft.com/office/drawing/2017/decorative" val="1"/>
-                </a:ext>
-              </a:extLst>
-            </p:cNvPr>
-            <p:cNvSpPr/>
-            <p:nvPr>
-              <p:extLst>
-                <p:ext uri="{386F3935-93C4-4BCD-93E2-E3B085C9AB24}">
-                  <p16:designElem xmlns:p16="http://schemas.microsoft.com/office/powerpoint/2015/main" val="1"/>
-                </p:ext>
-              </p:extLst>
-            </p:nvPr>
-          </p:nvSpPr>
-          <p:spPr>
-            <a:xfrm>
-              <a:off x="0" y="0"/>
-              <a:ext cx="12192000" cy="6858000"/>
-            </a:xfrm>
-            <a:prstGeom prst="rect">
-              <a:avLst/>
-            </a:prstGeom>
-            <a:solidFill>
-              <a:schemeClr val="bg1">
-                <a:lumMod val="95000"/>
-              </a:schemeClr>
-            </a:solidFill>
-            <a:ln>
-              <a:noFill/>
-            </a:ln>
-          </p:spPr>
-          <p:style>
-            <a:lnRef idx="2">
-              <a:schemeClr val="accent1">
-                <a:shade val="50000"/>
-              </a:schemeClr>
-            </a:lnRef>
-            <a:fillRef idx="1">
-              <a:schemeClr val="accent1"/>
-            </a:fillRef>
-            <a:effectRef idx="0">
-              <a:schemeClr val="accent1"/>
-            </a:effectRef>
-            <a:fontRef idx="minor">
-              <a:schemeClr val="lt1"/>
-            </a:fontRef>
-          </p:style>
-          <p:txBody>
-            <a:bodyPr rtlCol="0" anchor="ctr"/>
-            <a:lstStyle/>
-            <a:p>
-              <a:pPr algn="ctr"/>
-              <a:endParaRPr lang="en-US" dirty="0"/>
-            </a:p>
-          </p:txBody>
-        </p:sp>
-        <p:sp>
-          <p:nvSpPr>
-            <p:cNvPr id="12" name="Rectangle 11">
-              <a:extLst>
-                <a:ext uri="{FF2B5EF4-FFF2-40B4-BE49-F238E27FC236}">
-                  <a16:creationId xmlns:a16="http://schemas.microsoft.com/office/drawing/2014/main" id="{92DA3AF8-1878-4695-8957-953FE17544C1}"/>
-                </a:ext>
-                <a:ext uri="{C183D7F6-B498-43B3-948B-1728B52AA6E4}">
-                  <adec:decorative xmlns:adec="http://schemas.microsoft.com/office/drawing/2017/decorative" val="1"/>
-                </a:ext>
-              </a:extLst>
-            </p:cNvPr>
-            <p:cNvSpPr/>
-            <p:nvPr>
-              <p:extLst>
-                <p:ext uri="{386F3935-93C4-4BCD-93E2-E3B085C9AB24}">
-                  <p16:designElem xmlns:p16="http://schemas.microsoft.com/office/powerpoint/2015/main" val="1"/>
-                </p:ext>
-              </p:extLst>
-            </p:nvPr>
-          </p:nvSpPr>
-          <p:spPr>
-            <a:xfrm>
-              <a:off x="0" y="0"/>
-              <a:ext cx="12192000" cy="6858000"/>
-            </a:xfrm>
-            <a:prstGeom prst="rect">
-              <a:avLst/>
-            </a:prstGeom>
-            <a:solidFill>
-              <a:schemeClr val="accent4">
-                <a:lumMod val="75000"/>
-                <a:alpha val="7000"/>
-              </a:schemeClr>
-            </a:solidFill>
-            <a:ln>
-              <a:noFill/>
-            </a:ln>
-          </p:spPr>
-          <p:style>
-            <a:lnRef idx="2">
-              <a:schemeClr val="accent1">
-                <a:shade val="50000"/>
-              </a:schemeClr>
-            </a:lnRef>
-            <a:fillRef idx="1">
-              <a:schemeClr val="accent1"/>
-            </a:fillRef>
-            <a:effectRef idx="0">
-              <a:schemeClr val="accent1"/>
-            </a:effectRef>
-            <a:fontRef idx="minor">
-              <a:schemeClr val="lt1"/>
-            </a:fontRef>
-          </p:style>
-          <p:txBody>
-            <a:bodyPr rtlCol="0" anchor="ctr"/>
-            <a:lstStyle/>
-            <a:p>
-              <a:pPr algn="ctr"/>
-              <a:endParaRPr lang="en-US" dirty="0"/>
-            </a:p>
-          </p:txBody>
-        </p:sp>
-      </p:grpSp>
-      <p:sp>
-        <p:nvSpPr>
-          <p:cNvPr id="14" name="Rectangle 13">
-            <a:extLst>
-              <a:ext uri="{FF2B5EF4-FFF2-40B4-BE49-F238E27FC236}">
-                <a16:creationId xmlns:a16="http://schemas.microsoft.com/office/drawing/2014/main" id="{13C49740-F66E-4FA5-BAF0-20082FFCCD25}"/>
+                <a16:creationId xmlns:a16="http://schemas.microsoft.com/office/drawing/2014/main" id="{967D8EB6-EAE1-4F9C-B398-83321E287204}"/>
               </a:ext>
               <a:ext uri="{C183D7F6-B498-43B3-948B-1728B52AA6E4}">
                 <adec:decorative xmlns:adec="http://schemas.microsoft.com/office/drawing/2017/decorative" val="1"/>
@@ -20150,20 +23225,20 @@
           </p:nvPr>
         </p:nvSpPr>
         <p:spPr>
-          <a:xfrm flipH="1" flipV="1">
-            <a:off x="0" y="-8"/>
-            <a:ext cx="3464718" cy="6857997"/>
+          <a:xfrm>
+            <a:off x="6129567" y="2369132"/>
+            <a:ext cx="2119736" cy="2119736"/>
           </a:xfrm>
-          <a:prstGeom prst="rect">
+          <a:prstGeom prst="ellipse">
             <a:avLst/>
           </a:prstGeom>
           <a:solidFill>
-            <a:schemeClr val="bg1">
-              <a:alpha val="80000"/>
-            </a:schemeClr>
+            <a:srgbClr val="FFFFFF"/>
           </a:solidFill>
-          <a:ln>
-            <a:noFill/>
+          <a:ln w="22225">
+            <a:solidFill>
+              <a:schemeClr val="accent1"/>
+            </a:solidFill>
           </a:ln>
         </p:spPr>
         <p:style>
@@ -20183,123 +23258,53 @@
           </a:fontRef>
         </p:style>
         <p:txBody>
-          <a:bodyPr rot="0" spcFirstLastPara="0" vertOverflow="overflow" horzOverflow="overflow" vert="horz" wrap="square" lIns="91440" tIns="45720" rIns="91440" bIns="45720" numCol="1" spcCol="0" rtlCol="0" fromWordArt="0" anchor="ctr" anchorCtr="0" forceAA="0" compatLnSpc="1">
-            <a:prstTxWarp prst="textNoShape">
-              <a:avLst/>
-            </a:prstTxWarp>
-            <a:noAutofit/>
-          </a:bodyPr>
+          <a:bodyPr rtlCol="0" anchor="ctr"/>
           <a:lstStyle/>
           <a:p>
             <a:pPr algn="ctr"/>
-            <a:endParaRPr lang="en-US">
-              <a:solidFill>
-                <a:schemeClr val="tx1"/>
-              </a:solidFill>
-            </a:endParaRPr>
+            <a:endParaRPr lang="en-US" sz="1350"/>
           </a:p>
         </p:txBody>
       </p:sp>
-      <p:sp>
-        <p:nvSpPr>
-          <p:cNvPr id="2" name="Title 1"/>
-          <p:cNvSpPr>
-            <a:spLocks noGrp="1"/>
-          </p:cNvSpPr>
-          <p:nvPr>
-            <p:ph type="title"/>
-          </p:nvPr>
-        </p:nvSpPr>
+      <p:pic>
+        <p:nvPicPr>
+          <p:cNvPr id="18" name="Graphic 17" descr="Schoolhouse">
+            <a:extLst>
+              <a:ext uri="{FF2B5EF4-FFF2-40B4-BE49-F238E27FC236}">
+                <a16:creationId xmlns:a16="http://schemas.microsoft.com/office/drawing/2014/main" id="{126A4DE7-EE19-81C8-5CB9-67B74DE0231B}"/>
+              </a:ext>
+            </a:extLst>
+          </p:cNvPr>
+          <p:cNvPicPr>
+            <a:picLocks noChangeAspect="1"/>
+          </p:cNvPicPr>
+          <p:nvPr/>
+        </p:nvPicPr>
+        <p:blipFill>
+          <a:blip>
+            <a:extLst>
+              <a:ext uri="{28A0092B-C50C-407E-A947-70E740481C1C}">
+                <a14:useLocalDpi xmlns:a14="http://schemas.microsoft.com/office/drawing/2010/main" val="0"/>
+              </a:ext>
+              <a:ext uri="{96DAC541-7B7A-43D3-8B79-37D633B846F1}">
+                <asvg:svgBlip xmlns:asvg="http://schemas.microsoft.com/office/drawing/2016/SVG/main" r:embed="rId2"/>
+              </a:ext>
+            </a:extLst>
+          </a:blip>
+          <a:stretch>
+            <a:fillRect/>
+          </a:stretch>
+        </p:blipFill>
         <p:spPr>
           <a:xfrm>
-            <a:off x="819150" y="907143"/>
-            <a:ext cx="2213372" cy="4861832"/>
+            <a:off x="6624964" y="2865141"/>
+            <a:ext cx="1143455" cy="1143455"/>
           </a:xfrm>
+          <a:prstGeom prst="rect">
+            <a:avLst/>
+          </a:prstGeom>
         </p:spPr>
-        <p:txBody>
-          <a:bodyPr anchor="t">
-            <a:normAutofit/>
-          </a:bodyPr>
-          <a:lstStyle/>
-          <a:p>
-            <a:r>
-              <a:rPr lang="en-US" sz="3500"/>
-              <a:t>Key SHAP Insights</a:t>
-            </a:r>
-          </a:p>
-        </p:txBody>
-      </p:sp>
-      <p:sp>
-        <p:nvSpPr>
-          <p:cNvPr id="3" name="Content Placeholder 2"/>
-          <p:cNvSpPr>
-            <a:spLocks noGrp="1"/>
-          </p:cNvSpPr>
-          <p:nvPr>
-            <p:ph idx="1"/>
-          </p:nvPr>
-        </p:nvSpPr>
-        <p:spPr>
-          <a:xfrm>
-            <a:off x="4787503" y="994229"/>
-            <a:ext cx="3727847" cy="4833257"/>
-          </a:xfrm>
-        </p:spPr>
-        <p:txBody>
-          <a:bodyPr anchor="t">
-            <a:normAutofit/>
-          </a:bodyPr>
-          <a:lstStyle/>
-          <a:p>
-            <a:r>
-              <a:rPr lang="en-US" sz="1700">
-                <a:solidFill>
-                  <a:schemeClr val="tx1">
-                    <a:alpha val="60000"/>
-                  </a:schemeClr>
-                </a:solidFill>
-              </a:rPr>
-              <a:t>Low education increased exclusion risk significantly.</a:t>
-            </a:r>
-          </a:p>
-          <a:p>
-            <a:r>
-              <a:rPr lang="en-US" sz="1700">
-                <a:solidFill>
-                  <a:schemeClr val="tx1">
-                    <a:alpha val="60000"/>
-                  </a:schemeClr>
-                </a:solidFill>
-              </a:rPr>
-              <a:t>Rural residence strongly contributed to exclusion predictions.</a:t>
-            </a:r>
-          </a:p>
-          <a:p>
-            <a:r>
-              <a:rPr lang="en-US" sz="1700">
-                <a:solidFill>
-                  <a:schemeClr val="tx1">
-                    <a:alpha val="60000"/>
-                  </a:schemeClr>
-                </a:solidFill>
-              </a:rPr>
-              <a:t>Youth populations showed higher vulnerability.</a:t>
-            </a:r>
-          </a:p>
-          <a:p>
-            <a:r>
-              <a:rPr lang="en-US" sz="1700">
-                <a:solidFill>
-                  <a:schemeClr val="tx1">
-                    <a:alpha val="60000"/>
-                  </a:schemeClr>
-                </a:solidFill>
-              </a:rPr>
-              <a:t>Socio-economic status influenced financial inclusion outcomes.</a:t>
-            </a:r>
-          </a:p>
-        </p:txBody>
-      </p:sp>
+      </p:pic>
     </p:spTree>
   </p:cSld>
   <p:clrMapOvr>
@@ -21037,6 +24042,3759 @@
           <a:chExt cx="0" cy="0"/>
         </a:xfrm>
       </p:grpSpPr>
+      <p:sp>
+        <p:nvSpPr>
+          <p:cNvPr id="2" name="Title 1"/>
+          <p:cNvSpPr>
+            <a:spLocks noGrp="1"/>
+          </p:cNvSpPr>
+          <p:nvPr>
+            <p:ph type="title"/>
+          </p:nvPr>
+        </p:nvSpPr>
+        <p:spPr>
+          <a:xfrm>
+            <a:off x="360758" y="327025"/>
+            <a:ext cx="3993358" cy="1630363"/>
+          </a:xfrm>
+        </p:spPr>
+        <p:txBody>
+          <a:bodyPr anchor="b">
+            <a:normAutofit/>
+          </a:bodyPr>
+          <a:lstStyle/>
+          <a:p>
+            <a:r>
+              <a:rPr lang="en-US" sz="3100"/>
+              <a:t>Deployment Overview Analysis</a:t>
+            </a:r>
+          </a:p>
+        </p:txBody>
+      </p:sp>
+      <p:pic>
+        <p:nvPicPr>
+          <p:cNvPr id="60" name="Picture 59">
+            <a:extLst>
+              <a:ext uri="{FF2B5EF4-FFF2-40B4-BE49-F238E27FC236}">
+                <a16:creationId xmlns:a16="http://schemas.microsoft.com/office/drawing/2014/main" id="{FCC5F556-20DD-C9D3-7BE9-79974AA1C150}"/>
+              </a:ext>
+            </a:extLst>
+          </p:cNvPr>
+          <p:cNvPicPr>
+            <a:picLocks noChangeAspect="1"/>
+          </p:cNvPicPr>
+          <p:nvPr/>
+        </p:nvPicPr>
+        <p:blipFill>
+          <a:blip r:embed="rId2"/>
+          <a:srcRect l="31483" r="30211"/>
+          <a:stretch>
+            <a:fillRect/>
+          </a:stretch>
+        </p:blipFill>
+        <p:spPr>
+          <a:xfrm>
+            <a:off x="4474766" y="1"/>
+            <a:ext cx="4669234" cy="6856412"/>
+          </a:xfrm>
+          <a:custGeom>
+            <a:avLst/>
+            <a:gdLst/>
+            <a:ahLst/>
+            <a:cxnLst/>
+            <a:rect l="l" t="t" r="r" b="b"/>
+            <a:pathLst>
+              <a:path w="5620032" h="6856412">
+                <a:moveTo>
+                  <a:pt x="13187" y="0"/>
+                </a:moveTo>
+                <a:lnTo>
+                  <a:pt x="5620032" y="0"/>
+                </a:lnTo>
+                <a:lnTo>
+                  <a:pt x="5620032" y="6856412"/>
+                </a:lnTo>
+                <a:lnTo>
+                  <a:pt x="0" y="6856412"/>
+                </a:lnTo>
+                <a:lnTo>
+                  <a:pt x="64318" y="6298274"/>
+                </a:lnTo>
+                <a:cubicBezTo>
+                  <a:pt x="203221" y="4970220"/>
+                  <a:pt x="240510" y="3632077"/>
+                  <a:pt x="97152" y="2276000"/>
+                </a:cubicBezTo>
+                <a:cubicBezTo>
+                  <a:pt x="35713" y="1694824"/>
+                  <a:pt x="7455" y="1116942"/>
+                  <a:pt x="6154" y="541737"/>
+                </a:cubicBezTo>
+                <a:close/>
+              </a:path>
+            </a:pathLst>
+          </a:custGeom>
+        </p:spPr>
+      </p:pic>
+      <p:graphicFrame>
+        <p:nvGraphicFramePr>
+          <p:cNvPr id="61" name="Content Placeholder 2">
+            <a:extLst>
+              <a:ext uri="{FF2B5EF4-FFF2-40B4-BE49-F238E27FC236}">
+                <a16:creationId xmlns:a16="http://schemas.microsoft.com/office/drawing/2014/main" id="{B75A7550-4D4A-6F22-CFE8-E2479879CBDC}"/>
+              </a:ext>
+            </a:extLst>
+          </p:cNvPr>
+          <p:cNvGraphicFramePr>
+            <a:graphicFrameLocks noGrp="1"/>
+          </p:cNvGraphicFramePr>
+          <p:nvPr>
+            <p:ph idx="1"/>
+          </p:nvPr>
+        </p:nvGraphicFramePr>
+        <p:xfrm>
+          <a:off x="360759" y="2286001"/>
+          <a:ext cx="3993357" cy="3919538"/>
+        </p:xfrm>
+        <a:graphic>
+          <a:graphicData uri="http://schemas.openxmlformats.org/drawingml/2006/diagram">
+            <dgm:relIds xmlns:dgm="http://schemas.openxmlformats.org/drawingml/2006/diagram" xmlns:r="http://schemas.openxmlformats.org/officeDocument/2006/relationships" r:dm="rId3" r:lo="rId4" r:qs="rId5" r:cs="rId6"/>
+          </a:graphicData>
+        </a:graphic>
+      </p:graphicFrame>
+    </p:spTree>
+  </p:cSld>
+  <p:clrMapOvr>
+    <a:masterClrMapping/>
+  </p:clrMapOvr>
+</p:sld>
+</file>
+
+<file path=ppt/slides/slide19.xml><?xml version="1.0" encoding="utf-8"?>
+<p:sld xmlns:a="http://schemas.openxmlformats.org/drawingml/2006/main" xmlns:r="http://schemas.openxmlformats.org/officeDocument/2006/relationships" xmlns:p="http://schemas.openxmlformats.org/presentationml/2006/main">
+  <p:cSld>
+    <p:bg>
+      <p:bgPr>
+        <a:solidFill>
+          <a:schemeClr val="bg1"/>
+        </a:solidFill>
+        <a:effectLst/>
+      </p:bgPr>
+    </p:bg>
+    <p:spTree>
+      <p:nvGrpSpPr>
+        <p:cNvPr id="1" name=""/>
+        <p:cNvGrpSpPr/>
+        <p:nvPr/>
+      </p:nvGrpSpPr>
+      <p:grpSpPr>
+        <a:xfrm>
+          <a:off x="0" y="0"/>
+          <a:ext cx="0" cy="0"/>
+          <a:chOff x="0" y="0"/>
+          <a:chExt cx="0" cy="0"/>
+        </a:xfrm>
+      </p:grpSpPr>
+      <p:sp>
+        <p:nvSpPr>
+          <p:cNvPr id="21" name="Rectangle 20">
+            <a:extLst>
+              <a:ext uri="{FF2B5EF4-FFF2-40B4-BE49-F238E27FC236}">
+                <a16:creationId xmlns:a16="http://schemas.microsoft.com/office/drawing/2014/main" id="{D7A453D2-15D8-4403-815F-291FA16340D9}"/>
+              </a:ext>
+              <a:ext uri="{C183D7F6-B498-43B3-948B-1728B52AA6E4}">
+                <adec:decorative xmlns:adec="http://schemas.microsoft.com/office/drawing/2017/decorative" val="1"/>
+              </a:ext>
+            </a:extLst>
+          </p:cNvPr>
+          <p:cNvSpPr>
+            <a:spLocks noGrp="1" noRot="1" noChangeAspect="1" noMove="1" noResize="1" noEditPoints="1" noAdjustHandles="1" noChangeArrowheads="1" noChangeShapeType="1" noTextEdit="1"/>
+          </p:cNvSpPr>
+          <p:nvPr>
+            <p:extLst>
+              <p:ext uri="{386F3935-93C4-4BCD-93E2-E3B085C9AB24}">
+                <p16:designElem xmlns:p16="http://schemas.microsoft.com/office/powerpoint/2015/main" val="1"/>
+              </p:ext>
+            </p:extLst>
+          </p:nvPr>
+        </p:nvSpPr>
+        <p:spPr>
+          <a:xfrm>
+            <a:off x="2286" y="0"/>
+            <a:ext cx="9141714" cy="6858000"/>
+          </a:xfrm>
+          <a:prstGeom prst="rect">
+            <a:avLst/>
+          </a:prstGeom>
+          <a:solidFill>
+            <a:schemeClr val="tx2"/>
+          </a:solidFill>
+          <a:ln>
+            <a:noFill/>
+          </a:ln>
+        </p:spPr>
+        <p:style>
+          <a:lnRef idx="2">
+            <a:schemeClr val="accent1">
+              <a:shade val="50000"/>
+            </a:schemeClr>
+          </a:lnRef>
+          <a:fillRef idx="1">
+            <a:schemeClr val="accent1"/>
+          </a:fillRef>
+          <a:effectRef idx="0">
+            <a:schemeClr val="accent1"/>
+          </a:effectRef>
+          <a:fontRef idx="minor">
+            <a:schemeClr val="lt1"/>
+          </a:fontRef>
+        </p:style>
+        <p:txBody>
+          <a:bodyPr rtlCol="0" anchor="ctr"/>
+          <a:lstStyle/>
+          <a:p>
+            <a:pPr marL="0" marR="0" lvl="0" indent="0" algn="ctr" defTabSz="457200" rtl="0" eaLnBrk="1" fontAlgn="auto" latinLnBrk="0" hangingPunct="1">
+              <a:lnSpc>
+                <a:spcPct val="100000"/>
+              </a:lnSpc>
+              <a:spcBef>
+                <a:spcPts val="0"/>
+              </a:spcBef>
+              <a:spcAft>
+                <a:spcPts val="0"/>
+              </a:spcAft>
+              <a:buClrTx/>
+              <a:buSzTx/>
+              <a:buFontTx/>
+              <a:buNone/>
+              <a:tabLst/>
+              <a:defRPr/>
+            </a:pPr>
+            <a:endParaRPr kumimoji="0" lang="en-US" sz="1800" b="0" i="0" u="none" strike="noStrike" kern="1200" cap="none" spc="0" normalizeH="0" baseline="0" noProof="0">
+              <a:ln>
+                <a:noFill/>
+              </a:ln>
+              <a:solidFill>
+                <a:prstClr val="white"/>
+              </a:solidFill>
+              <a:effectLst/>
+              <a:uLnTx/>
+              <a:uFillTx/>
+              <a:latin typeface="Calibri"/>
+              <a:ea typeface="+mn-ea"/>
+              <a:cs typeface="+mn-cs"/>
+            </a:endParaRPr>
+          </a:p>
+        </p:txBody>
+      </p:sp>
+      <p:sp>
+        <p:nvSpPr>
+          <p:cNvPr id="23" name="Rectangle 22">
+            <a:extLst>
+              <a:ext uri="{FF2B5EF4-FFF2-40B4-BE49-F238E27FC236}">
+                <a16:creationId xmlns:a16="http://schemas.microsoft.com/office/drawing/2014/main" id="{8161EA6B-09CA-445B-AB0D-8DF76FA92DEF}"/>
+              </a:ext>
+              <a:ext uri="{C183D7F6-B498-43B3-948B-1728B52AA6E4}">
+                <adec:decorative xmlns:adec="http://schemas.microsoft.com/office/drawing/2017/decorative" val="1"/>
+              </a:ext>
+            </a:extLst>
+          </p:cNvPr>
+          <p:cNvSpPr>
+            <a:spLocks noGrp="1" noRot="1" noChangeAspect="1" noMove="1" noResize="1" noEditPoints="1" noAdjustHandles="1" noChangeArrowheads="1" noChangeShapeType="1" noTextEdit="1"/>
+          </p:cNvSpPr>
+          <p:nvPr>
+            <p:extLst>
+              <p:ext uri="{386F3935-93C4-4BCD-93E2-E3B085C9AB24}">
+                <p16:designElem xmlns:p16="http://schemas.microsoft.com/office/powerpoint/2015/main" val="1"/>
+              </p:ext>
+            </p:extLst>
+          </p:nvPr>
+        </p:nvSpPr>
+        <p:spPr>
+          <a:xfrm>
+            <a:off x="0" y="0"/>
+            <a:ext cx="9141714" cy="6858000"/>
+          </a:xfrm>
+          <a:prstGeom prst="rect">
+            <a:avLst/>
+          </a:prstGeom>
+          <a:solidFill>
+            <a:schemeClr val="tx1">
+              <a:alpha val="53000"/>
+            </a:schemeClr>
+          </a:solidFill>
+          <a:ln>
+            <a:noFill/>
+          </a:ln>
+        </p:spPr>
+        <p:style>
+          <a:lnRef idx="2">
+            <a:schemeClr val="accent1">
+              <a:shade val="50000"/>
+            </a:schemeClr>
+          </a:lnRef>
+          <a:fillRef idx="1">
+            <a:schemeClr val="accent1"/>
+          </a:fillRef>
+          <a:effectRef idx="0">
+            <a:schemeClr val="accent1"/>
+          </a:effectRef>
+          <a:fontRef idx="minor">
+            <a:schemeClr val="lt1"/>
+          </a:fontRef>
+        </p:style>
+        <p:txBody>
+          <a:bodyPr rtlCol="0" anchor="ctr"/>
+          <a:lstStyle/>
+          <a:p>
+            <a:pPr marL="0" marR="0" lvl="0" indent="0" algn="ctr" defTabSz="457200" rtl="0" eaLnBrk="1" fontAlgn="auto" latinLnBrk="0" hangingPunct="1">
+              <a:lnSpc>
+                <a:spcPct val="100000"/>
+              </a:lnSpc>
+              <a:spcBef>
+                <a:spcPts val="0"/>
+              </a:spcBef>
+              <a:spcAft>
+                <a:spcPts val="0"/>
+              </a:spcAft>
+              <a:buClrTx/>
+              <a:buSzTx/>
+              <a:buFontTx/>
+              <a:buNone/>
+              <a:tabLst/>
+              <a:defRPr/>
+            </a:pPr>
+            <a:endParaRPr kumimoji="0" lang="en-US" sz="1800" b="0" i="0" u="none" strike="noStrike" kern="1200" cap="none" spc="0" normalizeH="0" baseline="0" noProof="0">
+              <a:ln>
+                <a:noFill/>
+              </a:ln>
+              <a:solidFill>
+                <a:prstClr val="white"/>
+              </a:solidFill>
+              <a:effectLst/>
+              <a:uLnTx/>
+              <a:uFillTx/>
+              <a:latin typeface="Calibri"/>
+              <a:ea typeface="+mn-ea"/>
+              <a:cs typeface="+mn-cs"/>
+            </a:endParaRPr>
+          </a:p>
+        </p:txBody>
+      </p:sp>
+      <p:grpSp>
+        <p:nvGrpSpPr>
+          <p:cNvPr id="25" name="Group 24">
+            <a:extLst>
+              <a:ext uri="{FF2B5EF4-FFF2-40B4-BE49-F238E27FC236}">
+                <a16:creationId xmlns:a16="http://schemas.microsoft.com/office/drawing/2014/main" id="{913B067F-3154-4968-A886-DF93A787EC44}"/>
+              </a:ext>
+              <a:ext uri="{C183D7F6-B498-43B3-948B-1728B52AA6E4}">
+                <adec:decorative xmlns:adec="http://schemas.microsoft.com/office/drawing/2017/decorative" val="1"/>
+              </a:ext>
+            </a:extLst>
+          </p:cNvPr>
+          <p:cNvGrpSpPr>
+            <a:grpSpLocks noGrp="1" noUngrp="1" noRot="1" noChangeAspect="1" noMove="1" noResize="1"/>
+          </p:cNvGrpSpPr>
+          <p:nvPr>
+            <p:extLst>
+              <p:ext uri="{386F3935-93C4-4BCD-93E2-E3B085C9AB24}">
+                <p16:designElem xmlns:p16="http://schemas.microsoft.com/office/powerpoint/2015/main" val="1"/>
+              </p:ext>
+            </p:extLst>
+          </p:nvPr>
+        </p:nvGrpSpPr>
+        <p:grpSpPr>
+          <a:xfrm>
+            <a:off x="0" y="2075420"/>
+            <a:ext cx="9036544" cy="4093306"/>
+            <a:chOff x="1" y="2075420"/>
+            <a:chExt cx="12048729" cy="4093306"/>
+          </a:xfrm>
+        </p:grpSpPr>
+        <p:sp>
+          <p:nvSpPr>
+            <p:cNvPr id="26" name="Oval 25">
+              <a:extLst>
+                <a:ext uri="{FF2B5EF4-FFF2-40B4-BE49-F238E27FC236}">
+                  <a16:creationId xmlns:a16="http://schemas.microsoft.com/office/drawing/2014/main" id="{97583D6C-C05B-47AB-8540-B2700B82A4AE}"/>
+                </a:ext>
+                <a:ext uri="{C183D7F6-B498-43B3-948B-1728B52AA6E4}">
+                  <adec:decorative xmlns:adec="http://schemas.microsoft.com/office/drawing/2017/decorative" val="1"/>
+                </a:ext>
+              </a:extLst>
+            </p:cNvPr>
+            <p:cNvSpPr/>
+            <p:nvPr>
+              <p:extLst>
+                <p:ext uri="{386F3935-93C4-4BCD-93E2-E3B085C9AB24}">
+                  <p16:designElem xmlns:p16="http://schemas.microsoft.com/office/powerpoint/2015/main" val="1"/>
+                </p:ext>
+              </p:extLst>
+            </p:nvPr>
+          </p:nvSpPr>
+          <p:spPr>
+            <a:xfrm rot="4500000">
+              <a:off x="7942191" y="2507571"/>
+              <a:ext cx="3563871" cy="3563871"/>
+            </a:xfrm>
+            <a:prstGeom prst="ellipse">
+              <a:avLst/>
+            </a:prstGeom>
+            <a:noFill/>
+            <a:ln w="31750">
+              <a:gradFill>
+                <a:gsLst>
+                  <a:gs pos="0">
+                    <a:schemeClr val="tx2">
+                      <a:lumMod val="60000"/>
+                      <a:lumOff val="40000"/>
+                      <a:alpha val="10000"/>
+                    </a:schemeClr>
+                  </a:gs>
+                  <a:gs pos="100000">
+                    <a:schemeClr val="tx2">
+                      <a:lumMod val="50000"/>
+                      <a:alpha val="20000"/>
+                    </a:schemeClr>
+                  </a:gs>
+                </a:gsLst>
+                <a:lin ang="5400000" scaled="1"/>
+              </a:gradFill>
+              <a:prstDash val="sysDot"/>
+            </a:ln>
+          </p:spPr>
+          <p:style>
+            <a:lnRef idx="2">
+              <a:schemeClr val="accent1">
+                <a:shade val="50000"/>
+              </a:schemeClr>
+            </a:lnRef>
+            <a:fillRef idx="1">
+              <a:schemeClr val="accent1"/>
+            </a:fillRef>
+            <a:effectRef idx="0">
+              <a:schemeClr val="accent1"/>
+            </a:effectRef>
+            <a:fontRef idx="minor">
+              <a:schemeClr val="lt1"/>
+            </a:fontRef>
+          </p:style>
+          <p:txBody>
+            <a:bodyPr rtlCol="0" anchor="ctr"/>
+            <a:lstStyle/>
+            <a:p>
+              <a:pPr marL="0" marR="0" lvl="0" indent="0" algn="ctr" defTabSz="457200" rtl="0" eaLnBrk="1" fontAlgn="auto" latinLnBrk="0" hangingPunct="1">
+                <a:lnSpc>
+                  <a:spcPct val="100000"/>
+                </a:lnSpc>
+                <a:spcBef>
+                  <a:spcPts val="0"/>
+                </a:spcBef>
+                <a:spcAft>
+                  <a:spcPts val="0"/>
+                </a:spcAft>
+                <a:buClrTx/>
+                <a:buSzTx/>
+                <a:buFontTx/>
+                <a:buNone/>
+                <a:tabLst/>
+                <a:defRPr/>
+              </a:pPr>
+              <a:endParaRPr kumimoji="0" lang="en-US" sz="1800" b="0" i="0" u="none" strike="noStrike" kern="1200" cap="none" spc="0" normalizeH="0" baseline="0" noProof="0">
+                <a:ln>
+                  <a:noFill/>
+                </a:ln>
+                <a:solidFill>
+                  <a:prstClr val="white"/>
+                </a:solidFill>
+                <a:effectLst/>
+                <a:uLnTx/>
+                <a:uFillTx/>
+                <a:latin typeface="Calibri"/>
+                <a:ea typeface="+mn-ea"/>
+                <a:cs typeface="+mn-cs"/>
+              </a:endParaRPr>
+            </a:p>
+          </p:txBody>
+        </p:sp>
+        <p:sp>
+          <p:nvSpPr>
+            <p:cNvPr id="27" name="Oval 26">
+              <a:extLst>
+                <a:ext uri="{FF2B5EF4-FFF2-40B4-BE49-F238E27FC236}">
+                  <a16:creationId xmlns:a16="http://schemas.microsoft.com/office/drawing/2014/main" id="{6501AD91-D973-4968-95E4-4C26CFDF8F79}"/>
+                </a:ext>
+                <a:ext uri="{C183D7F6-B498-43B3-948B-1728B52AA6E4}">
+                  <adec:decorative xmlns:adec="http://schemas.microsoft.com/office/drawing/2017/decorative" val="1"/>
+                </a:ext>
+              </a:extLst>
+            </p:cNvPr>
+            <p:cNvSpPr/>
+            <p:nvPr>
+              <p:extLst>
+                <p:ext uri="{386F3935-93C4-4BCD-93E2-E3B085C9AB24}">
+                  <p16:designElem xmlns:p16="http://schemas.microsoft.com/office/powerpoint/2015/main" val="1"/>
+                </p:ext>
+              </p:extLst>
+            </p:nvPr>
+          </p:nvSpPr>
+          <p:spPr>
+            <a:xfrm rot="16200000">
+              <a:off x="10435065" y="4048931"/>
+              <a:ext cx="1381607" cy="1381607"/>
+            </a:xfrm>
+            <a:prstGeom prst="ellipse">
+              <a:avLst/>
+            </a:prstGeom>
+            <a:noFill/>
+            <a:ln w="31750">
+              <a:gradFill>
+                <a:gsLst>
+                  <a:gs pos="0">
+                    <a:schemeClr val="tx2">
+                      <a:lumMod val="60000"/>
+                      <a:lumOff val="40000"/>
+                      <a:alpha val="20000"/>
+                    </a:schemeClr>
+                  </a:gs>
+                  <a:gs pos="100000">
+                    <a:schemeClr val="tx2">
+                      <a:lumMod val="50000"/>
+                      <a:alpha val="20000"/>
+                    </a:schemeClr>
+                  </a:gs>
+                </a:gsLst>
+                <a:lin ang="5400000" scaled="1"/>
+              </a:gradFill>
+              <a:prstDash val="sysDot"/>
+            </a:ln>
+          </p:spPr>
+          <p:style>
+            <a:lnRef idx="2">
+              <a:schemeClr val="accent1">
+                <a:shade val="50000"/>
+              </a:schemeClr>
+            </a:lnRef>
+            <a:fillRef idx="1">
+              <a:schemeClr val="accent1"/>
+            </a:fillRef>
+            <a:effectRef idx="0">
+              <a:schemeClr val="accent1"/>
+            </a:effectRef>
+            <a:fontRef idx="minor">
+              <a:schemeClr val="lt1"/>
+            </a:fontRef>
+          </p:style>
+          <p:txBody>
+            <a:bodyPr rtlCol="0" anchor="ctr"/>
+            <a:lstStyle/>
+            <a:p>
+              <a:pPr marL="0" marR="0" lvl="0" indent="0" algn="ctr" defTabSz="457200" rtl="0" eaLnBrk="1" fontAlgn="auto" latinLnBrk="0" hangingPunct="1">
+                <a:lnSpc>
+                  <a:spcPct val="100000"/>
+                </a:lnSpc>
+                <a:spcBef>
+                  <a:spcPts val="0"/>
+                </a:spcBef>
+                <a:spcAft>
+                  <a:spcPts val="0"/>
+                </a:spcAft>
+                <a:buClrTx/>
+                <a:buSzTx/>
+                <a:buFontTx/>
+                <a:buNone/>
+                <a:tabLst/>
+                <a:defRPr/>
+              </a:pPr>
+              <a:endParaRPr kumimoji="0" lang="en-US" sz="1800" b="0" i="0" u="none" strike="noStrike" kern="1200" cap="none" spc="0" normalizeH="0" baseline="0" noProof="0">
+                <a:ln>
+                  <a:noFill/>
+                </a:ln>
+                <a:solidFill>
+                  <a:prstClr val="white"/>
+                </a:solidFill>
+                <a:effectLst/>
+                <a:uLnTx/>
+                <a:uFillTx/>
+                <a:latin typeface="Calibri"/>
+                <a:ea typeface="+mn-ea"/>
+                <a:cs typeface="+mn-cs"/>
+              </a:endParaRPr>
+            </a:p>
+          </p:txBody>
+        </p:sp>
+        <p:sp>
+          <p:nvSpPr>
+            <p:cNvPr id="28" name="Oval 27">
+              <a:extLst>
+                <a:ext uri="{FF2B5EF4-FFF2-40B4-BE49-F238E27FC236}">
+                  <a16:creationId xmlns:a16="http://schemas.microsoft.com/office/drawing/2014/main" id="{5C165989-F5FE-4BB6-9817-E7828CB1D6E0}"/>
+                </a:ext>
+                <a:ext uri="{C183D7F6-B498-43B3-948B-1728B52AA6E4}">
+                  <adec:decorative xmlns:adec="http://schemas.microsoft.com/office/drawing/2017/decorative" val="1"/>
+                </a:ext>
+              </a:extLst>
+            </p:cNvPr>
+            <p:cNvSpPr/>
+            <p:nvPr>
+              <p:extLst>
+                <p:ext uri="{386F3935-93C4-4BCD-93E2-E3B085C9AB24}">
+                  <p16:designElem xmlns:p16="http://schemas.microsoft.com/office/powerpoint/2015/main" val="1"/>
+                </p:ext>
+              </p:extLst>
+            </p:nvPr>
+          </p:nvSpPr>
+          <p:spPr>
+            <a:xfrm rot="16200000">
+              <a:off x="1" y="2075420"/>
+              <a:ext cx="3144364" cy="3144364"/>
+            </a:xfrm>
+            <a:prstGeom prst="ellipse">
+              <a:avLst/>
+            </a:prstGeom>
+            <a:gradFill>
+              <a:gsLst>
+                <a:gs pos="0">
+                  <a:schemeClr val="tx2">
+                    <a:lumMod val="75000"/>
+                    <a:alpha val="20000"/>
+                  </a:schemeClr>
+                </a:gs>
+                <a:gs pos="100000">
+                  <a:schemeClr val="tx2">
+                    <a:lumMod val="50000"/>
+                    <a:alpha val="10000"/>
+                  </a:schemeClr>
+                </a:gs>
+              </a:gsLst>
+              <a:lin ang="5400000" scaled="1"/>
+            </a:gradFill>
+            <a:ln>
+              <a:noFill/>
+            </a:ln>
+          </p:spPr>
+          <p:style>
+            <a:lnRef idx="2">
+              <a:schemeClr val="accent1">
+                <a:shade val="50000"/>
+              </a:schemeClr>
+            </a:lnRef>
+            <a:fillRef idx="1">
+              <a:schemeClr val="accent1"/>
+            </a:fillRef>
+            <a:effectRef idx="0">
+              <a:schemeClr val="accent1"/>
+            </a:effectRef>
+            <a:fontRef idx="minor">
+              <a:schemeClr val="lt1"/>
+            </a:fontRef>
+          </p:style>
+          <p:txBody>
+            <a:bodyPr rtlCol="0" anchor="ctr"/>
+            <a:lstStyle/>
+            <a:p>
+              <a:pPr marL="0" marR="0" lvl="0" indent="0" algn="ctr" defTabSz="457200" rtl="0" eaLnBrk="1" fontAlgn="auto" latinLnBrk="0" hangingPunct="1">
+                <a:lnSpc>
+                  <a:spcPct val="100000"/>
+                </a:lnSpc>
+                <a:spcBef>
+                  <a:spcPts val="0"/>
+                </a:spcBef>
+                <a:spcAft>
+                  <a:spcPts val="0"/>
+                </a:spcAft>
+                <a:buClrTx/>
+                <a:buSzTx/>
+                <a:buFontTx/>
+                <a:buNone/>
+                <a:tabLst/>
+                <a:defRPr/>
+              </a:pPr>
+              <a:endParaRPr kumimoji="0" lang="en-US" sz="1800" b="0" i="0" u="none" strike="noStrike" kern="1200" cap="none" spc="0" normalizeH="0" baseline="0" noProof="0">
+                <a:ln>
+                  <a:noFill/>
+                </a:ln>
+                <a:solidFill>
+                  <a:prstClr val="white"/>
+                </a:solidFill>
+                <a:effectLst/>
+                <a:uLnTx/>
+                <a:uFillTx/>
+                <a:latin typeface="Calibri"/>
+                <a:ea typeface="+mn-ea"/>
+                <a:cs typeface="+mn-cs"/>
+              </a:endParaRPr>
+            </a:p>
+          </p:txBody>
+        </p:sp>
+        <p:sp>
+          <p:nvSpPr>
+            <p:cNvPr id="29" name="Oval 28">
+              <a:extLst>
+                <a:ext uri="{FF2B5EF4-FFF2-40B4-BE49-F238E27FC236}">
+                  <a16:creationId xmlns:a16="http://schemas.microsoft.com/office/drawing/2014/main" id="{6B0649CC-B912-4E82-BEA0-DA75ECB19A67}"/>
+                </a:ext>
+                <a:ext uri="{C183D7F6-B498-43B3-948B-1728B52AA6E4}">
+                  <adec:decorative xmlns:adec="http://schemas.microsoft.com/office/drawing/2017/decorative" val="1"/>
+                </a:ext>
+              </a:extLst>
+            </p:cNvPr>
+            <p:cNvSpPr/>
+            <p:nvPr>
+              <p:extLst>
+                <p:ext uri="{386F3935-93C4-4BCD-93E2-E3B085C9AB24}">
+                  <p16:designElem xmlns:p16="http://schemas.microsoft.com/office/powerpoint/2015/main" val="1"/>
+                </p:ext>
+              </p:extLst>
+            </p:nvPr>
+          </p:nvSpPr>
+          <p:spPr>
+            <a:xfrm rot="12600000">
+              <a:off x="10150845" y="4270841"/>
+              <a:ext cx="1897885" cy="1897885"/>
+            </a:xfrm>
+            <a:prstGeom prst="ellipse">
+              <a:avLst/>
+            </a:prstGeom>
+            <a:gradFill>
+              <a:gsLst>
+                <a:gs pos="0">
+                  <a:schemeClr val="tx2">
+                    <a:lumMod val="75000"/>
+                    <a:alpha val="10000"/>
+                  </a:schemeClr>
+                </a:gs>
+                <a:gs pos="100000">
+                  <a:schemeClr val="tx2">
+                    <a:lumMod val="75000"/>
+                    <a:alpha val="20000"/>
+                  </a:schemeClr>
+                </a:gs>
+              </a:gsLst>
+              <a:lin ang="5400000" scaled="1"/>
+            </a:gradFill>
+            <a:ln>
+              <a:noFill/>
+            </a:ln>
+          </p:spPr>
+          <p:style>
+            <a:lnRef idx="2">
+              <a:schemeClr val="accent1">
+                <a:shade val="50000"/>
+              </a:schemeClr>
+            </a:lnRef>
+            <a:fillRef idx="1">
+              <a:schemeClr val="accent1"/>
+            </a:fillRef>
+            <a:effectRef idx="0">
+              <a:schemeClr val="accent1"/>
+            </a:effectRef>
+            <a:fontRef idx="minor">
+              <a:schemeClr val="lt1"/>
+            </a:fontRef>
+          </p:style>
+          <p:txBody>
+            <a:bodyPr rtlCol="0" anchor="ctr"/>
+            <a:lstStyle/>
+            <a:p>
+              <a:pPr marL="0" marR="0" lvl="0" indent="0" algn="ctr" defTabSz="457200" rtl="0" eaLnBrk="1" fontAlgn="auto" latinLnBrk="0" hangingPunct="1">
+                <a:lnSpc>
+                  <a:spcPct val="100000"/>
+                </a:lnSpc>
+                <a:spcBef>
+                  <a:spcPts val="0"/>
+                </a:spcBef>
+                <a:spcAft>
+                  <a:spcPts val="0"/>
+                </a:spcAft>
+                <a:buClrTx/>
+                <a:buSzTx/>
+                <a:buFontTx/>
+                <a:buNone/>
+                <a:tabLst/>
+                <a:defRPr/>
+              </a:pPr>
+              <a:endParaRPr kumimoji="0" lang="en-US" sz="1800" b="0" i="0" u="none" strike="noStrike" kern="1200" cap="none" spc="0" normalizeH="0" baseline="0" noProof="0" dirty="0">
+                <a:ln>
+                  <a:noFill/>
+                </a:ln>
+                <a:solidFill>
+                  <a:prstClr val="white"/>
+                </a:solidFill>
+                <a:effectLst/>
+                <a:uLnTx/>
+                <a:uFillTx/>
+                <a:latin typeface="Calibri"/>
+                <a:ea typeface="+mn-ea"/>
+                <a:cs typeface="+mn-cs"/>
+              </a:endParaRPr>
+            </a:p>
+          </p:txBody>
+        </p:sp>
+        <p:sp>
+          <p:nvSpPr>
+            <p:cNvPr id="30" name="Oval 29">
+              <a:extLst>
+                <a:ext uri="{FF2B5EF4-FFF2-40B4-BE49-F238E27FC236}">
+                  <a16:creationId xmlns:a16="http://schemas.microsoft.com/office/drawing/2014/main" id="{6BA08C17-C9A5-4FA8-ABC4-44FB3B869672}"/>
+                </a:ext>
+                <a:ext uri="{C183D7F6-B498-43B3-948B-1728B52AA6E4}">
+                  <adec:decorative xmlns:adec="http://schemas.microsoft.com/office/drawing/2017/decorative" val="1"/>
+                </a:ext>
+              </a:extLst>
+            </p:cNvPr>
+            <p:cNvSpPr/>
+            <p:nvPr>
+              <p:extLst>
+                <p:ext uri="{386F3935-93C4-4BCD-93E2-E3B085C9AB24}">
+                  <p16:designElem xmlns:p16="http://schemas.microsoft.com/office/powerpoint/2015/main" val="1"/>
+                </p:ext>
+              </p:extLst>
+            </p:nvPr>
+          </p:nvSpPr>
+          <p:spPr>
+            <a:xfrm rot="4500000">
+              <a:off x="2046780" y="3040492"/>
+              <a:ext cx="2579322" cy="2579322"/>
+            </a:xfrm>
+            <a:prstGeom prst="ellipse">
+              <a:avLst/>
+            </a:prstGeom>
+            <a:noFill/>
+            <a:ln w="31750">
+              <a:gradFill>
+                <a:gsLst>
+                  <a:gs pos="0">
+                    <a:schemeClr val="tx2">
+                      <a:lumMod val="60000"/>
+                      <a:lumOff val="40000"/>
+                      <a:alpha val="20000"/>
+                    </a:schemeClr>
+                  </a:gs>
+                  <a:gs pos="100000">
+                    <a:schemeClr val="tx2">
+                      <a:lumMod val="50000"/>
+                      <a:alpha val="20000"/>
+                    </a:schemeClr>
+                  </a:gs>
+                </a:gsLst>
+                <a:lin ang="5400000" scaled="1"/>
+              </a:gradFill>
+              <a:prstDash val="sysDot"/>
+            </a:ln>
+          </p:spPr>
+          <p:style>
+            <a:lnRef idx="2">
+              <a:schemeClr val="accent1">
+                <a:shade val="50000"/>
+              </a:schemeClr>
+            </a:lnRef>
+            <a:fillRef idx="1">
+              <a:schemeClr val="accent1"/>
+            </a:fillRef>
+            <a:effectRef idx="0">
+              <a:schemeClr val="accent1"/>
+            </a:effectRef>
+            <a:fontRef idx="minor">
+              <a:schemeClr val="lt1"/>
+            </a:fontRef>
+          </p:style>
+          <p:txBody>
+            <a:bodyPr rtlCol="0" anchor="ctr"/>
+            <a:lstStyle/>
+            <a:p>
+              <a:pPr marL="0" marR="0" lvl="0" indent="0" algn="ctr" defTabSz="457200" rtl="0" eaLnBrk="1" fontAlgn="auto" latinLnBrk="0" hangingPunct="1">
+                <a:lnSpc>
+                  <a:spcPct val="100000"/>
+                </a:lnSpc>
+                <a:spcBef>
+                  <a:spcPts val="0"/>
+                </a:spcBef>
+                <a:spcAft>
+                  <a:spcPts val="0"/>
+                </a:spcAft>
+                <a:buClrTx/>
+                <a:buSzTx/>
+                <a:buFontTx/>
+                <a:buNone/>
+                <a:tabLst/>
+                <a:defRPr/>
+              </a:pPr>
+              <a:endParaRPr kumimoji="0" lang="en-US" sz="1800" b="0" i="0" u="none" strike="noStrike" kern="1200" cap="none" spc="0" normalizeH="0" baseline="0" noProof="0">
+                <a:ln>
+                  <a:noFill/>
+                </a:ln>
+                <a:solidFill>
+                  <a:prstClr val="white"/>
+                </a:solidFill>
+                <a:effectLst/>
+                <a:uLnTx/>
+                <a:uFillTx/>
+                <a:latin typeface="Calibri"/>
+                <a:ea typeface="+mn-ea"/>
+                <a:cs typeface="+mn-cs"/>
+              </a:endParaRPr>
+            </a:p>
+          </p:txBody>
+        </p:sp>
+        <p:sp>
+          <p:nvSpPr>
+            <p:cNvPr id="31" name="Oval 30">
+              <a:extLst>
+                <a:ext uri="{FF2B5EF4-FFF2-40B4-BE49-F238E27FC236}">
+                  <a16:creationId xmlns:a16="http://schemas.microsoft.com/office/drawing/2014/main" id="{70DEAC6C-553C-437E-BC17-D44952337564}"/>
+                </a:ext>
+                <a:ext uri="{C183D7F6-B498-43B3-948B-1728B52AA6E4}">
+                  <adec:decorative xmlns:adec="http://schemas.microsoft.com/office/drawing/2017/decorative" val="1"/>
+                </a:ext>
+              </a:extLst>
+            </p:cNvPr>
+            <p:cNvSpPr/>
+            <p:nvPr>
+              <p:extLst>
+                <p:ext uri="{386F3935-93C4-4BCD-93E2-E3B085C9AB24}">
+                  <p16:designElem xmlns:p16="http://schemas.microsoft.com/office/powerpoint/2015/main" val="1"/>
+                </p:ext>
+              </p:extLst>
+            </p:nvPr>
+          </p:nvSpPr>
+          <p:spPr>
+            <a:xfrm rot="4500000">
+              <a:off x="2224640" y="3193975"/>
+              <a:ext cx="2243193" cy="2243193"/>
+            </a:xfrm>
+            <a:prstGeom prst="ellipse">
+              <a:avLst/>
+            </a:prstGeom>
+            <a:noFill/>
+            <a:ln w="31750">
+              <a:gradFill>
+                <a:gsLst>
+                  <a:gs pos="0">
+                    <a:schemeClr val="tx2">
+                      <a:lumMod val="60000"/>
+                      <a:lumOff val="40000"/>
+                      <a:alpha val="10000"/>
+                    </a:schemeClr>
+                  </a:gs>
+                  <a:gs pos="100000">
+                    <a:schemeClr val="tx2">
+                      <a:lumMod val="50000"/>
+                      <a:alpha val="10000"/>
+                    </a:schemeClr>
+                  </a:gs>
+                </a:gsLst>
+                <a:lin ang="5400000" scaled="1"/>
+              </a:gradFill>
+            </a:ln>
+          </p:spPr>
+          <p:style>
+            <a:lnRef idx="2">
+              <a:schemeClr val="accent1">
+                <a:shade val="50000"/>
+              </a:schemeClr>
+            </a:lnRef>
+            <a:fillRef idx="1">
+              <a:schemeClr val="accent1"/>
+            </a:fillRef>
+            <a:effectRef idx="0">
+              <a:schemeClr val="accent1"/>
+            </a:effectRef>
+            <a:fontRef idx="minor">
+              <a:schemeClr val="lt1"/>
+            </a:fontRef>
+          </p:style>
+          <p:txBody>
+            <a:bodyPr rtlCol="0" anchor="ctr"/>
+            <a:lstStyle/>
+            <a:p>
+              <a:pPr marL="0" marR="0" lvl="0" indent="0" algn="ctr" defTabSz="457200" rtl="0" eaLnBrk="1" fontAlgn="auto" latinLnBrk="0" hangingPunct="1">
+                <a:lnSpc>
+                  <a:spcPct val="100000"/>
+                </a:lnSpc>
+                <a:spcBef>
+                  <a:spcPts val="0"/>
+                </a:spcBef>
+                <a:spcAft>
+                  <a:spcPts val="0"/>
+                </a:spcAft>
+                <a:buClrTx/>
+                <a:buSzTx/>
+                <a:buFontTx/>
+                <a:buNone/>
+                <a:tabLst/>
+                <a:defRPr/>
+              </a:pPr>
+              <a:endParaRPr kumimoji="0" lang="en-US" sz="1800" b="0" i="0" u="none" strike="noStrike" kern="1200" cap="none" spc="0" normalizeH="0" baseline="0" noProof="0">
+                <a:ln>
+                  <a:noFill/>
+                </a:ln>
+                <a:solidFill>
+                  <a:prstClr val="white"/>
+                </a:solidFill>
+                <a:effectLst/>
+                <a:uLnTx/>
+                <a:uFillTx/>
+                <a:latin typeface="Calibri"/>
+                <a:ea typeface="+mn-ea"/>
+                <a:cs typeface="+mn-cs"/>
+              </a:endParaRPr>
+            </a:p>
+          </p:txBody>
+        </p:sp>
+      </p:grpSp>
+      <p:sp>
+        <p:nvSpPr>
+          <p:cNvPr id="33" name="Rectangle 32">
+            <a:extLst>
+              <a:ext uri="{FF2B5EF4-FFF2-40B4-BE49-F238E27FC236}">
+                <a16:creationId xmlns:a16="http://schemas.microsoft.com/office/drawing/2014/main" id="{B8114C98-A349-4111-A123-E8EAB86ABE30}"/>
+              </a:ext>
+              <a:ext uri="{C183D7F6-B498-43B3-948B-1728B52AA6E4}">
+                <adec:decorative xmlns:adec="http://schemas.microsoft.com/office/drawing/2017/decorative" val="1"/>
+              </a:ext>
+            </a:extLst>
+          </p:cNvPr>
+          <p:cNvSpPr>
+            <a:spLocks noGrp="1" noRot="1" noChangeAspect="1" noMove="1" noResize="1" noEditPoints="1" noAdjustHandles="1" noChangeArrowheads="1" noChangeShapeType="1" noTextEdit="1"/>
+          </p:cNvSpPr>
+          <p:nvPr>
+            <p:extLst>
+              <p:ext uri="{386F3935-93C4-4BCD-93E2-E3B085C9AB24}">
+                <p16:designElem xmlns:p16="http://schemas.microsoft.com/office/powerpoint/2015/main" val="1"/>
+              </p:ext>
+            </p:extLst>
+          </p:nvPr>
+        </p:nvSpPr>
+        <p:spPr>
+          <a:xfrm rot="16200000">
+            <a:off x="7479052" y="1131512"/>
+            <a:ext cx="2796461" cy="533439"/>
+          </a:xfrm>
+          <a:prstGeom prst="rect">
+            <a:avLst/>
+          </a:prstGeom>
+          <a:gradFill flip="none" rotWithShape="1">
+            <a:gsLst>
+              <a:gs pos="0">
+                <a:schemeClr val="tx2">
+                  <a:lumMod val="40000"/>
+                  <a:lumOff val="60000"/>
+                  <a:alpha val="0"/>
+                </a:schemeClr>
+              </a:gs>
+              <a:gs pos="100000">
+                <a:schemeClr val="tx2">
+                  <a:lumMod val="75000"/>
+                  <a:alpha val="10000"/>
+                </a:schemeClr>
+              </a:gs>
+            </a:gsLst>
+            <a:lin ang="8400000" scaled="0"/>
+            <a:tileRect/>
+          </a:gradFill>
+          <a:ln>
+            <a:noFill/>
+          </a:ln>
+        </p:spPr>
+        <p:style>
+          <a:lnRef idx="2">
+            <a:schemeClr val="accent1">
+              <a:shade val="50000"/>
+            </a:schemeClr>
+          </a:lnRef>
+          <a:fillRef idx="1">
+            <a:schemeClr val="accent1"/>
+          </a:fillRef>
+          <a:effectRef idx="0">
+            <a:schemeClr val="accent1"/>
+          </a:effectRef>
+          <a:fontRef idx="minor">
+            <a:schemeClr val="lt1"/>
+          </a:fontRef>
+        </p:style>
+        <p:txBody>
+          <a:bodyPr rtlCol="0" anchor="ctr"/>
+          <a:lstStyle/>
+          <a:p>
+            <a:pPr marL="0" marR="0" lvl="0" indent="0" algn="ctr" defTabSz="457200" rtl="0" eaLnBrk="1" fontAlgn="auto" latinLnBrk="0" hangingPunct="1">
+              <a:lnSpc>
+                <a:spcPct val="100000"/>
+              </a:lnSpc>
+              <a:spcBef>
+                <a:spcPts val="0"/>
+              </a:spcBef>
+              <a:spcAft>
+                <a:spcPts val="0"/>
+              </a:spcAft>
+              <a:buClrTx/>
+              <a:buSzTx/>
+              <a:buFontTx/>
+              <a:buNone/>
+              <a:tabLst/>
+              <a:defRPr/>
+            </a:pPr>
+            <a:endParaRPr kumimoji="0" lang="en-US" sz="1800" b="0" i="0" u="none" strike="noStrike" kern="1200" cap="none" spc="0" normalizeH="0" baseline="0" noProof="0">
+              <a:ln>
+                <a:noFill/>
+              </a:ln>
+              <a:solidFill>
+                <a:prstClr val="white"/>
+              </a:solidFill>
+              <a:effectLst/>
+              <a:uLnTx/>
+              <a:uFillTx/>
+              <a:latin typeface="Calibri"/>
+              <a:ea typeface="+mn-ea"/>
+              <a:cs typeface="+mn-cs"/>
+            </a:endParaRPr>
+          </a:p>
+        </p:txBody>
+      </p:sp>
+      <p:grpSp>
+        <p:nvGrpSpPr>
+          <p:cNvPr id="35" name="Group 34">
+            <a:extLst>
+              <a:ext uri="{FF2B5EF4-FFF2-40B4-BE49-F238E27FC236}">
+                <a16:creationId xmlns:a16="http://schemas.microsoft.com/office/drawing/2014/main" id="{670FB431-AE18-414D-92F4-1D12D1991152}"/>
+              </a:ext>
+              <a:ext uri="{C183D7F6-B498-43B3-948B-1728B52AA6E4}">
+                <adec:decorative xmlns:adec="http://schemas.microsoft.com/office/drawing/2017/decorative" val="1"/>
+              </a:ext>
+            </a:extLst>
+          </p:cNvPr>
+          <p:cNvGrpSpPr>
+            <a:grpSpLocks noGrp="1" noUngrp="1" noRot="1" noChangeAspect="1" noMove="1" noResize="1"/>
+          </p:cNvGrpSpPr>
+          <p:nvPr>
+            <p:extLst>
+              <p:ext uri="{386F3935-93C4-4BCD-93E2-E3B085C9AB24}">
+                <p16:designElem xmlns:p16="http://schemas.microsoft.com/office/powerpoint/2015/main" val="1"/>
+              </p:ext>
+            </p:extLst>
+          </p:nvPr>
+        </p:nvGrpSpPr>
+        <p:grpSpPr>
+          <a:xfrm>
+            <a:off x="8444654" y="317578"/>
+            <a:ext cx="411480" cy="549007"/>
+            <a:chOff x="7029447" y="3514725"/>
+            <a:chExt cx="1285875" cy="549007"/>
+          </a:xfrm>
+        </p:grpSpPr>
+        <p:cxnSp>
+          <p:nvCxnSpPr>
+            <p:cNvPr id="36" name="Straight Connector 35">
+              <a:extLst>
+                <a:ext uri="{FF2B5EF4-FFF2-40B4-BE49-F238E27FC236}">
+                  <a16:creationId xmlns:a16="http://schemas.microsoft.com/office/drawing/2014/main" id="{24467063-D74E-4D42-8790-B9F6D69584BE}"/>
+                </a:ext>
+                <a:ext uri="{C183D7F6-B498-43B3-948B-1728B52AA6E4}">
+                  <adec:decorative xmlns:adec="http://schemas.microsoft.com/office/drawing/2017/decorative" val="1"/>
+                </a:ext>
+              </a:extLst>
+            </p:cNvPr>
+            <p:cNvCxnSpPr>
+              <a:cxnSpLocks/>
+            </p:cNvCxnSpPr>
+            <p:nvPr>
+              <p:extLst>
+                <p:ext uri="{386F3935-93C4-4BCD-93E2-E3B085C9AB24}">
+                  <p16:designElem xmlns:p16="http://schemas.microsoft.com/office/powerpoint/2015/main" val="1"/>
+                </p:ext>
+              </p:extLst>
+            </p:nvPr>
+          </p:nvCxnSpPr>
+          <p:spPr>
+            <a:xfrm>
+              <a:off x="7029447" y="3514725"/>
+              <a:ext cx="1285875" cy="0"/>
+            </a:xfrm>
+            <a:prstGeom prst="line">
+              <a:avLst/>
+            </a:prstGeom>
+            <a:ln w="31750" cap="rnd" cmpd="sng">
+              <a:gradFill>
+                <a:gsLst>
+                  <a:gs pos="0">
+                    <a:schemeClr val="tx2">
+                      <a:lumMod val="60000"/>
+                      <a:lumOff val="40000"/>
+                      <a:alpha val="40000"/>
+                    </a:schemeClr>
+                  </a:gs>
+                  <a:gs pos="100000">
+                    <a:schemeClr val="tx2">
+                      <a:lumMod val="75000"/>
+                      <a:alpha val="40000"/>
+                    </a:schemeClr>
+                  </a:gs>
+                </a:gsLst>
+                <a:lin ang="5400000" scaled="1"/>
+              </a:gradFill>
+              <a:prstDash val="sysDot"/>
+              <a:round/>
+            </a:ln>
+          </p:spPr>
+          <p:style>
+            <a:lnRef idx="1">
+              <a:schemeClr val="accent1"/>
+            </a:lnRef>
+            <a:fillRef idx="0">
+              <a:schemeClr val="accent1"/>
+            </a:fillRef>
+            <a:effectRef idx="0">
+              <a:schemeClr val="accent1"/>
+            </a:effectRef>
+            <a:fontRef idx="minor">
+              <a:schemeClr val="tx1"/>
+            </a:fontRef>
+          </p:style>
+        </p:cxnSp>
+        <p:cxnSp>
+          <p:nvCxnSpPr>
+            <p:cNvPr id="37" name="Straight Connector 36">
+              <a:extLst>
+                <a:ext uri="{FF2B5EF4-FFF2-40B4-BE49-F238E27FC236}">
+                  <a16:creationId xmlns:a16="http://schemas.microsoft.com/office/drawing/2014/main" id="{A1D19BAC-1681-47BC-AAF5-92FAFFF6F4CE}"/>
+                </a:ext>
+                <a:ext uri="{C183D7F6-B498-43B3-948B-1728B52AA6E4}">
+                  <adec:decorative xmlns:adec="http://schemas.microsoft.com/office/drawing/2017/decorative" val="1"/>
+                </a:ext>
+              </a:extLst>
+            </p:cNvPr>
+            <p:cNvCxnSpPr>
+              <a:cxnSpLocks/>
+            </p:cNvCxnSpPr>
+            <p:nvPr>
+              <p:extLst>
+                <p:ext uri="{386F3935-93C4-4BCD-93E2-E3B085C9AB24}">
+                  <p16:designElem xmlns:p16="http://schemas.microsoft.com/office/powerpoint/2015/main" val="1"/>
+                </p:ext>
+              </p:extLst>
+            </p:nvPr>
+          </p:nvCxnSpPr>
+          <p:spPr>
+            <a:xfrm>
+              <a:off x="7029447" y="3697727"/>
+              <a:ext cx="1285875" cy="0"/>
+            </a:xfrm>
+            <a:prstGeom prst="line">
+              <a:avLst/>
+            </a:prstGeom>
+            <a:ln w="31750" cap="rnd" cmpd="sng">
+              <a:gradFill>
+                <a:gsLst>
+                  <a:gs pos="0">
+                    <a:schemeClr val="tx2">
+                      <a:lumMod val="60000"/>
+                      <a:lumOff val="40000"/>
+                      <a:alpha val="40000"/>
+                    </a:schemeClr>
+                  </a:gs>
+                  <a:gs pos="100000">
+                    <a:schemeClr val="tx2">
+                      <a:lumMod val="75000"/>
+                      <a:alpha val="40000"/>
+                    </a:schemeClr>
+                  </a:gs>
+                </a:gsLst>
+                <a:lin ang="5400000" scaled="1"/>
+              </a:gradFill>
+              <a:prstDash val="sysDot"/>
+              <a:round/>
+            </a:ln>
+          </p:spPr>
+          <p:style>
+            <a:lnRef idx="1">
+              <a:schemeClr val="accent1"/>
+            </a:lnRef>
+            <a:fillRef idx="0">
+              <a:schemeClr val="accent1"/>
+            </a:fillRef>
+            <a:effectRef idx="0">
+              <a:schemeClr val="accent1"/>
+            </a:effectRef>
+            <a:fontRef idx="minor">
+              <a:schemeClr val="tx1"/>
+            </a:fontRef>
+          </p:style>
+        </p:cxnSp>
+        <p:cxnSp>
+          <p:nvCxnSpPr>
+            <p:cNvPr id="38" name="Straight Connector 37">
+              <a:extLst>
+                <a:ext uri="{FF2B5EF4-FFF2-40B4-BE49-F238E27FC236}">
+                  <a16:creationId xmlns:a16="http://schemas.microsoft.com/office/drawing/2014/main" id="{94347C2B-E846-452C-97AA-7E254FC1CE8F}"/>
+                </a:ext>
+                <a:ext uri="{C183D7F6-B498-43B3-948B-1728B52AA6E4}">
+                  <adec:decorative xmlns:adec="http://schemas.microsoft.com/office/drawing/2017/decorative" val="1"/>
+                </a:ext>
+              </a:extLst>
+            </p:cNvPr>
+            <p:cNvCxnSpPr>
+              <a:cxnSpLocks/>
+            </p:cNvCxnSpPr>
+            <p:nvPr>
+              <p:extLst>
+                <p:ext uri="{386F3935-93C4-4BCD-93E2-E3B085C9AB24}">
+                  <p16:designElem xmlns:p16="http://schemas.microsoft.com/office/powerpoint/2015/main" val="1"/>
+                </p:ext>
+              </p:extLst>
+            </p:nvPr>
+          </p:nvCxnSpPr>
+          <p:spPr>
+            <a:xfrm>
+              <a:off x="7029447" y="3880729"/>
+              <a:ext cx="1285875" cy="0"/>
+            </a:xfrm>
+            <a:prstGeom prst="line">
+              <a:avLst/>
+            </a:prstGeom>
+            <a:ln w="31750" cap="rnd" cmpd="sng">
+              <a:gradFill>
+                <a:gsLst>
+                  <a:gs pos="0">
+                    <a:schemeClr val="tx2">
+                      <a:lumMod val="60000"/>
+                      <a:lumOff val="40000"/>
+                      <a:alpha val="40000"/>
+                    </a:schemeClr>
+                  </a:gs>
+                  <a:gs pos="100000">
+                    <a:schemeClr val="tx2">
+                      <a:lumMod val="75000"/>
+                      <a:alpha val="40000"/>
+                    </a:schemeClr>
+                  </a:gs>
+                </a:gsLst>
+                <a:lin ang="5400000" scaled="1"/>
+              </a:gradFill>
+              <a:prstDash val="sysDot"/>
+              <a:round/>
+            </a:ln>
+          </p:spPr>
+          <p:style>
+            <a:lnRef idx="1">
+              <a:schemeClr val="accent1"/>
+            </a:lnRef>
+            <a:fillRef idx="0">
+              <a:schemeClr val="accent1"/>
+            </a:fillRef>
+            <a:effectRef idx="0">
+              <a:schemeClr val="accent1"/>
+            </a:effectRef>
+            <a:fontRef idx="minor">
+              <a:schemeClr val="tx1"/>
+            </a:fontRef>
+          </p:style>
+        </p:cxnSp>
+        <p:cxnSp>
+          <p:nvCxnSpPr>
+            <p:cNvPr id="39" name="Straight Connector 38">
+              <a:extLst>
+                <a:ext uri="{FF2B5EF4-FFF2-40B4-BE49-F238E27FC236}">
+                  <a16:creationId xmlns:a16="http://schemas.microsoft.com/office/drawing/2014/main" id="{10EA2B35-7959-4C2A-84AA-FF5D94FEDE90}"/>
+                </a:ext>
+                <a:ext uri="{C183D7F6-B498-43B3-948B-1728B52AA6E4}">
+                  <adec:decorative xmlns:adec="http://schemas.microsoft.com/office/drawing/2017/decorative" val="1"/>
+                </a:ext>
+              </a:extLst>
+            </p:cNvPr>
+            <p:cNvCxnSpPr>
+              <a:cxnSpLocks/>
+            </p:cNvCxnSpPr>
+            <p:nvPr>
+              <p:extLst>
+                <p:ext uri="{386F3935-93C4-4BCD-93E2-E3B085C9AB24}">
+                  <p16:designElem xmlns:p16="http://schemas.microsoft.com/office/powerpoint/2015/main" val="1"/>
+                </p:ext>
+              </p:extLst>
+            </p:nvPr>
+          </p:nvCxnSpPr>
+          <p:spPr>
+            <a:xfrm>
+              <a:off x="7029447" y="4063732"/>
+              <a:ext cx="1285875" cy="0"/>
+            </a:xfrm>
+            <a:prstGeom prst="line">
+              <a:avLst/>
+            </a:prstGeom>
+            <a:ln w="31750" cap="rnd" cmpd="sng">
+              <a:gradFill>
+                <a:gsLst>
+                  <a:gs pos="0">
+                    <a:schemeClr val="tx2">
+                      <a:lumMod val="60000"/>
+                      <a:lumOff val="40000"/>
+                      <a:alpha val="40000"/>
+                    </a:schemeClr>
+                  </a:gs>
+                  <a:gs pos="100000">
+                    <a:schemeClr val="tx2">
+                      <a:lumMod val="75000"/>
+                      <a:alpha val="40000"/>
+                    </a:schemeClr>
+                  </a:gs>
+                </a:gsLst>
+                <a:lin ang="5400000" scaled="1"/>
+              </a:gradFill>
+              <a:prstDash val="sysDot"/>
+              <a:round/>
+            </a:ln>
+          </p:spPr>
+          <p:style>
+            <a:lnRef idx="1">
+              <a:schemeClr val="accent1"/>
+            </a:lnRef>
+            <a:fillRef idx="0">
+              <a:schemeClr val="accent1"/>
+            </a:fillRef>
+            <a:effectRef idx="0">
+              <a:schemeClr val="accent1"/>
+            </a:effectRef>
+            <a:fontRef idx="minor">
+              <a:schemeClr val="tx1"/>
+            </a:fontRef>
+          </p:style>
+        </p:cxnSp>
+      </p:grpSp>
+      <p:sp>
+        <p:nvSpPr>
+          <p:cNvPr id="41" name="Rectangle 40">
+            <a:extLst>
+              <a:ext uri="{FF2B5EF4-FFF2-40B4-BE49-F238E27FC236}">
+                <a16:creationId xmlns:a16="http://schemas.microsoft.com/office/drawing/2014/main" id="{E2D3D3F2-ABBB-4453-B1C5-1BEBF7E4DD56}"/>
+              </a:ext>
+              <a:ext uri="{C183D7F6-B498-43B3-948B-1728B52AA6E4}">
+                <adec:decorative xmlns:adec="http://schemas.microsoft.com/office/drawing/2017/decorative" val="1"/>
+              </a:ext>
+            </a:extLst>
+          </p:cNvPr>
+          <p:cNvSpPr>
+            <a:spLocks noGrp="1" noRot="1" noChangeAspect="1" noMove="1" noResize="1" noEditPoints="1" noAdjustHandles="1" noChangeArrowheads="1" noChangeShapeType="1" noTextEdit="1"/>
+          </p:cNvSpPr>
+          <p:nvPr>
+            <p:extLst>
+              <p:ext uri="{386F3935-93C4-4BCD-93E2-E3B085C9AB24}">
+                <p16:designElem xmlns:p16="http://schemas.microsoft.com/office/powerpoint/2015/main" val="1"/>
+              </p:ext>
+            </p:extLst>
+          </p:nvPr>
+        </p:nvSpPr>
+        <p:spPr>
+          <a:xfrm rot="10800000">
+            <a:off x="0" y="6140785"/>
+            <a:ext cx="4571997" cy="711252"/>
+          </a:xfrm>
+          <a:prstGeom prst="rect">
+            <a:avLst/>
+          </a:prstGeom>
+          <a:gradFill flip="none" rotWithShape="1">
+            <a:gsLst>
+              <a:gs pos="10000">
+                <a:schemeClr val="tx2">
+                  <a:lumMod val="50000"/>
+                  <a:alpha val="10000"/>
+                </a:schemeClr>
+              </a:gs>
+              <a:gs pos="100000">
+                <a:schemeClr val="tx2">
+                  <a:lumMod val="60000"/>
+                  <a:lumOff val="40000"/>
+                  <a:alpha val="0"/>
+                </a:schemeClr>
+              </a:gs>
+            </a:gsLst>
+            <a:lin ang="8400000" scaled="0"/>
+            <a:tileRect/>
+          </a:gradFill>
+          <a:ln>
+            <a:noFill/>
+          </a:ln>
+        </p:spPr>
+        <p:style>
+          <a:lnRef idx="2">
+            <a:schemeClr val="accent1">
+              <a:shade val="50000"/>
+            </a:schemeClr>
+          </a:lnRef>
+          <a:fillRef idx="1">
+            <a:schemeClr val="accent1"/>
+          </a:fillRef>
+          <a:effectRef idx="0">
+            <a:schemeClr val="accent1"/>
+          </a:effectRef>
+          <a:fontRef idx="minor">
+            <a:schemeClr val="lt1"/>
+          </a:fontRef>
+        </p:style>
+        <p:txBody>
+          <a:bodyPr rtlCol="0" anchor="ctr"/>
+          <a:lstStyle/>
+          <a:p>
+            <a:pPr marL="0" marR="0" lvl="0" indent="0" algn="ctr" defTabSz="457200" rtl="0" eaLnBrk="1" fontAlgn="auto" latinLnBrk="0" hangingPunct="1">
+              <a:lnSpc>
+                <a:spcPct val="100000"/>
+              </a:lnSpc>
+              <a:spcBef>
+                <a:spcPts val="0"/>
+              </a:spcBef>
+              <a:spcAft>
+                <a:spcPts val="0"/>
+              </a:spcAft>
+              <a:buClrTx/>
+              <a:buSzTx/>
+              <a:buFontTx/>
+              <a:buNone/>
+              <a:tabLst/>
+              <a:defRPr/>
+            </a:pPr>
+            <a:endParaRPr kumimoji="0" lang="en-US" sz="1800" b="0" i="0" u="none" strike="noStrike" kern="1200" cap="none" spc="0" normalizeH="0" baseline="0" noProof="0">
+              <a:ln>
+                <a:noFill/>
+              </a:ln>
+              <a:solidFill>
+                <a:prstClr val="white"/>
+              </a:solidFill>
+              <a:effectLst/>
+              <a:uLnTx/>
+              <a:uFillTx/>
+              <a:latin typeface="Calibri"/>
+              <a:ea typeface="+mn-ea"/>
+              <a:cs typeface="+mn-cs"/>
+            </a:endParaRPr>
+          </a:p>
+        </p:txBody>
+      </p:sp>
+      <p:grpSp>
+        <p:nvGrpSpPr>
+          <p:cNvPr id="43" name="Group 42">
+            <a:extLst>
+              <a:ext uri="{FF2B5EF4-FFF2-40B4-BE49-F238E27FC236}">
+                <a16:creationId xmlns:a16="http://schemas.microsoft.com/office/drawing/2014/main" id="{8214E4A5-A0D2-42C4-8D14-D2A7E495F041}"/>
+              </a:ext>
+              <a:ext uri="{C183D7F6-B498-43B3-948B-1728B52AA6E4}">
+                <adec:decorative xmlns:adec="http://schemas.microsoft.com/office/drawing/2017/decorative" val="1"/>
+              </a:ext>
+            </a:extLst>
+          </p:cNvPr>
+          <p:cNvGrpSpPr>
+            <a:grpSpLocks noGrp="1" noUngrp="1" noRot="1" noChangeAspect="1" noMove="1" noResize="1"/>
+          </p:cNvGrpSpPr>
+          <p:nvPr>
+            <p:extLst>
+              <p:ext uri="{386F3935-93C4-4BCD-93E2-E3B085C9AB24}">
+                <p16:designElem xmlns:p16="http://schemas.microsoft.com/office/powerpoint/2015/main" val="1"/>
+              </p:ext>
+            </p:extLst>
+          </p:nvPr>
+        </p:nvGrpSpPr>
+        <p:grpSpPr>
+          <a:xfrm rot="5400000">
+            <a:off x="-645785" y="5940560"/>
+            <a:ext cx="1285875" cy="549007"/>
+            <a:chOff x="7029447" y="3514725"/>
+            <a:chExt cx="1285875" cy="549007"/>
+          </a:xfrm>
+        </p:grpSpPr>
+        <p:cxnSp>
+          <p:nvCxnSpPr>
+            <p:cNvPr id="44" name="Straight Connector 43">
+              <a:extLst>
+                <a:ext uri="{FF2B5EF4-FFF2-40B4-BE49-F238E27FC236}">
+                  <a16:creationId xmlns:a16="http://schemas.microsoft.com/office/drawing/2014/main" id="{7494D7A0-6B21-41E8-A7D3-0033BBB79156}"/>
+                </a:ext>
+                <a:ext uri="{C183D7F6-B498-43B3-948B-1728B52AA6E4}">
+                  <adec:decorative xmlns:adec="http://schemas.microsoft.com/office/drawing/2017/decorative" val="1"/>
+                </a:ext>
+              </a:extLst>
+            </p:cNvPr>
+            <p:cNvCxnSpPr>
+              <a:cxnSpLocks/>
+            </p:cNvCxnSpPr>
+            <p:nvPr>
+              <p:extLst>
+                <p:ext uri="{386F3935-93C4-4BCD-93E2-E3B085C9AB24}">
+                  <p16:designElem xmlns:p16="http://schemas.microsoft.com/office/powerpoint/2015/main" val="1"/>
+                </p:ext>
+              </p:extLst>
+            </p:nvPr>
+          </p:nvCxnSpPr>
+          <p:spPr>
+            <a:xfrm>
+              <a:off x="7029447" y="3514725"/>
+              <a:ext cx="1285875" cy="0"/>
+            </a:xfrm>
+            <a:prstGeom prst="line">
+              <a:avLst/>
+            </a:prstGeom>
+            <a:ln w="31750" cap="rnd" cmpd="sng">
+              <a:gradFill>
+                <a:gsLst>
+                  <a:gs pos="0">
+                    <a:schemeClr val="tx2">
+                      <a:lumMod val="60000"/>
+                      <a:lumOff val="40000"/>
+                      <a:alpha val="40000"/>
+                    </a:schemeClr>
+                  </a:gs>
+                  <a:gs pos="100000">
+                    <a:schemeClr val="tx2">
+                      <a:lumMod val="50000"/>
+                      <a:alpha val="40000"/>
+                    </a:schemeClr>
+                  </a:gs>
+                </a:gsLst>
+                <a:lin ang="5400000" scaled="1"/>
+              </a:gradFill>
+              <a:prstDash val="sysDot"/>
+              <a:round/>
+            </a:ln>
+          </p:spPr>
+          <p:style>
+            <a:lnRef idx="1">
+              <a:schemeClr val="accent1"/>
+            </a:lnRef>
+            <a:fillRef idx="0">
+              <a:schemeClr val="accent1"/>
+            </a:fillRef>
+            <a:effectRef idx="0">
+              <a:schemeClr val="accent1"/>
+            </a:effectRef>
+            <a:fontRef idx="minor">
+              <a:schemeClr val="tx1"/>
+            </a:fontRef>
+          </p:style>
+        </p:cxnSp>
+        <p:cxnSp>
+          <p:nvCxnSpPr>
+            <p:cNvPr id="45" name="Straight Connector 44">
+              <a:extLst>
+                <a:ext uri="{FF2B5EF4-FFF2-40B4-BE49-F238E27FC236}">
+                  <a16:creationId xmlns:a16="http://schemas.microsoft.com/office/drawing/2014/main" id="{1E141D7D-32B0-448E-A666-EA8703AFCF2C}"/>
+                </a:ext>
+                <a:ext uri="{C183D7F6-B498-43B3-948B-1728B52AA6E4}">
+                  <adec:decorative xmlns:adec="http://schemas.microsoft.com/office/drawing/2017/decorative" val="1"/>
+                </a:ext>
+              </a:extLst>
+            </p:cNvPr>
+            <p:cNvCxnSpPr>
+              <a:cxnSpLocks/>
+            </p:cNvCxnSpPr>
+            <p:nvPr>
+              <p:extLst>
+                <p:ext uri="{386F3935-93C4-4BCD-93E2-E3B085C9AB24}">
+                  <p16:designElem xmlns:p16="http://schemas.microsoft.com/office/powerpoint/2015/main" val="1"/>
+                </p:ext>
+              </p:extLst>
+            </p:nvPr>
+          </p:nvCxnSpPr>
+          <p:spPr>
+            <a:xfrm>
+              <a:off x="7029447" y="3697727"/>
+              <a:ext cx="1285875" cy="0"/>
+            </a:xfrm>
+            <a:prstGeom prst="line">
+              <a:avLst/>
+            </a:prstGeom>
+            <a:ln w="31750" cap="rnd" cmpd="sng">
+              <a:gradFill>
+                <a:gsLst>
+                  <a:gs pos="0">
+                    <a:schemeClr val="tx2">
+                      <a:lumMod val="60000"/>
+                      <a:lumOff val="40000"/>
+                      <a:alpha val="40000"/>
+                    </a:schemeClr>
+                  </a:gs>
+                  <a:gs pos="100000">
+                    <a:schemeClr val="tx2">
+                      <a:lumMod val="50000"/>
+                      <a:alpha val="40000"/>
+                    </a:schemeClr>
+                  </a:gs>
+                </a:gsLst>
+                <a:lin ang="5400000" scaled="1"/>
+              </a:gradFill>
+              <a:prstDash val="sysDot"/>
+              <a:round/>
+            </a:ln>
+          </p:spPr>
+          <p:style>
+            <a:lnRef idx="1">
+              <a:schemeClr val="accent1"/>
+            </a:lnRef>
+            <a:fillRef idx="0">
+              <a:schemeClr val="accent1"/>
+            </a:fillRef>
+            <a:effectRef idx="0">
+              <a:schemeClr val="accent1"/>
+            </a:effectRef>
+            <a:fontRef idx="minor">
+              <a:schemeClr val="tx1"/>
+            </a:fontRef>
+          </p:style>
+        </p:cxnSp>
+        <p:cxnSp>
+          <p:nvCxnSpPr>
+            <p:cNvPr id="46" name="Straight Connector 45">
+              <a:extLst>
+                <a:ext uri="{FF2B5EF4-FFF2-40B4-BE49-F238E27FC236}">
+                  <a16:creationId xmlns:a16="http://schemas.microsoft.com/office/drawing/2014/main" id="{8D87E268-6345-420F-8B97-B37ED04100EC}"/>
+                </a:ext>
+                <a:ext uri="{C183D7F6-B498-43B3-948B-1728B52AA6E4}">
+                  <adec:decorative xmlns:adec="http://schemas.microsoft.com/office/drawing/2017/decorative" val="1"/>
+                </a:ext>
+              </a:extLst>
+            </p:cNvPr>
+            <p:cNvCxnSpPr>
+              <a:cxnSpLocks/>
+            </p:cNvCxnSpPr>
+            <p:nvPr>
+              <p:extLst>
+                <p:ext uri="{386F3935-93C4-4BCD-93E2-E3B085C9AB24}">
+                  <p16:designElem xmlns:p16="http://schemas.microsoft.com/office/powerpoint/2015/main" val="1"/>
+                </p:ext>
+              </p:extLst>
+            </p:nvPr>
+          </p:nvCxnSpPr>
+          <p:spPr>
+            <a:xfrm>
+              <a:off x="7029447" y="3880729"/>
+              <a:ext cx="1285875" cy="0"/>
+            </a:xfrm>
+            <a:prstGeom prst="line">
+              <a:avLst/>
+            </a:prstGeom>
+            <a:ln w="31750" cap="rnd" cmpd="sng">
+              <a:gradFill>
+                <a:gsLst>
+                  <a:gs pos="0">
+                    <a:schemeClr val="tx2">
+                      <a:lumMod val="60000"/>
+                      <a:lumOff val="40000"/>
+                      <a:alpha val="40000"/>
+                    </a:schemeClr>
+                  </a:gs>
+                  <a:gs pos="100000">
+                    <a:schemeClr val="tx2">
+                      <a:lumMod val="50000"/>
+                      <a:alpha val="40000"/>
+                    </a:schemeClr>
+                  </a:gs>
+                </a:gsLst>
+                <a:lin ang="5400000" scaled="1"/>
+              </a:gradFill>
+              <a:prstDash val="sysDot"/>
+              <a:round/>
+            </a:ln>
+          </p:spPr>
+          <p:style>
+            <a:lnRef idx="1">
+              <a:schemeClr val="accent1"/>
+            </a:lnRef>
+            <a:fillRef idx="0">
+              <a:schemeClr val="accent1"/>
+            </a:fillRef>
+            <a:effectRef idx="0">
+              <a:schemeClr val="accent1"/>
+            </a:effectRef>
+            <a:fontRef idx="minor">
+              <a:schemeClr val="tx1"/>
+            </a:fontRef>
+          </p:style>
+        </p:cxnSp>
+        <p:cxnSp>
+          <p:nvCxnSpPr>
+            <p:cNvPr id="47" name="Straight Connector 46">
+              <a:extLst>
+                <a:ext uri="{FF2B5EF4-FFF2-40B4-BE49-F238E27FC236}">
+                  <a16:creationId xmlns:a16="http://schemas.microsoft.com/office/drawing/2014/main" id="{35E1622E-7FA6-4760-A2BF-A8105EBF7BB9}"/>
+                </a:ext>
+                <a:ext uri="{C183D7F6-B498-43B3-948B-1728B52AA6E4}">
+                  <adec:decorative xmlns:adec="http://schemas.microsoft.com/office/drawing/2017/decorative" val="1"/>
+                </a:ext>
+              </a:extLst>
+            </p:cNvPr>
+            <p:cNvCxnSpPr>
+              <a:cxnSpLocks/>
+            </p:cNvCxnSpPr>
+            <p:nvPr>
+              <p:extLst>
+                <p:ext uri="{386F3935-93C4-4BCD-93E2-E3B085C9AB24}">
+                  <p16:designElem xmlns:p16="http://schemas.microsoft.com/office/powerpoint/2015/main" val="1"/>
+                </p:ext>
+              </p:extLst>
+            </p:nvPr>
+          </p:nvCxnSpPr>
+          <p:spPr>
+            <a:xfrm>
+              <a:off x="7029447" y="4063732"/>
+              <a:ext cx="1285875" cy="0"/>
+            </a:xfrm>
+            <a:prstGeom prst="line">
+              <a:avLst/>
+            </a:prstGeom>
+            <a:ln w="31750" cap="rnd" cmpd="sng">
+              <a:gradFill>
+                <a:gsLst>
+                  <a:gs pos="0">
+                    <a:schemeClr val="tx2">
+                      <a:lumMod val="60000"/>
+                      <a:lumOff val="40000"/>
+                      <a:alpha val="40000"/>
+                    </a:schemeClr>
+                  </a:gs>
+                  <a:gs pos="100000">
+                    <a:schemeClr val="tx2">
+                      <a:lumMod val="50000"/>
+                      <a:alpha val="40000"/>
+                    </a:schemeClr>
+                  </a:gs>
+                </a:gsLst>
+                <a:lin ang="5400000" scaled="1"/>
+              </a:gradFill>
+              <a:prstDash val="sysDot"/>
+              <a:round/>
+            </a:ln>
+          </p:spPr>
+          <p:style>
+            <a:lnRef idx="1">
+              <a:schemeClr val="accent1"/>
+            </a:lnRef>
+            <a:fillRef idx="0">
+              <a:schemeClr val="accent1"/>
+            </a:fillRef>
+            <a:effectRef idx="0">
+              <a:schemeClr val="accent1"/>
+            </a:effectRef>
+            <a:fontRef idx="minor">
+              <a:schemeClr val="tx1"/>
+            </a:fontRef>
+          </p:style>
+        </p:cxnSp>
+      </p:grpSp>
+      <p:sp>
+        <p:nvSpPr>
+          <p:cNvPr id="2" name="Title 1"/>
+          <p:cNvSpPr>
+            <a:spLocks noGrp="1"/>
+          </p:cNvSpPr>
+          <p:nvPr>
+            <p:ph type="title"/>
+          </p:nvPr>
+        </p:nvSpPr>
+        <p:spPr>
+          <a:xfrm>
+            <a:off x="473201" y="4018137"/>
+            <a:ext cx="3803416" cy="2129586"/>
+          </a:xfrm>
+          <a:noFill/>
+        </p:spPr>
+        <p:txBody>
+          <a:bodyPr anchor="t">
+            <a:normAutofit/>
+          </a:bodyPr>
+          <a:lstStyle/>
+          <a:p>
+            <a:pPr algn="l"/>
+            <a:r>
+              <a:rPr lang="en-US" sz="4200">
+                <a:solidFill>
+                  <a:schemeClr val="bg1"/>
+                </a:solidFill>
+              </a:rPr>
+              <a:t>Deployment Architecture &amp; Workflow</a:t>
+            </a:r>
+          </a:p>
+        </p:txBody>
+      </p:sp>
+      <p:pic>
+        <p:nvPicPr>
+          <p:cNvPr id="16" name="Picture 15">
+            <a:extLst>
+              <a:ext uri="{FF2B5EF4-FFF2-40B4-BE49-F238E27FC236}">
+                <a16:creationId xmlns:a16="http://schemas.microsoft.com/office/drawing/2014/main" id="{5C4692E5-298B-B20B-3ADF-1ED8D90A6543}"/>
+              </a:ext>
+            </a:extLst>
+          </p:cNvPr>
+          <p:cNvPicPr>
+            <a:picLocks noChangeAspect="1"/>
+          </p:cNvPicPr>
+          <p:nvPr/>
+        </p:nvPicPr>
+        <p:blipFill>
+          <a:blip r:embed="rId2"/>
+          <a:stretch>
+            <a:fillRect/>
+          </a:stretch>
+        </p:blipFill>
+        <p:spPr>
+          <a:xfrm>
+            <a:off x="473519" y="898408"/>
+            <a:ext cx="8132299" cy="2703989"/>
+          </a:xfrm>
+          <a:prstGeom prst="rect">
+            <a:avLst/>
+          </a:prstGeom>
+        </p:spPr>
+      </p:pic>
+      <p:grpSp>
+        <p:nvGrpSpPr>
+          <p:cNvPr id="49" name="Group 48">
+            <a:extLst>
+              <a:ext uri="{FF2B5EF4-FFF2-40B4-BE49-F238E27FC236}">
+                <a16:creationId xmlns:a16="http://schemas.microsoft.com/office/drawing/2014/main" id="{1F4E1649-4D1F-4A91-AF97-A254BFDD524D}"/>
+              </a:ext>
+              <a:ext uri="{C183D7F6-B498-43B3-948B-1728B52AA6E4}">
+                <adec:decorative xmlns:adec="http://schemas.microsoft.com/office/drawing/2017/decorative" val="1"/>
+              </a:ext>
+            </a:extLst>
+          </p:cNvPr>
+          <p:cNvGrpSpPr>
+            <a:grpSpLocks noGrp="1" noUngrp="1" noRot="1" noChangeAspect="1" noMove="1" noResize="1"/>
+          </p:cNvGrpSpPr>
+          <p:nvPr>
+            <p:extLst>
+              <p:ext uri="{386F3935-93C4-4BCD-93E2-E3B085C9AB24}">
+                <p16:designElem xmlns:p16="http://schemas.microsoft.com/office/powerpoint/2015/main" val="1"/>
+              </p:ext>
+            </p:extLst>
+          </p:nvPr>
+        </p:nvGrpSpPr>
+        <p:grpSpPr>
+          <a:xfrm rot="16200000">
+            <a:off x="317544" y="830625"/>
+            <a:ext cx="304800" cy="322326"/>
+            <a:chOff x="215328" y="-46937"/>
+            <a:chExt cx="304800" cy="2773841"/>
+          </a:xfrm>
+        </p:grpSpPr>
+        <p:cxnSp>
+          <p:nvCxnSpPr>
+            <p:cNvPr id="50" name="Straight Connector 49">
+              <a:extLst>
+                <a:ext uri="{FF2B5EF4-FFF2-40B4-BE49-F238E27FC236}">
+                  <a16:creationId xmlns:a16="http://schemas.microsoft.com/office/drawing/2014/main" id="{FE483602-62F9-474D-9C9B-5EE4CD7671CB}"/>
+                </a:ext>
+                <a:ext uri="{C183D7F6-B498-43B3-948B-1728B52AA6E4}">
+                  <adec:decorative xmlns:adec="http://schemas.microsoft.com/office/drawing/2017/decorative" val="1"/>
+                </a:ext>
+              </a:extLst>
+            </p:cNvPr>
+            <p:cNvCxnSpPr>
+              <a:cxnSpLocks/>
+            </p:cNvCxnSpPr>
+            <p:nvPr>
+              <p:extLst>
+                <p:ext uri="{386F3935-93C4-4BCD-93E2-E3B085C9AB24}">
+                  <p16:designElem xmlns:p16="http://schemas.microsoft.com/office/powerpoint/2015/main" val="1"/>
+                </p:ext>
+              </p:extLst>
+            </p:nvPr>
+          </p:nvCxnSpPr>
+          <p:spPr>
+            <a:xfrm>
+              <a:off x="215328" y="-46937"/>
+              <a:ext cx="0" cy="2773841"/>
+            </a:xfrm>
+            <a:prstGeom prst="line">
+              <a:avLst/>
+            </a:prstGeom>
+            <a:ln w="25400" cmpd="sng">
+              <a:solidFill>
+                <a:schemeClr val="bg2">
+                  <a:lumMod val="60000"/>
+                  <a:lumOff val="40000"/>
+                  <a:alpha val="50000"/>
+                </a:schemeClr>
+              </a:solidFill>
+              <a:prstDash val="sysDot"/>
+            </a:ln>
+          </p:spPr>
+          <p:style>
+            <a:lnRef idx="1">
+              <a:schemeClr val="accent1"/>
+            </a:lnRef>
+            <a:fillRef idx="0">
+              <a:schemeClr val="accent1"/>
+            </a:fillRef>
+            <a:effectRef idx="0">
+              <a:schemeClr val="accent1"/>
+            </a:effectRef>
+            <a:fontRef idx="minor">
+              <a:schemeClr val="tx1"/>
+            </a:fontRef>
+          </p:style>
+        </p:cxnSp>
+        <p:cxnSp>
+          <p:nvCxnSpPr>
+            <p:cNvPr id="51" name="Straight Connector 50">
+              <a:extLst>
+                <a:ext uri="{FF2B5EF4-FFF2-40B4-BE49-F238E27FC236}">
+                  <a16:creationId xmlns:a16="http://schemas.microsoft.com/office/drawing/2014/main" id="{DD7D1AC0-A6C7-40E3-9841-F34AC831A483}"/>
+                </a:ext>
+                <a:ext uri="{C183D7F6-B498-43B3-948B-1728B52AA6E4}">
+                  <adec:decorative xmlns:adec="http://schemas.microsoft.com/office/drawing/2017/decorative" val="1"/>
+                </a:ext>
+              </a:extLst>
+            </p:cNvPr>
+            <p:cNvCxnSpPr>
+              <a:cxnSpLocks/>
+            </p:cNvCxnSpPr>
+            <p:nvPr>
+              <p:extLst>
+                <p:ext uri="{386F3935-93C4-4BCD-93E2-E3B085C9AB24}">
+                  <p16:designElem xmlns:p16="http://schemas.microsoft.com/office/powerpoint/2015/main" val="1"/>
+                </p:ext>
+              </p:extLst>
+            </p:nvPr>
+          </p:nvCxnSpPr>
+          <p:spPr>
+            <a:xfrm>
+              <a:off x="316928" y="-46937"/>
+              <a:ext cx="0" cy="2773841"/>
+            </a:xfrm>
+            <a:prstGeom prst="line">
+              <a:avLst/>
+            </a:prstGeom>
+            <a:ln w="25400" cmpd="sng">
+              <a:solidFill>
+                <a:schemeClr val="bg2">
+                  <a:lumMod val="60000"/>
+                  <a:lumOff val="40000"/>
+                  <a:alpha val="50000"/>
+                </a:schemeClr>
+              </a:solidFill>
+              <a:prstDash val="sysDot"/>
+            </a:ln>
+          </p:spPr>
+          <p:style>
+            <a:lnRef idx="1">
+              <a:schemeClr val="accent1"/>
+            </a:lnRef>
+            <a:fillRef idx="0">
+              <a:schemeClr val="accent1"/>
+            </a:fillRef>
+            <a:effectRef idx="0">
+              <a:schemeClr val="accent1"/>
+            </a:effectRef>
+            <a:fontRef idx="minor">
+              <a:schemeClr val="tx1"/>
+            </a:fontRef>
+          </p:style>
+        </p:cxnSp>
+        <p:cxnSp>
+          <p:nvCxnSpPr>
+            <p:cNvPr id="52" name="Straight Connector 51">
+              <a:extLst>
+                <a:ext uri="{FF2B5EF4-FFF2-40B4-BE49-F238E27FC236}">
+                  <a16:creationId xmlns:a16="http://schemas.microsoft.com/office/drawing/2014/main" id="{F951C4DD-7427-497D-9DE3-9D731D3F456E}"/>
+                </a:ext>
+                <a:ext uri="{C183D7F6-B498-43B3-948B-1728B52AA6E4}">
+                  <adec:decorative xmlns:adec="http://schemas.microsoft.com/office/drawing/2017/decorative" val="1"/>
+                </a:ext>
+              </a:extLst>
+            </p:cNvPr>
+            <p:cNvCxnSpPr>
+              <a:cxnSpLocks/>
+            </p:cNvCxnSpPr>
+            <p:nvPr>
+              <p:extLst>
+                <p:ext uri="{386F3935-93C4-4BCD-93E2-E3B085C9AB24}">
+                  <p16:designElem xmlns:p16="http://schemas.microsoft.com/office/powerpoint/2015/main" val="1"/>
+                </p:ext>
+              </p:extLst>
+            </p:nvPr>
+          </p:nvCxnSpPr>
+          <p:spPr>
+            <a:xfrm>
+              <a:off x="418528" y="-46937"/>
+              <a:ext cx="0" cy="2773841"/>
+            </a:xfrm>
+            <a:prstGeom prst="line">
+              <a:avLst/>
+            </a:prstGeom>
+            <a:ln w="25400" cmpd="sng">
+              <a:solidFill>
+                <a:schemeClr val="bg2">
+                  <a:lumMod val="60000"/>
+                  <a:lumOff val="40000"/>
+                  <a:alpha val="50000"/>
+                </a:schemeClr>
+              </a:solidFill>
+              <a:prstDash val="sysDot"/>
+            </a:ln>
+          </p:spPr>
+          <p:style>
+            <a:lnRef idx="1">
+              <a:schemeClr val="accent1"/>
+            </a:lnRef>
+            <a:fillRef idx="0">
+              <a:schemeClr val="accent1"/>
+            </a:fillRef>
+            <a:effectRef idx="0">
+              <a:schemeClr val="accent1"/>
+            </a:effectRef>
+            <a:fontRef idx="minor">
+              <a:schemeClr val="tx1"/>
+            </a:fontRef>
+          </p:style>
+        </p:cxnSp>
+        <p:cxnSp>
+          <p:nvCxnSpPr>
+            <p:cNvPr id="53" name="Straight Connector 52">
+              <a:extLst>
+                <a:ext uri="{FF2B5EF4-FFF2-40B4-BE49-F238E27FC236}">
+                  <a16:creationId xmlns:a16="http://schemas.microsoft.com/office/drawing/2014/main" id="{0EE18298-0BF5-4D7A-921A-2F4186E8D96A}"/>
+                </a:ext>
+                <a:ext uri="{C183D7F6-B498-43B3-948B-1728B52AA6E4}">
+                  <adec:decorative xmlns:adec="http://schemas.microsoft.com/office/drawing/2017/decorative" val="1"/>
+                </a:ext>
+              </a:extLst>
+            </p:cNvPr>
+            <p:cNvCxnSpPr>
+              <a:cxnSpLocks/>
+            </p:cNvCxnSpPr>
+            <p:nvPr>
+              <p:extLst>
+                <p:ext uri="{386F3935-93C4-4BCD-93E2-E3B085C9AB24}">
+                  <p16:designElem xmlns:p16="http://schemas.microsoft.com/office/powerpoint/2015/main" val="1"/>
+                </p:ext>
+              </p:extLst>
+            </p:nvPr>
+          </p:nvCxnSpPr>
+          <p:spPr>
+            <a:xfrm>
+              <a:off x="520128" y="-46937"/>
+              <a:ext cx="0" cy="2773841"/>
+            </a:xfrm>
+            <a:prstGeom prst="line">
+              <a:avLst/>
+            </a:prstGeom>
+            <a:ln w="25400" cmpd="sng">
+              <a:solidFill>
+                <a:schemeClr val="bg2">
+                  <a:lumMod val="60000"/>
+                  <a:lumOff val="40000"/>
+                  <a:alpha val="50000"/>
+                </a:schemeClr>
+              </a:solidFill>
+              <a:prstDash val="sysDot"/>
+            </a:ln>
+          </p:spPr>
+          <p:style>
+            <a:lnRef idx="1">
+              <a:schemeClr val="accent1"/>
+            </a:lnRef>
+            <a:fillRef idx="0">
+              <a:schemeClr val="accent1"/>
+            </a:fillRef>
+            <a:effectRef idx="0">
+              <a:schemeClr val="accent1"/>
+            </a:effectRef>
+            <a:fontRef idx="minor">
+              <a:schemeClr val="tx1"/>
+            </a:fontRef>
+          </p:style>
+        </p:cxnSp>
+      </p:grpSp>
+      <p:sp>
+        <p:nvSpPr>
+          <p:cNvPr id="55" name="Oval 54">
+            <a:extLst>
+              <a:ext uri="{FF2B5EF4-FFF2-40B4-BE49-F238E27FC236}">
+                <a16:creationId xmlns:a16="http://schemas.microsoft.com/office/drawing/2014/main" id="{773AEA78-C03B-40B7-9D11-DC022119D577}"/>
+              </a:ext>
+              <a:ext uri="{C183D7F6-B498-43B3-948B-1728B52AA6E4}">
+                <adec:decorative xmlns:adec="http://schemas.microsoft.com/office/drawing/2017/decorative" val="1"/>
+              </a:ext>
+            </a:extLst>
+          </p:cNvPr>
+          <p:cNvSpPr>
+            <a:spLocks noGrp="1" noRot="1" noChangeAspect="1" noMove="1" noResize="1" noEditPoints="1" noAdjustHandles="1" noChangeArrowheads="1" noChangeShapeType="1" noTextEdit="1"/>
+          </p:cNvSpPr>
+          <p:nvPr>
+            <p:extLst>
+              <p:ext uri="{386F3935-93C4-4BCD-93E2-E3B085C9AB24}">
+                <p16:designElem xmlns:p16="http://schemas.microsoft.com/office/powerpoint/2015/main" val="1"/>
+              </p:ext>
+            </p:extLst>
+          </p:nvPr>
+        </p:nvSpPr>
+        <p:spPr>
+          <a:xfrm rot="12600000">
+            <a:off x="7613133" y="4270841"/>
+            <a:ext cx="1423414" cy="1897885"/>
+          </a:xfrm>
+          <a:prstGeom prst="ellipse">
+            <a:avLst/>
+          </a:prstGeom>
+          <a:gradFill>
+            <a:gsLst>
+              <a:gs pos="0">
+                <a:schemeClr val="tx2">
+                  <a:lumMod val="75000"/>
+                  <a:alpha val="10000"/>
+                </a:schemeClr>
+              </a:gs>
+              <a:gs pos="100000">
+                <a:schemeClr val="tx2">
+                  <a:lumMod val="60000"/>
+                  <a:lumOff val="40000"/>
+                  <a:alpha val="10000"/>
+                </a:schemeClr>
+              </a:gs>
+            </a:gsLst>
+            <a:lin ang="5400000" scaled="1"/>
+          </a:gradFill>
+          <a:ln>
+            <a:noFill/>
+          </a:ln>
+        </p:spPr>
+        <p:style>
+          <a:lnRef idx="2">
+            <a:schemeClr val="accent1">
+              <a:shade val="50000"/>
+            </a:schemeClr>
+          </a:lnRef>
+          <a:fillRef idx="1">
+            <a:schemeClr val="accent1"/>
+          </a:fillRef>
+          <a:effectRef idx="0">
+            <a:schemeClr val="accent1"/>
+          </a:effectRef>
+          <a:fontRef idx="minor">
+            <a:schemeClr val="lt1"/>
+          </a:fontRef>
+        </p:style>
+        <p:txBody>
+          <a:bodyPr rtlCol="0" anchor="ctr"/>
+          <a:lstStyle/>
+          <a:p>
+            <a:pPr marL="0" marR="0" lvl="0" indent="0" algn="ctr" defTabSz="457200" rtl="0" eaLnBrk="1" fontAlgn="auto" latinLnBrk="0" hangingPunct="1">
+              <a:lnSpc>
+                <a:spcPct val="100000"/>
+              </a:lnSpc>
+              <a:spcBef>
+                <a:spcPts val="0"/>
+              </a:spcBef>
+              <a:spcAft>
+                <a:spcPts val="0"/>
+              </a:spcAft>
+              <a:buClrTx/>
+              <a:buSzTx/>
+              <a:buFontTx/>
+              <a:buNone/>
+              <a:tabLst/>
+              <a:defRPr/>
+            </a:pPr>
+            <a:endParaRPr kumimoji="0" lang="en-US" sz="1800" b="0" i="0" u="none" strike="noStrike" kern="1200" cap="none" spc="0" normalizeH="0" baseline="0" noProof="0">
+              <a:ln>
+                <a:noFill/>
+              </a:ln>
+              <a:solidFill>
+                <a:prstClr val="white"/>
+              </a:solidFill>
+              <a:effectLst/>
+              <a:uLnTx/>
+              <a:uFillTx/>
+              <a:latin typeface="Calibri"/>
+              <a:ea typeface="+mn-ea"/>
+              <a:cs typeface="+mn-cs"/>
+            </a:endParaRPr>
+          </a:p>
+        </p:txBody>
+      </p:sp>
+      <p:sp>
+        <p:nvSpPr>
+          <p:cNvPr id="3" name="Content Placeholder 2"/>
+          <p:cNvSpPr>
+            <a:spLocks noGrp="1"/>
+          </p:cNvSpPr>
+          <p:nvPr>
+            <p:ph idx="1"/>
+          </p:nvPr>
+        </p:nvSpPr>
+        <p:spPr>
+          <a:xfrm>
+            <a:off x="4443978" y="4018143"/>
+            <a:ext cx="4161833" cy="2129599"/>
+          </a:xfrm>
+          <a:noFill/>
+        </p:spPr>
+        <p:txBody>
+          <a:bodyPr anchor="t">
+            <a:normAutofit/>
+          </a:bodyPr>
+          <a:lstStyle/>
+          <a:p>
+            <a:pPr marL="0" indent="0">
+              <a:lnSpc>
+                <a:spcPct val="90000"/>
+              </a:lnSpc>
+              <a:buNone/>
+            </a:pPr>
+            <a:r>
+              <a:rPr lang="en-US" sz="900">
+                <a:solidFill>
+                  <a:schemeClr val="bg1"/>
+                </a:solidFill>
+              </a:rPr>
+              <a:t> </a:t>
+            </a:r>
+          </a:p>
+          <a:p>
+            <a:pPr marL="0" indent="0">
+              <a:lnSpc>
+                <a:spcPct val="90000"/>
+              </a:lnSpc>
+              <a:buNone/>
+            </a:pPr>
+            <a:endParaRPr lang="en-US" sz="900">
+              <a:solidFill>
+                <a:schemeClr val="bg1"/>
+              </a:solidFill>
+            </a:endParaRPr>
+          </a:p>
+          <a:p>
+            <a:pPr marL="0" indent="0">
+              <a:lnSpc>
+                <a:spcPct val="90000"/>
+              </a:lnSpc>
+              <a:buNone/>
+            </a:pPr>
+            <a:endParaRPr lang="en-US" sz="900">
+              <a:solidFill>
+                <a:schemeClr val="bg1"/>
+              </a:solidFill>
+            </a:endParaRPr>
+          </a:p>
+          <a:p>
+            <a:pPr marL="0" indent="0">
+              <a:lnSpc>
+                <a:spcPct val="90000"/>
+              </a:lnSpc>
+              <a:buNone/>
+            </a:pPr>
+            <a:endParaRPr lang="en-US" sz="900">
+              <a:solidFill>
+                <a:schemeClr val="bg1"/>
+              </a:solidFill>
+            </a:endParaRPr>
+          </a:p>
+          <a:p>
+            <a:pPr marL="0" indent="0">
+              <a:lnSpc>
+                <a:spcPct val="90000"/>
+              </a:lnSpc>
+              <a:buNone/>
+            </a:pPr>
+            <a:endParaRPr lang="en-US" sz="900">
+              <a:solidFill>
+                <a:schemeClr val="bg1"/>
+              </a:solidFill>
+            </a:endParaRPr>
+          </a:p>
+          <a:p>
+            <a:pPr marL="0" indent="0">
+              <a:lnSpc>
+                <a:spcPct val="90000"/>
+              </a:lnSpc>
+              <a:buNone/>
+            </a:pPr>
+            <a:r>
+              <a:rPr lang="en-US" sz="900">
+                <a:solidFill>
+                  <a:schemeClr val="bg1"/>
+                </a:solidFill>
+              </a:rPr>
+              <a:t>Core Assets:</a:t>
+            </a:r>
+          </a:p>
+          <a:p>
+            <a:pPr>
+              <a:lnSpc>
+                <a:spcPct val="90000"/>
+              </a:lnSpc>
+            </a:pPr>
+            <a:r>
+              <a:rPr lang="en-US" sz="900">
+                <a:solidFill>
+                  <a:schemeClr val="bg1"/>
+                </a:solidFill>
+              </a:rPr>
+              <a:t> Trained model pipeline (.joblib)</a:t>
+            </a:r>
+          </a:p>
+          <a:p>
+            <a:pPr>
+              <a:lnSpc>
+                <a:spcPct val="90000"/>
+              </a:lnSpc>
+            </a:pPr>
+            <a:r>
+              <a:rPr lang="en-US" sz="900">
+                <a:solidFill>
+                  <a:schemeClr val="bg1"/>
+                </a:solidFill>
+              </a:rPr>
+              <a:t> Feature schema (.json)</a:t>
+            </a:r>
+          </a:p>
+          <a:p>
+            <a:pPr>
+              <a:lnSpc>
+                <a:spcPct val="90000"/>
+              </a:lnSpc>
+            </a:pPr>
+            <a:r>
+              <a:rPr lang="en-US" sz="900">
+                <a:solidFill>
+                  <a:schemeClr val="bg1"/>
+                </a:solidFill>
+              </a:rPr>
+              <a:t> Model metadata</a:t>
+            </a:r>
+          </a:p>
+          <a:p>
+            <a:pPr>
+              <a:lnSpc>
+                <a:spcPct val="90000"/>
+              </a:lnSpc>
+            </a:pPr>
+            <a:r>
+              <a:rPr lang="en-US" sz="900">
+                <a:solidFill>
+                  <a:schemeClr val="bg1"/>
+                </a:solidFill>
+              </a:rPr>
+              <a:t> Sample input templates</a:t>
+            </a:r>
+          </a:p>
+          <a:p>
+            <a:pPr>
+              <a:lnSpc>
+                <a:spcPct val="90000"/>
+              </a:lnSpc>
+            </a:pPr>
+            <a:endParaRPr lang="en-US" sz="900">
+              <a:solidFill>
+                <a:schemeClr val="bg1"/>
+              </a:solidFill>
+            </a:endParaRPr>
+          </a:p>
+          <a:p>
+            <a:pPr>
+              <a:lnSpc>
+                <a:spcPct val="90000"/>
+              </a:lnSpc>
+            </a:pPr>
+            <a:r>
+              <a:rPr lang="en-US" sz="900">
+                <a:solidFill>
+                  <a:schemeClr val="bg1"/>
+                </a:solidFill>
+              </a:rPr>
+              <a:t>Ensures consistent preprocessing and reliable predictions in production.</a:t>
+            </a:r>
+          </a:p>
+        </p:txBody>
+      </p:sp>
+    </p:spTree>
+  </p:cSld>
+  <p:clrMapOvr>
+    <a:masterClrMapping/>
+  </p:clrMapOvr>
+</p:sld>
+</file>
+
+<file path=ppt/slides/slide2.xml><?xml version="1.0" encoding="utf-8"?>
+<p:sld xmlns:a="http://schemas.openxmlformats.org/drawingml/2006/main" xmlns:r="http://schemas.openxmlformats.org/officeDocument/2006/relationships" xmlns:p="http://schemas.openxmlformats.org/presentationml/2006/main">
+  <p:cSld>
+    <p:bg>
+      <p:bgPr>
+        <a:solidFill>
+          <a:schemeClr val="bg2"/>
+        </a:solidFill>
+        <a:effectLst/>
+      </p:bgPr>
+    </p:bg>
+    <p:spTree>
+      <p:nvGrpSpPr>
+        <p:cNvPr id="1" name=""/>
+        <p:cNvGrpSpPr/>
+        <p:nvPr/>
+      </p:nvGrpSpPr>
+      <p:grpSpPr>
+        <a:xfrm>
+          <a:off x="0" y="0"/>
+          <a:ext cx="0" cy="0"/>
+          <a:chOff x="0" y="0"/>
+          <a:chExt cx="0" cy="0"/>
+        </a:xfrm>
+      </p:grpSpPr>
+      <p:pic>
+        <p:nvPicPr>
+          <p:cNvPr id="6" name="Picture 5">
+            <a:extLst>
+              <a:ext uri="{FF2B5EF4-FFF2-40B4-BE49-F238E27FC236}">
+                <a16:creationId xmlns:a16="http://schemas.microsoft.com/office/drawing/2014/main" id="{FF3DE58F-69F4-EEA7-EED4-1B38A220A722}"/>
+              </a:ext>
+            </a:extLst>
+          </p:cNvPr>
+          <p:cNvPicPr>
+            <a:picLocks noChangeAspect="1"/>
+          </p:cNvPicPr>
+          <p:nvPr/>
+        </p:nvPicPr>
+        <p:blipFill>
+          <a:blip r:embed="rId2">
+            <a:duotone>
+              <a:prstClr val="black"/>
+              <a:schemeClr val="tx2">
+                <a:tint val="45000"/>
+                <a:satMod val="400000"/>
+              </a:schemeClr>
+            </a:duotone>
+            <a:alphaModFix amt="25000"/>
+          </a:blip>
+          <a:srcRect t="8883" b="4160"/>
+          <a:stretch>
+            <a:fillRect/>
+          </a:stretch>
+        </p:blipFill>
+        <p:spPr>
+          <a:xfrm>
+            <a:off x="20" y="10"/>
+            <a:ext cx="9143980" cy="6857990"/>
+          </a:xfrm>
+          <a:prstGeom prst="rect">
+            <a:avLst/>
+          </a:prstGeom>
+        </p:spPr>
+      </p:pic>
+      <p:sp>
+        <p:nvSpPr>
+          <p:cNvPr id="2" name="Title 1"/>
+          <p:cNvSpPr>
+            <a:spLocks noGrp="1"/>
+          </p:cNvSpPr>
+          <p:nvPr>
+            <p:ph type="title"/>
+          </p:nvPr>
+        </p:nvSpPr>
+        <p:spPr>
+          <a:xfrm>
+            <a:off x="628650" y="365125"/>
+            <a:ext cx="7886700" cy="1325563"/>
+          </a:xfrm>
+        </p:spPr>
+        <p:txBody>
+          <a:bodyPr>
+            <a:normAutofit/>
+          </a:bodyPr>
+          <a:lstStyle/>
+          <a:p>
+            <a:r>
+              <a:t>Project Objective</a:t>
+            </a:r>
+          </a:p>
+        </p:txBody>
+      </p:sp>
+      <p:graphicFrame>
+        <p:nvGraphicFramePr>
+          <p:cNvPr id="5" name="Content Placeholder 2">
+            <a:extLst>
+              <a:ext uri="{FF2B5EF4-FFF2-40B4-BE49-F238E27FC236}">
+                <a16:creationId xmlns:a16="http://schemas.microsoft.com/office/drawing/2014/main" id="{9E584D31-7580-846A-BF2F-464B2DFF16CB}"/>
+              </a:ext>
+            </a:extLst>
+          </p:cNvPr>
+          <p:cNvGraphicFramePr>
+            <a:graphicFrameLocks noGrp="1"/>
+          </p:cNvGraphicFramePr>
+          <p:nvPr>
+            <p:ph idx="1"/>
+            <p:extLst>
+              <p:ext uri="{D42A27DB-BD31-4B8C-83A1-F6EECF244321}">
+                <p14:modId xmlns:p14="http://schemas.microsoft.com/office/powerpoint/2010/main" val="438888448"/>
+              </p:ext>
+            </p:extLst>
+          </p:nvPr>
+        </p:nvGraphicFramePr>
+        <p:xfrm>
+          <a:off x="628650" y="1825625"/>
+          <a:ext cx="7886700" cy="4351338"/>
+        </p:xfrm>
+        <a:graphic>
+          <a:graphicData uri="http://schemas.openxmlformats.org/drawingml/2006/diagram">
+            <dgm:relIds xmlns:dgm="http://schemas.openxmlformats.org/drawingml/2006/diagram" xmlns:r="http://schemas.openxmlformats.org/officeDocument/2006/relationships" r:dm="rId3" r:lo="rId4" r:qs="rId5" r:cs="rId6"/>
+          </a:graphicData>
+        </a:graphic>
+      </p:graphicFrame>
+    </p:spTree>
+  </p:cSld>
+  <p:clrMapOvr>
+    <a:overrideClrMapping bg1="dk1" tx1="lt1" bg2="dk2" tx2="lt2" accent1="accent1" accent2="accent2" accent3="accent3" accent4="accent4" accent5="accent5" accent6="accent6" hlink="hlink" folHlink="folHlink"/>
+  </p:clrMapOvr>
+</p:sld>
+</file>
+
+<file path=ppt/slides/slide20.xml><?xml version="1.0" encoding="utf-8"?>
+<p:sld xmlns:a="http://schemas.openxmlformats.org/drawingml/2006/main" xmlns:r="http://schemas.openxmlformats.org/officeDocument/2006/relationships" xmlns:p="http://schemas.openxmlformats.org/presentationml/2006/main">
+  <p:cSld>
+    <p:bg>
+      <p:bgPr>
+        <a:solidFill>
+          <a:schemeClr val="bg1"/>
+        </a:solidFill>
+        <a:effectLst/>
+      </p:bgPr>
+    </p:bg>
+    <p:spTree>
+      <p:nvGrpSpPr>
+        <p:cNvPr id="1" name=""/>
+        <p:cNvGrpSpPr/>
+        <p:nvPr/>
+      </p:nvGrpSpPr>
+      <p:grpSpPr>
+        <a:xfrm>
+          <a:off x="0" y="0"/>
+          <a:ext cx="0" cy="0"/>
+          <a:chOff x="0" y="0"/>
+          <a:chExt cx="0" cy="0"/>
+        </a:xfrm>
+      </p:grpSpPr>
+      <p:sp useBgFill="1">
+        <p:nvSpPr>
+          <p:cNvPr id="38" name="Rectangle 37">
+            <a:extLst>
+              <a:ext uri="{FF2B5EF4-FFF2-40B4-BE49-F238E27FC236}">
+                <a16:creationId xmlns:a16="http://schemas.microsoft.com/office/drawing/2014/main" id="{889D5D69-307E-4862-950C-1A7CC8A22B4A}"/>
+              </a:ext>
+              <a:ext uri="{C183D7F6-B498-43B3-948B-1728B52AA6E4}">
+                <adec:decorative xmlns:adec="http://schemas.microsoft.com/office/drawing/2017/decorative" val="1"/>
+              </a:ext>
+            </a:extLst>
+          </p:cNvPr>
+          <p:cNvSpPr>
+            <a:spLocks noGrp="1" noRot="1" noChangeAspect="1" noMove="1" noResize="1" noEditPoints="1" noAdjustHandles="1" noChangeArrowheads="1" noChangeShapeType="1" noTextEdit="1"/>
+          </p:cNvSpPr>
+          <p:nvPr>
+            <p:extLst>
+              <p:ext uri="{386F3935-93C4-4BCD-93E2-E3B085C9AB24}">
+                <p16:designElem xmlns:p16="http://schemas.microsoft.com/office/powerpoint/2015/main" val="1"/>
+              </p:ext>
+            </p:extLst>
+          </p:nvPr>
+        </p:nvSpPr>
+        <p:spPr>
+          <a:xfrm>
+            <a:off x="0" y="0"/>
+            <a:ext cx="9144000" cy="6858000"/>
+          </a:xfrm>
+          <a:prstGeom prst="rect">
+            <a:avLst/>
+          </a:prstGeom>
+          <a:ln w="12700" cap="flat" cmpd="sng" algn="ctr">
+            <a:noFill/>
+            <a:prstDash val="solid"/>
+            <a:miter lim="800000"/>
+          </a:ln>
+          <a:effectLst/>
+          <a:extLst>
+            <a:ext uri="{91240B29-F687-4F45-9708-019B960494DF}">
+              <a14:hiddenLine xmlns:a14="http://schemas.microsoft.com/office/drawing/2010/main" w="12700" cap="flat" cmpd="sng" algn="ctr">
+                <a:solidFill>
+                  <a:schemeClr val="accent1">
+                    <a:shade val="50000"/>
+                  </a:schemeClr>
+                </a:solidFill>
+                <a:prstDash val="solid"/>
+                <a:miter lim="800000"/>
+              </a14:hiddenLine>
+            </a:ext>
+          </a:extLst>
+        </p:spPr>
+        <p:style>
+          <a:lnRef idx="2">
+            <a:schemeClr val="accent1">
+              <a:shade val="50000"/>
+            </a:schemeClr>
+          </a:lnRef>
+          <a:fillRef idx="1">
+            <a:schemeClr val="accent1"/>
+          </a:fillRef>
+          <a:effectRef idx="0">
+            <a:schemeClr val="accent1"/>
+          </a:effectRef>
+          <a:fontRef idx="minor">
+            <a:schemeClr val="lt1"/>
+          </a:fontRef>
+        </p:style>
+        <p:txBody>
+          <a:bodyPr rtlCol="0" anchor="ctr"/>
+          <a:lstStyle/>
+          <a:p>
+            <a:pPr marL="0" marR="0" lvl="0" indent="0" algn="ctr" defTabSz="457200" rtl="0" eaLnBrk="1" fontAlgn="auto" latinLnBrk="0" hangingPunct="1">
+              <a:lnSpc>
+                <a:spcPct val="100000"/>
+              </a:lnSpc>
+              <a:spcBef>
+                <a:spcPts val="0"/>
+              </a:spcBef>
+              <a:spcAft>
+                <a:spcPts val="0"/>
+              </a:spcAft>
+              <a:buClrTx/>
+              <a:buSzTx/>
+              <a:buFontTx/>
+              <a:buNone/>
+              <a:tabLst/>
+              <a:defRPr/>
+            </a:pPr>
+            <a:endParaRPr kumimoji="0" lang="en-US" sz="1800" b="0" i="0" u="none" strike="noStrike" kern="1200" cap="none" spc="0" normalizeH="0" baseline="0" noProof="0">
+              <a:ln>
+                <a:noFill/>
+              </a:ln>
+              <a:solidFill>
+                <a:prstClr val="white"/>
+              </a:solidFill>
+              <a:effectLst/>
+              <a:uLnTx/>
+              <a:uFillTx/>
+              <a:latin typeface="Calibri"/>
+              <a:ea typeface="+mn-ea"/>
+              <a:cs typeface="+mn-cs"/>
+            </a:endParaRPr>
+          </a:p>
+        </p:txBody>
+      </p:sp>
+      <p:sp>
+        <p:nvSpPr>
+          <p:cNvPr id="40" name="!!Rectangle">
+            <a:extLst>
+              <a:ext uri="{FF2B5EF4-FFF2-40B4-BE49-F238E27FC236}">
+                <a16:creationId xmlns:a16="http://schemas.microsoft.com/office/drawing/2014/main" id="{2100E061-779B-4006-BC39-114A057A7178}"/>
+              </a:ext>
+              <a:ext uri="{C183D7F6-B498-43B3-948B-1728B52AA6E4}">
+                <adec:decorative xmlns:adec="http://schemas.microsoft.com/office/drawing/2017/decorative" val="1"/>
+              </a:ext>
+            </a:extLst>
+          </p:cNvPr>
+          <p:cNvSpPr>
+            <a:spLocks noGrp="1" noRot="1" noChangeAspect="1" noMove="1" noResize="1" noEditPoints="1" noAdjustHandles="1" noChangeArrowheads="1" noChangeShapeType="1" noTextEdit="1"/>
+          </p:cNvSpPr>
+          <p:nvPr>
+            <p:extLst>
+              <p:ext uri="{386F3935-93C4-4BCD-93E2-E3B085C9AB24}">
+                <p16:designElem xmlns:p16="http://schemas.microsoft.com/office/powerpoint/2015/main" val="1"/>
+              </p:ext>
+            </p:extLst>
+          </p:nvPr>
+        </p:nvSpPr>
+        <p:spPr>
+          <a:xfrm>
+            <a:off x="0" y="0"/>
+            <a:ext cx="9144000" cy="6858000"/>
+          </a:xfrm>
+          <a:prstGeom prst="rect">
+            <a:avLst/>
+          </a:prstGeom>
+          <a:gradFill flip="none" rotWithShape="1">
+            <a:gsLst>
+              <a:gs pos="0">
+                <a:schemeClr val="accent1"/>
+              </a:gs>
+              <a:gs pos="100000">
+                <a:schemeClr val="accent2"/>
+              </a:gs>
+            </a:gsLst>
+            <a:lin ang="18900000" scaled="0"/>
+            <a:tileRect/>
+          </a:gradFill>
+          <a:ln>
+            <a:noFill/>
+          </a:ln>
+        </p:spPr>
+        <p:style>
+          <a:lnRef idx="2">
+            <a:schemeClr val="accent1">
+              <a:shade val="50000"/>
+            </a:schemeClr>
+          </a:lnRef>
+          <a:fillRef idx="1">
+            <a:schemeClr val="accent1"/>
+          </a:fillRef>
+          <a:effectRef idx="0">
+            <a:schemeClr val="accent1"/>
+          </a:effectRef>
+          <a:fontRef idx="minor">
+            <a:schemeClr val="lt1"/>
+          </a:fontRef>
+        </p:style>
+        <p:txBody>
+          <a:bodyPr rtlCol="0" anchor="ctr"/>
+          <a:lstStyle/>
+          <a:p>
+            <a:pPr marL="0" marR="0" lvl="0" indent="0" algn="ctr" defTabSz="914400" rtl="0" eaLnBrk="1" fontAlgn="auto" latinLnBrk="0" hangingPunct="1">
+              <a:lnSpc>
+                <a:spcPct val="100000"/>
+              </a:lnSpc>
+              <a:spcBef>
+                <a:spcPts val="0"/>
+              </a:spcBef>
+              <a:spcAft>
+                <a:spcPts val="0"/>
+              </a:spcAft>
+              <a:buClrTx/>
+              <a:buSzTx/>
+              <a:buFontTx/>
+              <a:buNone/>
+              <a:tabLst/>
+              <a:defRPr/>
+            </a:pPr>
+            <a:endParaRPr kumimoji="0" lang="en-US" sz="1800" b="0" i="0" u="none" strike="noStrike" kern="1200" cap="none" spc="0" normalizeH="0" baseline="0" noProof="0">
+              <a:ln>
+                <a:noFill/>
+              </a:ln>
+              <a:solidFill>
+                <a:srgbClr val="FFFFFF"/>
+              </a:solidFill>
+              <a:effectLst/>
+              <a:uLnTx/>
+              <a:uFillTx/>
+              <a:latin typeface="Calibri" panose="020F0502020204030204"/>
+              <a:ea typeface="+mn-ea"/>
+              <a:cs typeface="+mn-cs"/>
+            </a:endParaRPr>
+          </a:p>
+        </p:txBody>
+      </p:sp>
+      <p:pic>
+        <p:nvPicPr>
+          <p:cNvPr id="5" name="Picture 4">
+            <a:extLst>
+              <a:ext uri="{FF2B5EF4-FFF2-40B4-BE49-F238E27FC236}">
+                <a16:creationId xmlns:a16="http://schemas.microsoft.com/office/drawing/2014/main" id="{35DDDBF1-42EF-80B2-1300-3DD6CC04B8FF}"/>
+              </a:ext>
+            </a:extLst>
+          </p:cNvPr>
+          <p:cNvPicPr>
+            <a:picLocks noChangeAspect="1"/>
+          </p:cNvPicPr>
+          <p:nvPr/>
+        </p:nvPicPr>
+        <p:blipFill>
+          <a:blip r:embed="rId2">
+            <a:duotone>
+              <a:schemeClr val="accent1">
+                <a:shade val="45000"/>
+                <a:satMod val="135000"/>
+              </a:schemeClr>
+              <a:prstClr val="white"/>
+            </a:duotone>
+            <a:alphaModFix amt="35000"/>
+          </a:blip>
+          <a:srcRect b="2913"/>
+          <a:stretch>
+            <a:fillRect/>
+          </a:stretch>
+        </p:blipFill>
+        <p:spPr>
+          <a:xfrm>
+            <a:off x="20" y="10"/>
+            <a:ext cx="9143980" cy="6857989"/>
+          </a:xfrm>
+          <a:prstGeom prst="rect">
+            <a:avLst/>
+          </a:prstGeom>
+        </p:spPr>
+      </p:pic>
+      <p:sp>
+        <p:nvSpPr>
+          <p:cNvPr id="2" name="Title 1"/>
+          <p:cNvSpPr>
+            <a:spLocks noGrp="1"/>
+          </p:cNvSpPr>
+          <p:nvPr>
+            <p:ph type="title"/>
+          </p:nvPr>
+        </p:nvSpPr>
+        <p:spPr>
+          <a:xfrm>
+            <a:off x="628650" y="698643"/>
+            <a:ext cx="3932545" cy="5189746"/>
+          </a:xfrm>
+        </p:spPr>
+        <p:txBody>
+          <a:bodyPr anchor="t">
+            <a:normAutofit/>
+          </a:bodyPr>
+          <a:lstStyle/>
+          <a:p>
+            <a:r>
+              <a:rPr lang="en-US" sz="7000">
+                <a:solidFill>
+                  <a:srgbClr val="FFFFFF"/>
+                </a:solidFill>
+              </a:rPr>
+              <a:t>Business Value &amp; Impact</a:t>
+            </a:r>
+          </a:p>
+        </p:txBody>
+      </p:sp>
+      <p:cxnSp>
+        <p:nvCxnSpPr>
+          <p:cNvPr id="42" name="Straight Connector 41">
+            <a:extLst>
+              <a:ext uri="{FF2B5EF4-FFF2-40B4-BE49-F238E27FC236}">
+                <a16:creationId xmlns:a16="http://schemas.microsoft.com/office/drawing/2014/main" id="{C49DA8F6-BCC1-4447-B54C-57856834B94B}"/>
+              </a:ext>
+              <a:ext uri="{C183D7F6-B498-43B3-948B-1728B52AA6E4}">
+                <adec:decorative xmlns:adec="http://schemas.microsoft.com/office/drawing/2017/decorative" val="1"/>
+              </a:ext>
+            </a:extLst>
+          </p:cNvPr>
+          <p:cNvCxnSpPr>
+            <a:cxnSpLocks noGrp="1" noRot="1" noChangeAspect="1" noMove="1" noResize="1" noEditPoints="1" noAdjustHandles="1" noChangeArrowheads="1" noChangeShapeType="1"/>
+          </p:cNvCxnSpPr>
+          <p:nvPr>
+            <p:extLst>
+              <p:ext uri="{386F3935-93C4-4BCD-93E2-E3B085C9AB24}">
+                <p16:designElem xmlns:p16="http://schemas.microsoft.com/office/powerpoint/2015/main" val="1"/>
+              </p:ext>
+            </p:extLst>
+          </p:nvPr>
+        </p:nvCxnSpPr>
+        <p:spPr>
+          <a:xfrm>
+            <a:off x="467716" y="373056"/>
+            <a:ext cx="0" cy="6476066"/>
+          </a:xfrm>
+          <a:prstGeom prst="line">
+            <a:avLst/>
+          </a:prstGeom>
+          <a:ln w="25400" cap="sq">
+            <a:solidFill>
+              <a:srgbClr val="FFFFFF"/>
+            </a:solidFill>
+            <a:bevel/>
+          </a:ln>
+        </p:spPr>
+        <p:style>
+          <a:lnRef idx="1">
+            <a:schemeClr val="accent1"/>
+          </a:lnRef>
+          <a:fillRef idx="0">
+            <a:schemeClr val="accent1"/>
+          </a:fillRef>
+          <a:effectRef idx="0">
+            <a:schemeClr val="accent1"/>
+          </a:effectRef>
+          <a:fontRef idx="minor">
+            <a:schemeClr val="tx1"/>
+          </a:fontRef>
+        </p:style>
+      </p:cxnSp>
+      <p:sp>
+        <p:nvSpPr>
+          <p:cNvPr id="44" name="Graphic 11">
+            <a:extLst>
+              <a:ext uri="{FF2B5EF4-FFF2-40B4-BE49-F238E27FC236}">
+                <a16:creationId xmlns:a16="http://schemas.microsoft.com/office/drawing/2014/main" id="{6CB927A4-E432-4310-9CD5-E89FF5063179}"/>
+              </a:ext>
+              <a:ext uri="{C183D7F6-B498-43B3-948B-1728B52AA6E4}">
+                <adec:decorative xmlns:adec="http://schemas.microsoft.com/office/drawing/2017/decorative" val="1"/>
+              </a:ext>
+            </a:extLst>
+          </p:cNvPr>
+          <p:cNvSpPr>
+            <a:spLocks noGrp="1" noRot="1" noChangeAspect="1" noMove="1" noResize="1" noEditPoints="1" noAdjustHandles="1" noChangeArrowheads="1" noChangeShapeType="1" noTextEdit="1"/>
+          </p:cNvSpPr>
+          <p:nvPr>
+            <p:extLst>
+              <p:ext uri="{386F3935-93C4-4BCD-93E2-E3B085C9AB24}">
+                <p16:designElem xmlns:p16="http://schemas.microsoft.com/office/powerpoint/2015/main" val="1"/>
+              </p:ext>
+            </p:extLst>
+          </p:nvPr>
+        </p:nvSpPr>
+        <p:spPr>
+          <a:xfrm>
+            <a:off x="4594461" y="740316"/>
+            <a:ext cx="104279" cy="139039"/>
+          </a:xfrm>
+          <a:custGeom>
+            <a:avLst/>
+            <a:gdLst>
+              <a:gd name="connsiteX0" fmla="*/ 129602 w 139039"/>
+              <a:gd name="connsiteY0" fmla="*/ 60082 h 139039"/>
+              <a:gd name="connsiteX1" fmla="*/ 78957 w 139039"/>
+              <a:gd name="connsiteY1" fmla="*/ 60082 h 139039"/>
+              <a:gd name="connsiteX2" fmla="*/ 78957 w 139039"/>
+              <a:gd name="connsiteY2" fmla="*/ 9437 h 139039"/>
+              <a:gd name="connsiteX3" fmla="*/ 69520 w 139039"/>
+              <a:gd name="connsiteY3" fmla="*/ 0 h 139039"/>
+              <a:gd name="connsiteX4" fmla="*/ 60082 w 139039"/>
+              <a:gd name="connsiteY4" fmla="*/ 9437 h 139039"/>
+              <a:gd name="connsiteX5" fmla="*/ 60082 w 139039"/>
+              <a:gd name="connsiteY5" fmla="*/ 60082 h 139039"/>
+              <a:gd name="connsiteX6" fmla="*/ 9437 w 139039"/>
+              <a:gd name="connsiteY6" fmla="*/ 60082 h 139039"/>
+              <a:gd name="connsiteX7" fmla="*/ 0 w 139039"/>
+              <a:gd name="connsiteY7" fmla="*/ 69520 h 139039"/>
+              <a:gd name="connsiteX8" fmla="*/ 9437 w 139039"/>
+              <a:gd name="connsiteY8" fmla="*/ 78957 h 139039"/>
+              <a:gd name="connsiteX9" fmla="*/ 60082 w 139039"/>
+              <a:gd name="connsiteY9" fmla="*/ 78957 h 139039"/>
+              <a:gd name="connsiteX10" fmla="*/ 60082 w 139039"/>
+              <a:gd name="connsiteY10" fmla="*/ 129602 h 139039"/>
+              <a:gd name="connsiteX11" fmla="*/ 69520 w 139039"/>
+              <a:gd name="connsiteY11" fmla="*/ 139039 h 139039"/>
+              <a:gd name="connsiteX12" fmla="*/ 78957 w 139039"/>
+              <a:gd name="connsiteY12" fmla="*/ 129602 h 139039"/>
+              <a:gd name="connsiteX13" fmla="*/ 78957 w 139039"/>
+              <a:gd name="connsiteY13" fmla="*/ 78957 h 139039"/>
+              <a:gd name="connsiteX14" fmla="*/ 129602 w 139039"/>
+              <a:gd name="connsiteY14" fmla="*/ 78957 h 139039"/>
+              <a:gd name="connsiteX15" fmla="*/ 139039 w 139039"/>
+              <a:gd name="connsiteY15" fmla="*/ 69520 h 139039"/>
+              <a:gd name="connsiteX16" fmla="*/ 129602 w 139039"/>
+              <a:gd name="connsiteY16" fmla="*/ 60082 h 139039"/>
+            </a:gdLst>
+            <a:ahLst/>
+            <a:cxnLst>
+              <a:cxn ang="0">
+                <a:pos x="connsiteX0" y="connsiteY0"/>
+              </a:cxn>
+              <a:cxn ang="0">
+                <a:pos x="connsiteX1" y="connsiteY1"/>
+              </a:cxn>
+              <a:cxn ang="0">
+                <a:pos x="connsiteX2" y="connsiteY2"/>
+              </a:cxn>
+              <a:cxn ang="0">
+                <a:pos x="connsiteX3" y="connsiteY3"/>
+              </a:cxn>
+              <a:cxn ang="0">
+                <a:pos x="connsiteX4" y="connsiteY4"/>
+              </a:cxn>
+              <a:cxn ang="0">
+                <a:pos x="connsiteX5" y="connsiteY5"/>
+              </a:cxn>
+              <a:cxn ang="0">
+                <a:pos x="connsiteX6" y="connsiteY6"/>
+              </a:cxn>
+              <a:cxn ang="0">
+                <a:pos x="connsiteX7" y="connsiteY7"/>
+              </a:cxn>
+              <a:cxn ang="0">
+                <a:pos x="connsiteX8" y="connsiteY8"/>
+              </a:cxn>
+              <a:cxn ang="0">
+                <a:pos x="connsiteX9" y="connsiteY9"/>
+              </a:cxn>
+              <a:cxn ang="0">
+                <a:pos x="connsiteX10" y="connsiteY10"/>
+              </a:cxn>
+              <a:cxn ang="0">
+                <a:pos x="connsiteX11" y="connsiteY11"/>
+              </a:cxn>
+              <a:cxn ang="0">
+                <a:pos x="connsiteX12" y="connsiteY12"/>
+              </a:cxn>
+              <a:cxn ang="0">
+                <a:pos x="connsiteX13" y="connsiteY13"/>
+              </a:cxn>
+              <a:cxn ang="0">
+                <a:pos x="connsiteX14" y="connsiteY14"/>
+              </a:cxn>
+              <a:cxn ang="0">
+                <a:pos x="connsiteX15" y="connsiteY15"/>
+              </a:cxn>
+              <a:cxn ang="0">
+                <a:pos x="connsiteX16" y="connsiteY16"/>
+              </a:cxn>
+            </a:cxnLst>
+            <a:rect l="l" t="t" r="r" b="b"/>
+            <a:pathLst>
+              <a:path w="139039" h="139039">
+                <a:moveTo>
+                  <a:pt x="129602" y="60082"/>
+                </a:moveTo>
+                <a:lnTo>
+                  <a:pt x="78957" y="60082"/>
+                </a:lnTo>
+                <a:lnTo>
+                  <a:pt x="78957" y="9437"/>
+                </a:lnTo>
+                <a:cubicBezTo>
+                  <a:pt x="78957" y="4225"/>
+                  <a:pt x="74731" y="0"/>
+                  <a:pt x="69520" y="0"/>
+                </a:cubicBezTo>
+                <a:cubicBezTo>
+                  <a:pt x="64308" y="0"/>
+                  <a:pt x="60082" y="4225"/>
+                  <a:pt x="60082" y="9437"/>
+                </a:cubicBezTo>
+                <a:lnTo>
+                  <a:pt x="60082" y="60082"/>
+                </a:lnTo>
+                <a:lnTo>
+                  <a:pt x="9437" y="60082"/>
+                </a:lnTo>
+                <a:cubicBezTo>
+                  <a:pt x="4225" y="60082"/>
+                  <a:pt x="0" y="64308"/>
+                  <a:pt x="0" y="69520"/>
+                </a:cubicBezTo>
+                <a:cubicBezTo>
+                  <a:pt x="0" y="74731"/>
+                  <a:pt x="4225" y="78957"/>
+                  <a:pt x="9437" y="78957"/>
+                </a:cubicBezTo>
+                <a:lnTo>
+                  <a:pt x="60082" y="78957"/>
+                </a:lnTo>
+                <a:lnTo>
+                  <a:pt x="60082" y="129602"/>
+                </a:lnTo>
+                <a:cubicBezTo>
+                  <a:pt x="60082" y="134814"/>
+                  <a:pt x="64308" y="139039"/>
+                  <a:pt x="69520" y="139039"/>
+                </a:cubicBezTo>
+                <a:cubicBezTo>
+                  <a:pt x="74731" y="139039"/>
+                  <a:pt x="78957" y="134814"/>
+                  <a:pt x="78957" y="129602"/>
+                </a:cubicBezTo>
+                <a:lnTo>
+                  <a:pt x="78957" y="78957"/>
+                </a:lnTo>
+                <a:lnTo>
+                  <a:pt x="129602" y="78957"/>
+                </a:lnTo>
+                <a:cubicBezTo>
+                  <a:pt x="134814" y="78957"/>
+                  <a:pt x="139039" y="74731"/>
+                  <a:pt x="139039" y="69520"/>
+                </a:cubicBezTo>
+                <a:cubicBezTo>
+                  <a:pt x="139039" y="64308"/>
+                  <a:pt x="134814" y="60082"/>
+                  <a:pt x="129602" y="60082"/>
+                </a:cubicBezTo>
+                <a:close/>
+              </a:path>
+            </a:pathLst>
+          </a:custGeom>
+          <a:solidFill>
+            <a:schemeClr val="bg1"/>
+          </a:solidFill>
+          <a:ln w="603" cap="flat">
+            <a:noFill/>
+            <a:prstDash val="solid"/>
+            <a:miter/>
+          </a:ln>
+        </p:spPr>
+        <p:txBody>
+          <a:bodyPr rtlCol="0" anchor="ctr"/>
+          <a:lstStyle/>
+          <a:p>
+            <a:pPr marL="0" marR="0" lvl="0" indent="0" algn="l" defTabSz="914400" rtl="0" eaLnBrk="1" fontAlgn="auto" latinLnBrk="0" hangingPunct="1">
+              <a:lnSpc>
+                <a:spcPct val="100000"/>
+              </a:lnSpc>
+              <a:spcBef>
+                <a:spcPts val="0"/>
+              </a:spcBef>
+              <a:spcAft>
+                <a:spcPts val="0"/>
+              </a:spcAft>
+              <a:buClrTx/>
+              <a:buSzTx/>
+              <a:buFontTx/>
+              <a:buNone/>
+              <a:tabLst/>
+              <a:defRPr/>
+            </a:pPr>
+            <a:endParaRPr kumimoji="0" lang="en-US" sz="1800" b="0" i="0" u="none" strike="noStrike" kern="1200" cap="none" spc="0" normalizeH="0" baseline="0" noProof="0">
+              <a:ln>
+                <a:noFill/>
+              </a:ln>
+              <a:solidFill>
+                <a:prstClr val="black"/>
+              </a:solidFill>
+              <a:effectLst/>
+              <a:uLnTx/>
+              <a:uFillTx/>
+              <a:latin typeface="Calibri" panose="020F0502020204030204"/>
+              <a:ea typeface="+mn-ea"/>
+              <a:cs typeface="+mn-cs"/>
+            </a:endParaRPr>
+          </a:p>
+        </p:txBody>
+      </p:sp>
+      <p:sp>
+        <p:nvSpPr>
+          <p:cNvPr id="46" name="Graphic 10">
+            <a:extLst>
+              <a:ext uri="{FF2B5EF4-FFF2-40B4-BE49-F238E27FC236}">
+                <a16:creationId xmlns:a16="http://schemas.microsoft.com/office/drawing/2014/main" id="{E3020543-B24B-4EC4-8FFC-8DD88EEA91A8}"/>
+              </a:ext>
+              <a:ext uri="{C183D7F6-B498-43B3-948B-1728B52AA6E4}">
+                <adec:decorative xmlns:adec="http://schemas.microsoft.com/office/drawing/2017/decorative" val="1"/>
+              </a:ext>
+            </a:extLst>
+          </p:cNvPr>
+          <p:cNvSpPr>
+            <a:spLocks noGrp="1" noRot="1" noChangeAspect="1" noMove="1" noResize="1" noEditPoints="1" noAdjustHandles="1" noChangeArrowheads="1" noChangeShapeType="1" noTextEdit="1"/>
+          </p:cNvSpPr>
+          <p:nvPr>
+            <p:extLst>
+              <p:ext uri="{386F3935-93C4-4BCD-93E2-E3B085C9AB24}">
+                <p16:designElem xmlns:p16="http://schemas.microsoft.com/office/powerpoint/2015/main" val="1"/>
+              </p:ext>
+            </p:extLst>
+          </p:nvPr>
+        </p:nvSpPr>
+        <p:spPr>
+          <a:xfrm>
+            <a:off x="4863546" y="969611"/>
+            <a:ext cx="68353" cy="91138"/>
+          </a:xfrm>
+          <a:custGeom>
+            <a:avLst/>
+            <a:gdLst>
+              <a:gd name="connsiteX0" fmla="*/ 91138 w 91138"/>
+              <a:gd name="connsiteY0" fmla="*/ 45569 h 91138"/>
+              <a:gd name="connsiteX1" fmla="*/ 45569 w 91138"/>
+              <a:gd name="connsiteY1" fmla="*/ 91138 h 91138"/>
+              <a:gd name="connsiteX2" fmla="*/ 0 w 91138"/>
+              <a:gd name="connsiteY2" fmla="*/ 45569 h 91138"/>
+              <a:gd name="connsiteX3" fmla="*/ 45569 w 91138"/>
+              <a:gd name="connsiteY3" fmla="*/ 0 h 91138"/>
+              <a:gd name="connsiteX4" fmla="*/ 91138 w 91138"/>
+              <a:gd name="connsiteY4" fmla="*/ 45569 h 91138"/>
+            </a:gdLst>
+            <a:ahLst/>
+            <a:cxnLst>
+              <a:cxn ang="0">
+                <a:pos x="connsiteX0" y="connsiteY0"/>
+              </a:cxn>
+              <a:cxn ang="0">
+                <a:pos x="connsiteX1" y="connsiteY1"/>
+              </a:cxn>
+              <a:cxn ang="0">
+                <a:pos x="connsiteX2" y="connsiteY2"/>
+              </a:cxn>
+              <a:cxn ang="0">
+                <a:pos x="connsiteX3" y="connsiteY3"/>
+              </a:cxn>
+              <a:cxn ang="0">
+                <a:pos x="connsiteX4" y="connsiteY4"/>
+              </a:cxn>
+            </a:cxnLst>
+            <a:rect l="l" t="t" r="r" b="b"/>
+            <a:pathLst>
+              <a:path w="91138" h="91138">
+                <a:moveTo>
+                  <a:pt x="91138" y="45569"/>
+                </a:moveTo>
+                <a:cubicBezTo>
+                  <a:pt x="91138" y="70736"/>
+                  <a:pt x="70736" y="91138"/>
+                  <a:pt x="45569" y="91138"/>
+                </a:cubicBezTo>
+                <a:cubicBezTo>
+                  <a:pt x="20402" y="91138"/>
+                  <a:pt x="0" y="70736"/>
+                  <a:pt x="0" y="45569"/>
+                </a:cubicBezTo>
+                <a:cubicBezTo>
+                  <a:pt x="0" y="20402"/>
+                  <a:pt x="20402" y="0"/>
+                  <a:pt x="45569" y="0"/>
+                </a:cubicBezTo>
+                <a:cubicBezTo>
+                  <a:pt x="70736" y="0"/>
+                  <a:pt x="91138" y="20402"/>
+                  <a:pt x="91138" y="45569"/>
+                </a:cubicBezTo>
+                <a:close/>
+              </a:path>
+            </a:pathLst>
+          </a:custGeom>
+          <a:solidFill>
+            <a:schemeClr val="bg1"/>
+          </a:solidFill>
+          <a:ln w="422" cap="flat">
+            <a:noFill/>
+            <a:prstDash val="solid"/>
+            <a:miter/>
+          </a:ln>
+        </p:spPr>
+        <p:txBody>
+          <a:bodyPr rtlCol="0" anchor="ctr"/>
+          <a:lstStyle/>
+          <a:p>
+            <a:pPr marL="0" marR="0" lvl="0" indent="0" algn="l" defTabSz="914400" rtl="0" eaLnBrk="1" fontAlgn="auto" latinLnBrk="0" hangingPunct="1">
+              <a:lnSpc>
+                <a:spcPct val="100000"/>
+              </a:lnSpc>
+              <a:spcBef>
+                <a:spcPts val="0"/>
+              </a:spcBef>
+              <a:spcAft>
+                <a:spcPts val="0"/>
+              </a:spcAft>
+              <a:buClrTx/>
+              <a:buSzTx/>
+              <a:buFontTx/>
+              <a:buNone/>
+              <a:tabLst/>
+              <a:defRPr/>
+            </a:pPr>
+            <a:endParaRPr kumimoji="0" lang="en-US" sz="1800" b="0" i="0" u="none" strike="noStrike" kern="1200" cap="none" spc="0" normalizeH="0" baseline="0" noProof="0">
+              <a:ln>
+                <a:noFill/>
+              </a:ln>
+              <a:solidFill>
+                <a:prstClr val="black"/>
+              </a:solidFill>
+              <a:effectLst/>
+              <a:uLnTx/>
+              <a:uFillTx/>
+              <a:latin typeface="Calibri" panose="020F0502020204030204"/>
+              <a:ea typeface="+mn-ea"/>
+              <a:cs typeface="+mn-cs"/>
+            </a:endParaRPr>
+          </a:p>
+        </p:txBody>
+      </p:sp>
+      <p:sp>
+        <p:nvSpPr>
+          <p:cNvPr id="48" name="Graphic 12">
+            <a:extLst>
+              <a:ext uri="{FF2B5EF4-FFF2-40B4-BE49-F238E27FC236}">
+                <a16:creationId xmlns:a16="http://schemas.microsoft.com/office/drawing/2014/main" id="{1453BF6C-B012-48B7-B4E8-6D7AC7C27D02}"/>
+              </a:ext>
+              <a:ext uri="{C183D7F6-B498-43B3-948B-1728B52AA6E4}">
+                <adec:decorative xmlns:adec="http://schemas.microsoft.com/office/drawing/2017/decorative" val="1"/>
+              </a:ext>
+            </a:extLst>
+          </p:cNvPr>
+          <p:cNvSpPr>
+            <a:spLocks noGrp="1" noRot="1" noChangeAspect="1" noMove="1" noResize="1" noEditPoints="1" noAdjustHandles="1" noChangeArrowheads="1" noChangeShapeType="1" noTextEdit="1"/>
+          </p:cNvSpPr>
+          <p:nvPr>
+            <p:extLst>
+              <p:ext uri="{386F3935-93C4-4BCD-93E2-E3B085C9AB24}">
+                <p16:designElem xmlns:p16="http://schemas.microsoft.com/office/powerpoint/2015/main" val="1"/>
+              </p:ext>
+            </p:extLst>
+          </p:nvPr>
+        </p:nvSpPr>
+        <p:spPr>
+          <a:xfrm>
+            <a:off x="4582806" y="1484755"/>
+            <a:ext cx="95785" cy="127714"/>
+          </a:xfrm>
+          <a:custGeom>
+            <a:avLst/>
+            <a:gdLst>
+              <a:gd name="connsiteX0" fmla="*/ 63857 w 127714"/>
+              <a:gd name="connsiteY0" fmla="*/ 18874 h 127714"/>
+              <a:gd name="connsiteX1" fmla="*/ 108840 w 127714"/>
+              <a:gd name="connsiteY1" fmla="*/ 63857 h 127714"/>
+              <a:gd name="connsiteX2" fmla="*/ 63857 w 127714"/>
+              <a:gd name="connsiteY2" fmla="*/ 108840 h 127714"/>
+              <a:gd name="connsiteX3" fmla="*/ 18874 w 127714"/>
+              <a:gd name="connsiteY3" fmla="*/ 63857 h 127714"/>
+              <a:gd name="connsiteX4" fmla="*/ 63857 w 127714"/>
+              <a:gd name="connsiteY4" fmla="*/ 18874 h 127714"/>
+              <a:gd name="connsiteX5" fmla="*/ 63857 w 127714"/>
+              <a:gd name="connsiteY5" fmla="*/ 0 h 127714"/>
+              <a:gd name="connsiteX6" fmla="*/ 0 w 127714"/>
+              <a:gd name="connsiteY6" fmla="*/ 63857 h 127714"/>
+              <a:gd name="connsiteX7" fmla="*/ 63857 w 127714"/>
+              <a:gd name="connsiteY7" fmla="*/ 127714 h 127714"/>
+              <a:gd name="connsiteX8" fmla="*/ 127714 w 127714"/>
+              <a:gd name="connsiteY8" fmla="*/ 63857 h 127714"/>
+              <a:gd name="connsiteX9" fmla="*/ 63857 w 127714"/>
+              <a:gd name="connsiteY9" fmla="*/ 0 h 127714"/>
+            </a:gdLst>
+            <a:ahLst/>
+            <a:cxnLst>
+              <a:cxn ang="0">
+                <a:pos x="connsiteX0" y="connsiteY0"/>
+              </a:cxn>
+              <a:cxn ang="0">
+                <a:pos x="connsiteX1" y="connsiteY1"/>
+              </a:cxn>
+              <a:cxn ang="0">
+                <a:pos x="connsiteX2" y="connsiteY2"/>
+              </a:cxn>
+              <a:cxn ang="0">
+                <a:pos x="connsiteX3" y="connsiteY3"/>
+              </a:cxn>
+              <a:cxn ang="0">
+                <a:pos x="connsiteX4" y="connsiteY4"/>
+              </a:cxn>
+              <a:cxn ang="0">
+                <a:pos x="connsiteX5" y="connsiteY5"/>
+              </a:cxn>
+              <a:cxn ang="0">
+                <a:pos x="connsiteX6" y="connsiteY6"/>
+              </a:cxn>
+              <a:cxn ang="0">
+                <a:pos x="connsiteX7" y="connsiteY7"/>
+              </a:cxn>
+              <a:cxn ang="0">
+                <a:pos x="connsiteX8" y="connsiteY8"/>
+              </a:cxn>
+              <a:cxn ang="0">
+                <a:pos x="connsiteX9" y="connsiteY9"/>
+              </a:cxn>
+            </a:cxnLst>
+            <a:rect l="l" t="t" r="r" b="b"/>
+            <a:pathLst>
+              <a:path w="127714" h="127714">
+                <a:moveTo>
+                  <a:pt x="63857" y="18874"/>
+                </a:moveTo>
+                <a:cubicBezTo>
+                  <a:pt x="88700" y="18874"/>
+                  <a:pt x="108840" y="39014"/>
+                  <a:pt x="108840" y="63857"/>
+                </a:cubicBezTo>
+                <a:cubicBezTo>
+                  <a:pt x="108840" y="88700"/>
+                  <a:pt x="88700" y="108840"/>
+                  <a:pt x="63857" y="108840"/>
+                </a:cubicBezTo>
+                <a:cubicBezTo>
+                  <a:pt x="39014" y="108840"/>
+                  <a:pt x="18874" y="88700"/>
+                  <a:pt x="18874" y="63857"/>
+                </a:cubicBezTo>
+                <a:cubicBezTo>
+                  <a:pt x="18898" y="39024"/>
+                  <a:pt x="39024" y="18898"/>
+                  <a:pt x="63857" y="18874"/>
+                </a:cubicBezTo>
+                <a:moveTo>
+                  <a:pt x="63857" y="0"/>
+                </a:moveTo>
+                <a:cubicBezTo>
+                  <a:pt x="28590" y="0"/>
+                  <a:pt x="0" y="28590"/>
+                  <a:pt x="0" y="63857"/>
+                </a:cubicBezTo>
+                <a:cubicBezTo>
+                  <a:pt x="0" y="99124"/>
+                  <a:pt x="28590" y="127714"/>
+                  <a:pt x="63857" y="127714"/>
+                </a:cubicBezTo>
+                <a:cubicBezTo>
+                  <a:pt x="99124" y="127714"/>
+                  <a:pt x="127714" y="99124"/>
+                  <a:pt x="127714" y="63857"/>
+                </a:cubicBezTo>
+                <a:cubicBezTo>
+                  <a:pt x="127714" y="28590"/>
+                  <a:pt x="99124" y="0"/>
+                  <a:pt x="63857" y="0"/>
+                </a:cubicBezTo>
+                <a:close/>
+              </a:path>
+            </a:pathLst>
+          </a:custGeom>
+          <a:solidFill>
+            <a:schemeClr val="bg1"/>
+          </a:solidFill>
+          <a:ln w="610" cap="flat">
+            <a:noFill/>
+            <a:prstDash val="solid"/>
+            <a:miter/>
+          </a:ln>
+        </p:spPr>
+        <p:txBody>
+          <a:bodyPr rtlCol="0" anchor="ctr"/>
+          <a:lstStyle/>
+          <a:p>
+            <a:pPr marL="0" marR="0" lvl="0" indent="0" algn="l" defTabSz="914400" rtl="0" eaLnBrk="1" fontAlgn="auto" latinLnBrk="0" hangingPunct="1">
+              <a:lnSpc>
+                <a:spcPct val="100000"/>
+              </a:lnSpc>
+              <a:spcBef>
+                <a:spcPts val="0"/>
+              </a:spcBef>
+              <a:spcAft>
+                <a:spcPts val="0"/>
+              </a:spcAft>
+              <a:buClrTx/>
+              <a:buSzTx/>
+              <a:buFontTx/>
+              <a:buNone/>
+              <a:tabLst/>
+              <a:defRPr/>
+            </a:pPr>
+            <a:endParaRPr kumimoji="0" lang="en-US" sz="1800" b="0" i="0" u="none" strike="noStrike" kern="1200" cap="none" spc="0" normalizeH="0" baseline="0" noProof="0">
+              <a:ln>
+                <a:noFill/>
+              </a:ln>
+              <a:solidFill>
+                <a:prstClr val="black"/>
+              </a:solidFill>
+              <a:effectLst/>
+              <a:uLnTx/>
+              <a:uFillTx/>
+              <a:latin typeface="Calibri" panose="020F0502020204030204"/>
+              <a:ea typeface="+mn-ea"/>
+              <a:cs typeface="+mn-cs"/>
+            </a:endParaRPr>
+          </a:p>
+        </p:txBody>
+      </p:sp>
+      <p:sp>
+        <p:nvSpPr>
+          <p:cNvPr id="3" name="Content Placeholder 2"/>
+          <p:cNvSpPr>
+            <a:spLocks noGrp="1"/>
+          </p:cNvSpPr>
+          <p:nvPr>
+            <p:ph idx="1"/>
+          </p:nvPr>
+        </p:nvSpPr>
+        <p:spPr>
+          <a:xfrm>
+            <a:off x="5421781" y="698643"/>
+            <a:ext cx="3093569" cy="5301467"/>
+          </a:xfrm>
+        </p:spPr>
+        <p:txBody>
+          <a:bodyPr anchor="b">
+            <a:normAutofit/>
+          </a:bodyPr>
+          <a:lstStyle/>
+          <a:p>
+            <a:pPr marL="0" indent="0">
+              <a:lnSpc>
+                <a:spcPct val="90000"/>
+              </a:lnSpc>
+              <a:buNone/>
+            </a:pPr>
+            <a:r>
+              <a:rPr lang="en-US" sz="1700" dirty="0">
+                <a:solidFill>
+                  <a:srgbClr val="FFFFFF"/>
+                </a:solidFill>
+              </a:rPr>
+              <a:t>Risk Classification:</a:t>
+            </a:r>
+          </a:p>
+          <a:p>
+            <a:pPr>
+              <a:lnSpc>
+                <a:spcPct val="90000"/>
+              </a:lnSpc>
+            </a:pPr>
+            <a:r>
+              <a:rPr lang="en-US" sz="1700" dirty="0">
+                <a:solidFill>
+                  <a:srgbClr val="FFFFFF"/>
+                </a:solidFill>
+              </a:rPr>
+              <a:t> Low Risk: &lt;40%</a:t>
+            </a:r>
+          </a:p>
+          <a:p>
+            <a:pPr>
+              <a:lnSpc>
+                <a:spcPct val="90000"/>
+              </a:lnSpc>
+            </a:pPr>
+            <a:r>
+              <a:rPr lang="en-US" sz="1700" dirty="0">
+                <a:solidFill>
+                  <a:srgbClr val="FFFFFF"/>
+                </a:solidFill>
+              </a:rPr>
+              <a:t> Medium Risk: 40–70%</a:t>
+            </a:r>
+          </a:p>
+          <a:p>
+            <a:pPr>
+              <a:lnSpc>
+                <a:spcPct val="90000"/>
+              </a:lnSpc>
+            </a:pPr>
+            <a:r>
+              <a:rPr lang="en-US" sz="1700" dirty="0">
+                <a:solidFill>
+                  <a:srgbClr val="FFFFFF"/>
+                </a:solidFill>
+              </a:rPr>
+              <a:t> High Risk: &gt;70%</a:t>
+            </a:r>
+          </a:p>
+          <a:p>
+            <a:pPr>
+              <a:lnSpc>
+                <a:spcPct val="90000"/>
+              </a:lnSpc>
+            </a:pPr>
+            <a:endParaRPr lang="en-US" sz="1700" dirty="0">
+              <a:solidFill>
+                <a:srgbClr val="FFFFFF"/>
+              </a:solidFill>
+            </a:endParaRPr>
+          </a:p>
+          <a:p>
+            <a:pPr marL="0" indent="0">
+              <a:lnSpc>
+                <a:spcPct val="90000"/>
+              </a:lnSpc>
+              <a:buNone/>
+            </a:pPr>
+            <a:r>
+              <a:rPr lang="en-US" sz="1700" dirty="0">
+                <a:solidFill>
+                  <a:srgbClr val="FFFFFF"/>
+                </a:solidFill>
+              </a:rPr>
+              <a:t>Business Benefits:</a:t>
+            </a:r>
+          </a:p>
+          <a:p>
+            <a:pPr>
+              <a:lnSpc>
+                <a:spcPct val="90000"/>
+              </a:lnSpc>
+            </a:pPr>
+            <a:r>
+              <a:rPr lang="en-US" sz="1700" dirty="0">
+                <a:solidFill>
+                  <a:srgbClr val="FFFFFF"/>
+                </a:solidFill>
+              </a:rPr>
+              <a:t>Accessible predictions for stakeholders</a:t>
+            </a:r>
+          </a:p>
+          <a:p>
+            <a:pPr>
+              <a:lnSpc>
+                <a:spcPct val="90000"/>
+              </a:lnSpc>
+            </a:pPr>
+            <a:r>
+              <a:rPr lang="en-US" sz="1700" dirty="0">
+                <a:solidFill>
+                  <a:srgbClr val="FFFFFF"/>
+                </a:solidFill>
+              </a:rPr>
+              <a:t>Supports targeted financial inclusion programs</a:t>
+            </a:r>
+          </a:p>
+          <a:p>
+            <a:pPr>
+              <a:lnSpc>
+                <a:spcPct val="90000"/>
+              </a:lnSpc>
+            </a:pPr>
+            <a:r>
+              <a:rPr lang="en-US" sz="1700" dirty="0">
+                <a:solidFill>
+                  <a:srgbClr val="FFFFFF"/>
+                </a:solidFill>
+              </a:rPr>
+              <a:t>Enables future dashboard and API integration</a:t>
+            </a:r>
+          </a:p>
+          <a:p>
+            <a:pPr>
+              <a:lnSpc>
+                <a:spcPct val="90000"/>
+              </a:lnSpc>
+            </a:pPr>
+            <a:r>
+              <a:rPr lang="en-US" sz="1700" dirty="0">
+                <a:solidFill>
+                  <a:srgbClr val="FFFFFF"/>
+                </a:solidFill>
+              </a:rPr>
+              <a:t>Demonstrates production-ready deployment</a:t>
+            </a:r>
+          </a:p>
+          <a:p>
+            <a:pPr>
+              <a:lnSpc>
+                <a:spcPct val="90000"/>
+              </a:lnSpc>
+            </a:pPr>
+            <a:endParaRPr lang="en-US" sz="1700" dirty="0">
+              <a:solidFill>
+                <a:srgbClr val="FFFFFF"/>
+              </a:solidFill>
+            </a:endParaRPr>
+          </a:p>
+          <a:p>
+            <a:pPr>
+              <a:lnSpc>
+                <a:spcPct val="90000"/>
+              </a:lnSpc>
+            </a:pPr>
+            <a:r>
+              <a:rPr lang="en-US" sz="1700" dirty="0">
+                <a:solidFill>
+                  <a:srgbClr val="FFFFFF"/>
+                </a:solidFill>
+              </a:rPr>
+              <a:t>Takeaway: Deployment turns model outputs into actionable insights.</a:t>
+            </a:r>
+          </a:p>
+        </p:txBody>
+      </p:sp>
+    </p:spTree>
+  </p:cSld>
+  <p:clrMapOvr>
+    <a:masterClrMapping/>
+  </p:clrMapOvr>
+</p:sld>
+</file>
+
+<file path=ppt/slides/slide21.xml><?xml version="1.0" encoding="utf-8"?>
+<p:sld xmlns:a="http://schemas.openxmlformats.org/drawingml/2006/main" xmlns:r="http://schemas.openxmlformats.org/officeDocument/2006/relationships" xmlns:p="http://schemas.openxmlformats.org/presentationml/2006/main">
+  <p:cSld>
+    <p:bg>
+      <p:bgPr>
+        <a:solidFill>
+          <a:schemeClr val="bg1"/>
+        </a:solidFill>
+        <a:effectLst/>
+      </p:bgPr>
+    </p:bg>
+    <p:spTree>
+      <p:nvGrpSpPr>
+        <p:cNvPr id="1" name=""/>
+        <p:cNvGrpSpPr/>
+        <p:nvPr/>
+      </p:nvGrpSpPr>
+      <p:grpSpPr>
+        <a:xfrm>
+          <a:off x="0" y="0"/>
+          <a:ext cx="0" cy="0"/>
+          <a:chOff x="0" y="0"/>
+          <a:chExt cx="0" cy="0"/>
+        </a:xfrm>
+      </p:grpSpPr>
       <p:sp useBgFill="1">
         <p:nvSpPr>
           <p:cNvPr id="9" name="Slide Background">
@@ -21373,17 +28131,9 @@
 </p:sld>
 </file>
 
-<file path=ppt/slides/slide2.xml><?xml version="1.0" encoding="utf-8"?>
+<file path=ppt/slides/slide22.xml><?xml version="1.0" encoding="utf-8"?>
 <p:sld xmlns:a="http://schemas.openxmlformats.org/drawingml/2006/main" xmlns:r="http://schemas.openxmlformats.org/officeDocument/2006/relationships" xmlns:p="http://schemas.openxmlformats.org/presentationml/2006/main">
   <p:cSld>
-    <p:bg>
-      <p:bgPr>
-        <a:solidFill>
-          <a:schemeClr val="bg2"/>
-        </a:solidFill>
-        <a:effectLst/>
-      </p:bgPr>
-    </p:bg>
     <p:spTree>
       <p:nvGrpSpPr>
         <p:cNvPr id="1" name=""/>
@@ -21398,46 +28148,6 @@
           <a:chExt cx="0" cy="0"/>
         </a:xfrm>
       </p:grpSpPr>
-      <p:pic>
-        <p:nvPicPr>
-          <p:cNvPr id="6" name="Picture 5">
-            <a:extLst>
-              <a:ext uri="{FF2B5EF4-FFF2-40B4-BE49-F238E27FC236}">
-                <a16:creationId xmlns:a16="http://schemas.microsoft.com/office/drawing/2014/main" id="{FF3DE58F-69F4-EEA7-EED4-1B38A220A722}"/>
-              </a:ext>
-            </a:extLst>
-          </p:cNvPr>
-          <p:cNvPicPr>
-            <a:picLocks noChangeAspect="1"/>
-          </p:cNvPicPr>
-          <p:nvPr/>
-        </p:nvPicPr>
-        <p:blipFill>
-          <a:blip r:embed="rId2">
-            <a:duotone>
-              <a:prstClr val="black"/>
-              <a:schemeClr val="tx2">
-                <a:tint val="45000"/>
-                <a:satMod val="400000"/>
-              </a:schemeClr>
-            </a:duotone>
-            <a:alphaModFix amt="25000"/>
-          </a:blip>
-          <a:srcRect t="8883" b="4160"/>
-          <a:stretch>
-            <a:fillRect/>
-          </a:stretch>
-        </p:blipFill>
-        <p:spPr>
-          <a:xfrm>
-            <a:off x="20" y="10"/>
-            <a:ext cx="9143980" cy="6857990"/>
-          </a:xfrm>
-          <a:prstGeom prst="rect">
-            <a:avLst/>
-          </a:prstGeom>
-        </p:spPr>
-      </p:pic>
       <p:sp>
         <p:nvSpPr>
           <p:cNvPr id="2" name="Title 1"/>
@@ -21450,57 +28160,271 @@
         </p:nvSpPr>
         <p:spPr>
           <a:xfrm>
-            <a:off x="628650" y="365125"/>
-            <a:ext cx="7886700" cy="1325563"/>
+            <a:off x="3348972" y="647700"/>
+            <a:ext cx="2444610" cy="5557838"/>
           </a:xfrm>
         </p:spPr>
         <p:txBody>
-          <a:bodyPr>
+          <a:bodyPr anchor="ctr">
             <a:normAutofit/>
           </a:bodyPr>
           <a:lstStyle/>
           <a:p>
             <a:r>
-              <a:t>Project Objective</a:t>
+              <a:rPr lang="en-US" sz="3100" b="1"/>
+              <a:t>Kenya Financial Inclusion Risk Prediction</a:t>
+            </a:r>
+            <a:br>
+              <a:rPr lang="en-US" sz="3100" b="1"/>
+            </a:br>
+            <a:endParaRPr lang="en-US" sz="3100"/>
+          </a:p>
+        </p:txBody>
+      </p:sp>
+      <p:pic>
+        <p:nvPicPr>
+          <p:cNvPr id="5" name="Picture 4" descr="Desk with productivity items">
+            <a:extLst>
+              <a:ext uri="{FF2B5EF4-FFF2-40B4-BE49-F238E27FC236}">
+                <a16:creationId xmlns:a16="http://schemas.microsoft.com/office/drawing/2014/main" id="{EF93C25D-7207-6977-E523-271CB09FF1AB}"/>
+              </a:ext>
+            </a:extLst>
+          </p:cNvPr>
+          <p:cNvPicPr>
+            <a:picLocks noChangeAspect="1"/>
+          </p:cNvPicPr>
+          <p:nvPr/>
+        </p:nvPicPr>
+        <p:blipFill>
+          <a:blip r:embed="rId2"/>
+          <a:srcRect l="42499" r="27247" b="-2"/>
+          <a:stretch>
+            <a:fillRect/>
+          </a:stretch>
+        </p:blipFill>
+        <p:spPr>
+          <a:xfrm>
+            <a:off x="20" y="-1"/>
+            <a:ext cx="3107653" cy="6856413"/>
+          </a:xfrm>
+          <a:custGeom>
+            <a:avLst/>
+            <a:gdLst/>
+            <a:ahLst/>
+            <a:cxnLst/>
+            <a:rect l="l" t="t" r="r" b="b"/>
+            <a:pathLst>
+              <a:path w="4143564" h="6856413">
+                <a:moveTo>
+                  <a:pt x="0" y="0"/>
+                </a:moveTo>
+                <a:lnTo>
+                  <a:pt x="4141667" y="0"/>
+                </a:lnTo>
+                <a:lnTo>
+                  <a:pt x="4141086" y="145208"/>
+                </a:lnTo>
+                <a:cubicBezTo>
+                  <a:pt x="4109790" y="1611281"/>
+                  <a:pt x="3796834" y="3077353"/>
+                  <a:pt x="4047199" y="4543426"/>
+                </a:cubicBezTo>
+                <a:cubicBezTo>
+                  <a:pt x="4172382" y="5276463"/>
+                  <a:pt x="4156734" y="6009499"/>
+                  <a:pt x="4105878" y="6742536"/>
+                </a:cubicBezTo>
+                <a:lnTo>
+                  <a:pt x="4096763" y="6856413"/>
+                </a:lnTo>
+                <a:lnTo>
+                  <a:pt x="0" y="6856413"/>
+                </a:lnTo>
+                <a:close/>
+              </a:path>
+            </a:pathLst>
+          </a:custGeom>
+        </p:spPr>
+      </p:pic>
+      <p:sp>
+        <p:nvSpPr>
+          <p:cNvPr id="3" name="Content Placeholder 2"/>
+          <p:cNvSpPr>
+            <a:spLocks noGrp="1"/>
+          </p:cNvSpPr>
+          <p:nvPr>
+            <p:ph idx="1"/>
+          </p:nvPr>
+        </p:nvSpPr>
+        <p:spPr>
+          <a:xfrm>
+            <a:off x="6034881" y="647700"/>
+            <a:ext cx="2747169" cy="5557838"/>
+          </a:xfrm>
+        </p:spPr>
+        <p:txBody>
+          <a:bodyPr anchor="ctr">
+            <a:normAutofit/>
+          </a:bodyPr>
+          <a:lstStyle/>
+          <a:p>
+            <a:pPr>
+              <a:lnSpc>
+                <a:spcPct val="90000"/>
+              </a:lnSpc>
+            </a:pPr>
+            <a:r>
+              <a:rPr lang="en-US" sz="1200" dirty="0"/>
+              <a:t>Key Contributions</a:t>
+            </a:r>
+          </a:p>
+          <a:p>
+            <a:pPr>
+              <a:lnSpc>
+                <a:spcPct val="90000"/>
+              </a:lnSpc>
+              <a:buFont typeface="Courier New" panose="02070309020205020404" pitchFamily="49" charset="0"/>
+              <a:buChar char="o"/>
+            </a:pPr>
+            <a:r>
+              <a:rPr lang="en-US" sz="1200" dirty="0"/>
+              <a:t>Defined a data-driven approach to identify individuals at risk of financial exclusion in Kenya</a:t>
+            </a:r>
+          </a:p>
+          <a:p>
+            <a:pPr>
+              <a:lnSpc>
+                <a:spcPct val="90000"/>
+              </a:lnSpc>
+              <a:buFont typeface="Courier New" panose="02070309020205020404" pitchFamily="49" charset="0"/>
+              <a:buChar char="o"/>
+            </a:pPr>
+            <a:r>
+              <a:rPr lang="en-US" sz="1200" dirty="0"/>
+              <a:t>Cleaned, prepared and explored FinAccess data to uncover key patterns</a:t>
+            </a:r>
+          </a:p>
+          <a:p>
+            <a:pPr>
+              <a:lnSpc>
+                <a:spcPct val="90000"/>
+              </a:lnSpc>
+              <a:buFont typeface="Courier New" panose="02070309020205020404" pitchFamily="49" charset="0"/>
+              <a:buChar char="o"/>
+            </a:pPr>
+            <a:r>
+              <a:rPr lang="en-US" sz="1200" dirty="0"/>
+              <a:t>Built and compared multiple machine learning models to predict exclusion risk</a:t>
+            </a:r>
+          </a:p>
+          <a:p>
+            <a:pPr>
+              <a:lnSpc>
+                <a:spcPct val="90000"/>
+              </a:lnSpc>
+              <a:buFont typeface="Courier New" panose="02070309020205020404" pitchFamily="49" charset="0"/>
+              <a:buChar char="o"/>
+            </a:pPr>
+            <a:r>
+              <a:rPr lang="en-US" sz="1200" dirty="0"/>
+              <a:t>Applied SHAP, Mutual Information and Permutation Importance to explain predictions</a:t>
+            </a:r>
+          </a:p>
+          <a:p>
+            <a:pPr>
+              <a:lnSpc>
+                <a:spcPct val="90000"/>
+              </a:lnSpc>
+              <a:buFont typeface="Courier New" panose="02070309020205020404" pitchFamily="49" charset="0"/>
+              <a:buChar char="o"/>
+            </a:pPr>
+            <a:r>
+              <a:rPr lang="en-US" sz="1200" dirty="0"/>
+              <a:t>Generated actionable recommendations for policymakers and financial institutions</a:t>
+            </a:r>
+          </a:p>
+          <a:p>
+            <a:pPr>
+              <a:lnSpc>
+                <a:spcPct val="90000"/>
+              </a:lnSpc>
+              <a:buFont typeface="Courier New" panose="02070309020205020404" pitchFamily="49" charset="0"/>
+              <a:buChar char="o"/>
+            </a:pPr>
+            <a:r>
+              <a:rPr lang="en-US" sz="1200" dirty="0"/>
+              <a:t> Deployed a production-ready prediction system for decision support</a:t>
+            </a:r>
+          </a:p>
+          <a:p>
+            <a:pPr>
+              <a:lnSpc>
+                <a:spcPct val="90000"/>
+              </a:lnSpc>
+              <a:buFont typeface="Courier New" panose="02070309020205020404" pitchFamily="49" charset="0"/>
+              <a:buChar char="o"/>
+            </a:pPr>
+            <a:endParaRPr lang="en-US" sz="1200" dirty="0"/>
+          </a:p>
+          <a:p>
+            <a:pPr marL="0" indent="0">
+              <a:lnSpc>
+                <a:spcPct val="90000"/>
+              </a:lnSpc>
+              <a:buNone/>
+            </a:pPr>
+            <a:r>
+              <a:rPr lang="en-US" sz="1200" dirty="0"/>
+              <a:t>Final Takeaway:</a:t>
+            </a:r>
+          </a:p>
+          <a:p>
+            <a:pPr>
+              <a:lnSpc>
+                <a:spcPct val="90000"/>
+              </a:lnSpc>
+            </a:pPr>
+            <a:r>
+              <a:rPr lang="en-US" sz="1200" dirty="0"/>
+              <a:t>"By combining data analysis, predictive modeling, SHAP and deployment, we developed an end-to-end solution to support financial inclusion in Kenya."</a:t>
+            </a:r>
+          </a:p>
+          <a:p>
+            <a:pPr marL="0" indent="0">
+              <a:lnSpc>
+                <a:spcPct val="90000"/>
+              </a:lnSpc>
+              <a:buNone/>
+            </a:pPr>
+            <a:endParaRPr lang="en-US" sz="1200" dirty="0"/>
+          </a:p>
+          <a:p>
+            <a:pPr marL="0" indent="0">
+              <a:lnSpc>
+                <a:spcPct val="90000"/>
+              </a:lnSpc>
+              <a:buNone/>
+            </a:pPr>
+            <a:endParaRPr lang="en-US" sz="1200" dirty="0"/>
+          </a:p>
+          <a:p>
+            <a:pPr marL="0" indent="0">
+              <a:lnSpc>
+                <a:spcPct val="90000"/>
+              </a:lnSpc>
+              <a:buNone/>
+            </a:pPr>
+            <a:r>
+              <a:rPr lang="en-US" sz="1200" b="1" dirty="0"/>
+              <a:t>Thank You for Your Time</a:t>
             </a:r>
           </a:p>
         </p:txBody>
       </p:sp>
-      <p:graphicFrame>
-        <p:nvGraphicFramePr>
-          <p:cNvPr id="5" name="Content Placeholder 2">
-            <a:extLst>
-              <a:ext uri="{FF2B5EF4-FFF2-40B4-BE49-F238E27FC236}">
-                <a16:creationId xmlns:a16="http://schemas.microsoft.com/office/drawing/2014/main" id="{9E584D31-7580-846A-BF2F-464B2DFF16CB}"/>
-              </a:ext>
-            </a:extLst>
-          </p:cNvPr>
-          <p:cNvGraphicFramePr>
-            <a:graphicFrameLocks noGrp="1"/>
-          </p:cNvGraphicFramePr>
-          <p:nvPr>
-            <p:ph idx="1"/>
-            <p:extLst>
-              <p:ext uri="{D42A27DB-BD31-4B8C-83A1-F6EECF244321}">
-                <p14:modId xmlns:p14="http://schemas.microsoft.com/office/powerpoint/2010/main" val="438888448"/>
-              </p:ext>
-            </p:extLst>
-          </p:nvPr>
-        </p:nvGraphicFramePr>
-        <p:xfrm>
-          <a:off x="628650" y="1825625"/>
-          <a:ext cx="7886700" cy="4351338"/>
-        </p:xfrm>
-        <a:graphic>
-          <a:graphicData uri="http://schemas.openxmlformats.org/drawingml/2006/diagram">
-            <dgm:relIds xmlns:dgm="http://schemas.openxmlformats.org/drawingml/2006/diagram" xmlns:r="http://schemas.openxmlformats.org/officeDocument/2006/relationships" r:dm="rId3" r:lo="rId4" r:qs="rId5" r:cs="rId6"/>
-          </a:graphicData>
-        </a:graphic>
-      </p:graphicFrame>
     </p:spTree>
   </p:cSld>
   <p:clrMapOvr>
-    <a:overrideClrMapping bg1="dk1" tx1="lt1" bg2="dk2" tx2="lt2" accent1="accent1" accent2="accent2" accent3="accent3" accent4="accent4" accent5="accent5" accent6="accent6" hlink="hlink" folHlink="folHlink"/>
+    <a:masterClrMapping/>
   </p:clrMapOvr>
 </p:sld>
 </file>
